--- a/Day-9/EF_Core_ASPNET_Core.pptx
+++ b/Day-9/EF_Core_ASPNET_Core.pptx
@@ -2,26 +2,31 @@
 <file path=ppt/presentation.xml><?xml version="1.0" encoding="utf-8"?>
 <p:presentation xmlns:a="http://schemas.openxmlformats.org/drawingml/2006/main" xmlns:r="http://schemas.openxmlformats.org/officeDocument/2006/relationships" xmlns:p="http://schemas.openxmlformats.org/presentationml/2006/main" saveSubsetFonts="1" autoCompressPictures="0">
   <p:sldMasterIdLst>
-    <p:sldMasterId id="2147483660" r:id="rId1"/>
+    <p:sldMasterId id="2147483672" r:id="rId1"/>
   </p:sldMasterIdLst>
   <p:sldIdLst>
-    <p:sldId id="257" r:id="rId2"/>
-    <p:sldId id="258" r:id="rId3"/>
-    <p:sldId id="259" r:id="rId4"/>
-    <p:sldId id="260" r:id="rId5"/>
-    <p:sldId id="261" r:id="rId6"/>
-    <p:sldId id="262" r:id="rId7"/>
-    <p:sldId id="263" r:id="rId8"/>
-    <p:sldId id="264" r:id="rId9"/>
-    <p:sldId id="265" r:id="rId10"/>
-    <p:sldId id="266" r:id="rId11"/>
-    <p:sldId id="267" r:id="rId12"/>
-    <p:sldId id="268" r:id="rId13"/>
-    <p:sldId id="269" r:id="rId14"/>
-    <p:sldId id="270" r:id="rId15"/>
-    <p:sldId id="271" r:id="rId16"/>
-    <p:sldId id="272" r:id="rId17"/>
-    <p:sldId id="273" r:id="rId18"/>
+    <p:sldId id="275" r:id="rId2"/>
+    <p:sldId id="276" r:id="rId3"/>
+    <p:sldId id="277" r:id="rId4"/>
+    <p:sldId id="278" r:id="rId5"/>
+    <p:sldId id="279" r:id="rId6"/>
+    <p:sldId id="280" r:id="rId7"/>
+    <p:sldId id="292" r:id="rId8"/>
+    <p:sldId id="281" r:id="rId9"/>
+    <p:sldId id="282" r:id="rId10"/>
+    <p:sldId id="293" r:id="rId11"/>
+    <p:sldId id="283" r:id="rId12"/>
+    <p:sldId id="284" r:id="rId13"/>
+    <p:sldId id="294" r:id="rId14"/>
+    <p:sldId id="285" r:id="rId15"/>
+    <p:sldId id="286" r:id="rId16"/>
+    <p:sldId id="295" r:id="rId17"/>
+    <p:sldId id="287" r:id="rId18"/>
+    <p:sldId id="288" r:id="rId19"/>
+    <p:sldId id="296" r:id="rId20"/>
+    <p:sldId id="289" r:id="rId21"/>
+    <p:sldId id="290" r:id="rId22"/>
+    <p:sldId id="291" r:id="rId23"/>
   </p:sldIdLst>
   <p:sldSz cx="9144000" cy="6858000" type="screen4x3"/>
   <p:notesSz cx="6858000" cy="9144000"/>
@@ -140,7 +145,7 @@
 </file>
 
 <file path=ppt/slideLayouts/slideLayout1.xml><?xml version="1.0" encoding="utf-8"?>
-<p:sldLayout xmlns:a="http://schemas.openxmlformats.org/drawingml/2006/main" xmlns:r="http://schemas.openxmlformats.org/officeDocument/2006/relationships" xmlns:p="http://schemas.openxmlformats.org/presentationml/2006/main" showMasterSp="0" type="title" preserve="1">
+<p:sldLayout xmlns:a="http://schemas.openxmlformats.org/drawingml/2006/main" xmlns:r="http://schemas.openxmlformats.org/officeDocument/2006/relationships" xmlns:p="http://schemas.openxmlformats.org/presentationml/2006/main" showMasterSp="0" type="title">
   <p:cSld name="Title Slide">
     <p:spTree>
       <p:nvGrpSpPr>
@@ -6772,7 +6777,7 @@
           <a:p>
             <a:fld id="{5BCAD085-E8A6-8845-BD4E-CB4CCA059FC4}" type="datetimeFigureOut">
               <a:rPr lang="en-US" smtClean="0"/>
-              <a:t>3/26/2026</a:t>
+              <a:t>5/25/2026</a:t>
             </a:fld>
             <a:endParaRPr lang="en-US"/>
           </a:p>
@@ -6871,7 +6876,7 @@
 </file>
 
 <file path=ppt/slideLayouts/slideLayout10.xml><?xml version="1.0" encoding="utf-8"?>
-<p:sldLayout xmlns:a="http://schemas.openxmlformats.org/drawingml/2006/main" xmlns:r="http://schemas.openxmlformats.org/officeDocument/2006/relationships" xmlns:p="http://schemas.openxmlformats.org/presentationml/2006/main" type="vertTx" preserve="1">
+<p:sldLayout xmlns:a="http://schemas.openxmlformats.org/drawingml/2006/main" xmlns:r="http://schemas.openxmlformats.org/officeDocument/2006/relationships" xmlns:p="http://schemas.openxmlformats.org/presentationml/2006/main" type="vertTx">
   <p:cSld name="Title and Vertical Text">
     <p:spTree>
       <p:nvGrpSpPr>
@@ -6979,7 +6984,7 @@
           <a:p>
             <a:fld id="{5BCAD085-E8A6-8845-BD4E-CB4CCA059FC4}" type="datetimeFigureOut">
               <a:rPr lang="en-US" smtClean="0"/>
-              <a:t>3/26/2026</a:t>
+              <a:t>5/25/2026</a:t>
             </a:fld>
             <a:endParaRPr lang="en-US"/>
           </a:p>
@@ -7041,7 +7046,7 @@
 </file>
 
 <file path=ppt/slideLayouts/slideLayout11.xml><?xml version="1.0" encoding="utf-8"?>
-<p:sldLayout xmlns:a="http://schemas.openxmlformats.org/drawingml/2006/main" xmlns:r="http://schemas.openxmlformats.org/officeDocument/2006/relationships" xmlns:p="http://schemas.openxmlformats.org/presentationml/2006/main" showMasterSp="0" type="vertTitleAndTx" preserve="1">
+<p:sldLayout xmlns:a="http://schemas.openxmlformats.org/drawingml/2006/main" xmlns:r="http://schemas.openxmlformats.org/officeDocument/2006/relationships" xmlns:p="http://schemas.openxmlformats.org/presentationml/2006/main" showMasterSp="0" type="vertTitleAndTx">
   <p:cSld name="Vertical Title and Text">
     <p:spTree>
       <p:nvGrpSpPr>
@@ -7159,7 +7164,7 @@
           <a:p>
             <a:fld id="{5BCAD085-E8A6-8845-BD4E-CB4CCA059FC4}" type="datetimeFigureOut">
               <a:rPr lang="en-US" smtClean="0"/>
-              <a:t>3/26/2026</a:t>
+              <a:t>5/25/2026</a:t>
             </a:fld>
             <a:endParaRPr lang="en-US"/>
           </a:p>
@@ -7256,7 +7261,7 @@
 </file>
 
 <file path=ppt/slideLayouts/slideLayout2.xml><?xml version="1.0" encoding="utf-8"?>
-<p:sldLayout xmlns:a="http://schemas.openxmlformats.org/drawingml/2006/main" xmlns:r="http://schemas.openxmlformats.org/officeDocument/2006/relationships" xmlns:p="http://schemas.openxmlformats.org/presentationml/2006/main" type="obj" preserve="1">
+<p:sldLayout xmlns:a="http://schemas.openxmlformats.org/drawingml/2006/main" xmlns:r="http://schemas.openxmlformats.org/officeDocument/2006/relationships" xmlns:p="http://schemas.openxmlformats.org/presentationml/2006/main" type="obj">
   <p:cSld name="Title and Content">
     <p:spTree>
       <p:nvGrpSpPr>
@@ -7364,7 +7369,7 @@
           <a:p>
             <a:fld id="{5BCAD085-E8A6-8845-BD4E-CB4CCA059FC4}" type="datetimeFigureOut">
               <a:rPr lang="en-US" smtClean="0"/>
-              <a:t>3/26/2026</a:t>
+              <a:t>5/25/2026</a:t>
             </a:fld>
             <a:endParaRPr lang="en-US"/>
           </a:p>
@@ -7426,7 +7431,7 @@
 </file>
 
 <file path=ppt/slideLayouts/slideLayout3.xml><?xml version="1.0" encoding="utf-8"?>
-<p:sldLayout xmlns:a="http://schemas.openxmlformats.org/drawingml/2006/main" xmlns:r="http://schemas.openxmlformats.org/officeDocument/2006/relationships" xmlns:p="http://schemas.openxmlformats.org/presentationml/2006/main" showMasterSp="0" type="secHead" preserve="1">
+<p:sldLayout xmlns:a="http://schemas.openxmlformats.org/drawingml/2006/main" xmlns:r="http://schemas.openxmlformats.org/officeDocument/2006/relationships" xmlns:p="http://schemas.openxmlformats.org/presentationml/2006/main" showMasterSp="0" type="secHead">
   <p:cSld name="Section Header">
     <p:spTree>
       <p:nvGrpSpPr>
@@ -14102,7 +14107,7 @@
           <a:p>
             <a:fld id="{5BCAD085-E8A6-8845-BD4E-CB4CCA059FC4}" type="datetimeFigureOut">
               <a:rPr lang="en-US" smtClean="0"/>
-              <a:t>3/26/2026</a:t>
+              <a:t>5/25/2026</a:t>
             </a:fld>
             <a:endParaRPr lang="en-US"/>
           </a:p>
@@ -14201,7 +14206,7 @@
 </file>
 
 <file path=ppt/slideLayouts/slideLayout4.xml><?xml version="1.0" encoding="utf-8"?>
-<p:sldLayout xmlns:a="http://schemas.openxmlformats.org/drawingml/2006/main" xmlns:r="http://schemas.openxmlformats.org/officeDocument/2006/relationships" xmlns:p="http://schemas.openxmlformats.org/presentationml/2006/main" type="twoObj" preserve="1">
+<p:sldLayout xmlns:a="http://schemas.openxmlformats.org/drawingml/2006/main" xmlns:r="http://schemas.openxmlformats.org/officeDocument/2006/relationships" xmlns:p="http://schemas.openxmlformats.org/presentationml/2006/main" type="twoObj">
   <p:cSld name="Two Content">
     <p:spTree>
       <p:nvGrpSpPr>
@@ -14376,7 +14381,7 @@
           <a:p>
             <a:fld id="{5BCAD085-E8A6-8845-BD4E-CB4CCA059FC4}" type="datetimeFigureOut">
               <a:rPr lang="en-US" smtClean="0"/>
-              <a:t>3/26/2026</a:t>
+              <a:t>5/25/2026</a:t>
             </a:fld>
             <a:endParaRPr lang="en-US"/>
           </a:p>
@@ -14438,7 +14443,7 @@
 </file>
 
 <file path=ppt/slideLayouts/slideLayout5.xml><?xml version="1.0" encoding="utf-8"?>
-<p:sldLayout xmlns:a="http://schemas.openxmlformats.org/drawingml/2006/main" xmlns:r="http://schemas.openxmlformats.org/officeDocument/2006/relationships" xmlns:p="http://schemas.openxmlformats.org/presentationml/2006/main" type="twoTxTwoObj" preserve="1">
+<p:sldLayout xmlns:a="http://schemas.openxmlformats.org/drawingml/2006/main" xmlns:r="http://schemas.openxmlformats.org/officeDocument/2006/relationships" xmlns:p="http://schemas.openxmlformats.org/presentationml/2006/main" type="twoTxTwoObj">
   <p:cSld name="Comparison">
     <p:spTree>
       <p:nvGrpSpPr>
@@ -14779,7 +14784,7 @@
           <a:p>
             <a:fld id="{5BCAD085-E8A6-8845-BD4E-CB4CCA059FC4}" type="datetimeFigureOut">
               <a:rPr lang="en-US" smtClean="0"/>
-              <a:t>3/26/2026</a:t>
+              <a:t>5/25/2026</a:t>
             </a:fld>
             <a:endParaRPr lang="en-US"/>
           </a:p>
@@ -14841,7 +14846,7 @@
 </file>
 
 <file path=ppt/slideLayouts/slideLayout6.xml><?xml version="1.0" encoding="utf-8"?>
-<p:sldLayout xmlns:a="http://schemas.openxmlformats.org/drawingml/2006/main" xmlns:r="http://schemas.openxmlformats.org/officeDocument/2006/relationships" xmlns:p="http://schemas.openxmlformats.org/presentationml/2006/main" type="titleOnly" preserve="1">
+<p:sldLayout xmlns:a="http://schemas.openxmlformats.org/drawingml/2006/main" xmlns:r="http://schemas.openxmlformats.org/officeDocument/2006/relationships" xmlns:p="http://schemas.openxmlformats.org/presentationml/2006/main" type="titleOnly">
   <p:cSld name="Title Only">
     <p:spTree>
       <p:nvGrpSpPr>
@@ -14897,7 +14902,7 @@
           <a:p>
             <a:fld id="{5BCAD085-E8A6-8845-BD4E-CB4CCA059FC4}" type="datetimeFigureOut">
               <a:rPr lang="en-US" smtClean="0"/>
-              <a:t>3/26/2026</a:t>
+              <a:t>5/25/2026</a:t>
             </a:fld>
             <a:endParaRPr lang="en-US"/>
           </a:p>
@@ -14959,7 +14964,7 @@
 </file>
 
 <file path=ppt/slideLayouts/slideLayout7.xml><?xml version="1.0" encoding="utf-8"?>
-<p:sldLayout xmlns:a="http://schemas.openxmlformats.org/drawingml/2006/main" xmlns:r="http://schemas.openxmlformats.org/officeDocument/2006/relationships" xmlns:p="http://schemas.openxmlformats.org/presentationml/2006/main" showMasterSp="0" type="blank" preserve="1">
+<p:sldLayout xmlns:a="http://schemas.openxmlformats.org/drawingml/2006/main" xmlns:r="http://schemas.openxmlformats.org/officeDocument/2006/relationships" xmlns:p="http://schemas.openxmlformats.org/presentationml/2006/main" showMasterSp="0" type="blank">
   <p:cSld name="Blank">
     <p:spTree>
       <p:nvGrpSpPr>
@@ -14992,7 +14997,7 @@
           <a:p>
             <a:fld id="{5BCAD085-E8A6-8845-BD4E-CB4CCA059FC4}" type="datetimeFigureOut">
               <a:rPr lang="en-US" smtClean="0"/>
-              <a:t>3/26/2026</a:t>
+              <a:t>5/25/2026</a:t>
             </a:fld>
             <a:endParaRPr lang="en-US"/>
           </a:p>
@@ -15054,7 +15059,7 @@
 </file>
 
 <file path=ppt/slideLayouts/slideLayout8.xml><?xml version="1.0" encoding="utf-8"?>
-<p:sldLayout xmlns:a="http://schemas.openxmlformats.org/drawingml/2006/main" xmlns:r="http://schemas.openxmlformats.org/officeDocument/2006/relationships" xmlns:p="http://schemas.openxmlformats.org/presentationml/2006/main" type="objTx" preserve="1">
+<p:sldLayout xmlns:a="http://schemas.openxmlformats.org/drawingml/2006/main" xmlns:r="http://schemas.openxmlformats.org/officeDocument/2006/relationships" xmlns:p="http://schemas.openxmlformats.org/presentationml/2006/main" type="objTx">
   <p:cSld name="Content with Caption">
     <p:spTree>
       <p:nvGrpSpPr>
@@ -15284,7 +15289,7 @@
           <a:p>
             <a:fld id="{5BCAD085-E8A6-8845-BD4E-CB4CCA059FC4}" type="datetimeFigureOut">
               <a:rPr lang="en-US" smtClean="0"/>
-              <a:t>3/26/2026</a:t>
+              <a:t>5/25/2026</a:t>
             </a:fld>
             <a:endParaRPr lang="en-US"/>
           </a:p>
@@ -15346,7 +15351,7 @@
 </file>
 
 <file path=ppt/slideLayouts/slideLayout9.xml><?xml version="1.0" encoding="utf-8"?>
-<p:sldLayout xmlns:a="http://schemas.openxmlformats.org/drawingml/2006/main" xmlns:r="http://schemas.openxmlformats.org/officeDocument/2006/relationships" xmlns:p="http://schemas.openxmlformats.org/presentationml/2006/main" showMasterSp="0" type="picTx" preserve="1">
+<p:sldLayout xmlns:a="http://schemas.openxmlformats.org/drawingml/2006/main" xmlns:r="http://schemas.openxmlformats.org/officeDocument/2006/relationships" xmlns:p="http://schemas.openxmlformats.org/presentationml/2006/main" showMasterSp="0" type="picTx">
   <p:cSld name="Picture with Caption">
     <p:spTree>
       <p:nvGrpSpPr>
@@ -15564,7 +15569,7 @@
           <a:p>
             <a:fld id="{5BCAD085-E8A6-8845-BD4E-CB4CCA059FC4}" type="datetimeFigureOut">
               <a:rPr lang="en-US" smtClean="0"/>
-              <a:t>3/26/2026</a:t>
+              <a:t>5/25/2026</a:t>
             </a:fld>
             <a:endParaRPr lang="en-US"/>
           </a:p>
@@ -15664,9 +15669,20 @@
 <p:sldMaster xmlns:a="http://schemas.openxmlformats.org/drawingml/2006/main" xmlns:r="http://schemas.openxmlformats.org/officeDocument/2006/relationships" xmlns:p="http://schemas.openxmlformats.org/presentationml/2006/main">
   <p:cSld>
     <p:bg>
-      <p:bgRef idx="1001">
-        <a:schemeClr val="bg1"/>
-      </p:bgRef>
+      <p:bgPr>
+        <a:gradFill>
+          <a:gsLst>
+            <a:gs pos="0">
+              <a:srgbClr val="0A1929"/>
+            </a:gs>
+            <a:gs pos="100000">
+              <a:srgbClr val="13293D"/>
+            </a:gs>
+          </a:gsLst>
+          <a:lin ang="5400000" scaled="1"/>
+        </a:gradFill>
+        <a:effectLst/>
+      </p:bgPr>
     </p:bg>
     <p:spTree>
       <p:nvGrpSpPr>
@@ -15814,7 +15830,7 @@
           <a:p>
             <a:fld id="{5BCAD085-E8A6-8845-BD4E-CB4CCA059FC4}" type="datetimeFigureOut">
               <a:rPr lang="en-US" smtClean="0"/>
-              <a:t>3/26/2026</a:t>
+              <a:t>5/25/2026</a:t>
             </a:fld>
             <a:endParaRPr lang="en-US"/>
           </a:p>
@@ -15937,6 +15953,43 @@
           </a:fontRef>
         </p:style>
       </p:cxnSp>
+      <p:sp>
+        <p:nvSpPr>
+          <p:cNvPr id="9001" name="AccentBar"/>
+          <p:cNvSpPr/>
+          <p:nvPr userDrawn="1"/>
+        </p:nvSpPr>
+        <p:spPr>
+          <a:xfrm>
+            <a:off x="0" y="0"/>
+            <a:ext cx="76200" cy="6858000"/>
+          </a:xfrm>
+          <a:prstGeom prst="rect">
+            <a:avLst/>
+          </a:prstGeom>
+          <a:gradFill>
+            <a:gsLst>
+              <a:gs pos="0">
+                <a:srgbClr val="00E5FF"/>
+              </a:gs>
+              <a:gs pos="100000">
+                <a:srgbClr val="7C4DFF"/>
+              </a:gs>
+            </a:gsLst>
+            <a:lin ang="5400000" scaled="1"/>
+          </a:gradFill>
+          <a:ln>
+            <a:noFill/>
+          </a:ln>
+        </p:spPr>
+        <p:txBody>
+          <a:bodyPr/>
+          <a:lstStyle/>
+          <a:p>
+            <a:endParaRPr lang="en-US"/>
+          </a:p>
+        </p:txBody>
+      </p:sp>
     </p:spTree>
     <p:extLst>
       <p:ext uri="{BB962C8B-B14F-4D97-AF65-F5344CB8AC3E}">
@@ -15946,17 +15999,17 @@
   </p:cSld>
   <p:clrMap bg1="lt1" tx1="dk1" bg2="lt2" tx2="dk2" accent1="accent1" accent2="accent2" accent3="accent3" accent4="accent4" accent5="accent5" accent6="accent6" hlink="hlink" folHlink="folHlink"/>
   <p:sldLayoutIdLst>
-    <p:sldLayoutId id="2147483661" r:id="rId1"/>
-    <p:sldLayoutId id="2147483662" r:id="rId2"/>
-    <p:sldLayoutId id="2147483663" r:id="rId3"/>
-    <p:sldLayoutId id="2147483664" r:id="rId4"/>
-    <p:sldLayoutId id="2147483665" r:id="rId5"/>
-    <p:sldLayoutId id="2147483666" r:id="rId6"/>
-    <p:sldLayoutId id="2147483667" r:id="rId7"/>
-    <p:sldLayoutId id="2147483668" r:id="rId8"/>
-    <p:sldLayoutId id="2147483669" r:id="rId9"/>
-    <p:sldLayoutId id="2147483670" r:id="rId10"/>
-    <p:sldLayoutId id="2147483671" r:id="rId11"/>
+    <p:sldLayoutId id="2147483673" r:id="rId1"/>
+    <p:sldLayoutId id="2147483674" r:id="rId2"/>
+    <p:sldLayoutId id="2147483675" r:id="rId3"/>
+    <p:sldLayoutId id="2147483676" r:id="rId4"/>
+    <p:sldLayoutId id="2147483677" r:id="rId5"/>
+    <p:sldLayoutId id="2147483678" r:id="rId6"/>
+    <p:sldLayoutId id="2147483679" r:id="rId7"/>
+    <p:sldLayoutId id="2147483680" r:id="rId8"/>
+    <p:sldLayoutId id="2147483681" r:id="rId9"/>
+    <p:sldLayoutId id="2147483682" r:id="rId10"/>
+    <p:sldLayoutId id="2147483683" r:id="rId11"/>
   </p:sldLayoutIdLst>
   <p:txStyles>
     <p:titleStyle>
@@ -15970,10 +16023,7 @@
         <a:buNone/>
         <a:defRPr sz="4400" kern="1200" cap="all" spc="100" baseline="0">
           <a:solidFill>
-            <a:schemeClr val="tx1">
-              <a:lumMod val="95000"/>
-              <a:lumOff val="5000"/>
-            </a:schemeClr>
+            <a:srgbClr val="00E5FF"/>
           </a:solidFill>
           <a:latin typeface="+mj-lt"/>
           <a:ea typeface="+mj-ea"/>
@@ -16000,7 +16050,7 @@
         <a:buChar char=" "/>
         <a:defRPr sz="2000" kern="1200">
           <a:solidFill>
-            <a:schemeClr val="tx1"/>
+            <a:srgbClr val="E8F4F8"/>
           </a:solidFill>
           <a:latin typeface="+mn-lt"/>
           <a:ea typeface="+mn-ea"/>
@@ -16024,7 +16074,7 @@
         <a:buChar char=""/>
         <a:defRPr sz="1600" kern="1200">
           <a:solidFill>
-            <a:schemeClr val="tx1"/>
+            <a:srgbClr val="E8F4F8"/>
           </a:solidFill>
           <a:latin typeface="+mn-lt"/>
           <a:ea typeface="+mn-ea"/>
@@ -16048,7 +16098,7 @@
         <a:buChar char=""/>
         <a:defRPr sz="1200" kern="1200">
           <a:solidFill>
-            <a:schemeClr val="tx1"/>
+            <a:srgbClr val="E8F4F8"/>
           </a:solidFill>
           <a:latin typeface="+mn-lt"/>
           <a:ea typeface="+mn-ea"/>
@@ -16072,7 +16122,7 @@
         <a:buChar char=""/>
         <a:defRPr sz="1200" kern="1200">
           <a:solidFill>
-            <a:schemeClr val="tx1"/>
+            <a:srgbClr val="E8F4F8"/>
           </a:solidFill>
           <a:latin typeface="+mn-lt"/>
           <a:ea typeface="+mn-ea"/>
@@ -16096,7 +16146,7 @@
         <a:buChar char=""/>
         <a:defRPr sz="1200" kern="1200">
           <a:solidFill>
-            <a:schemeClr val="tx1"/>
+            <a:srgbClr val="E8F4F8"/>
           </a:solidFill>
           <a:latin typeface="+mn-lt"/>
           <a:ea typeface="+mn-ea"/>
@@ -16120,7 +16170,7 @@
         <a:buChar char=""/>
         <a:defRPr sz="1200" kern="1200">
           <a:solidFill>
-            <a:schemeClr val="tx1"/>
+            <a:srgbClr val="E8F4F8"/>
           </a:solidFill>
           <a:latin typeface="+mn-lt"/>
           <a:ea typeface="+mn-ea"/>
@@ -16144,7 +16194,7 @@
         <a:buChar char=""/>
         <a:defRPr sz="1200" kern="1200">
           <a:solidFill>
-            <a:schemeClr val="tx1"/>
+            <a:srgbClr val="E8F4F8"/>
           </a:solidFill>
           <a:latin typeface="+mn-lt"/>
           <a:ea typeface="+mn-ea"/>
@@ -16168,7 +16218,7 @@
         <a:buChar char=""/>
         <a:defRPr sz="1200" kern="1200">
           <a:solidFill>
-            <a:schemeClr val="tx1"/>
+            <a:srgbClr val="E8F4F8"/>
           </a:solidFill>
           <a:latin typeface="+mn-lt"/>
           <a:ea typeface="+mn-ea"/>
@@ -16192,7 +16242,7 @@
         <a:buChar char=""/>
         <a:defRPr sz="1200" kern="1200">
           <a:solidFill>
-            <a:schemeClr val="tx1"/>
+            <a:srgbClr val="E8F4F8"/>
           </a:solidFill>
           <a:latin typeface="+mn-lt"/>
           <a:ea typeface="+mn-ea"/>
@@ -16352,28 +16402,73 @@
           <a:bodyPr/>
           <a:lstStyle/>
           <a:p>
-            <a:r>
-              <a:t>ORM framework</a:t>
-            </a:r>
-          </a:p>
-          <a:p>
-            <a:r>
-              <a:t>Eliminates manual SQL</a:t>
-            </a:r>
-          </a:p>
-          <a:p>
-            <a:r>
-              <a:t>Works with .NET Core</a:t>
-            </a:r>
-          </a:p>
-          <a:p>
-            <a:r>
-              <a:t>Supports LINQ</a:t>
+            <a:pPr marL="285750" indent="-285750">
+              <a:buFont typeface="Arial"/>
+              <a:buChar char="•"/>
+            </a:pPr>
+            <a:r>
+              <a:rPr lang="en-US" sz="1800" dirty="0"/>
+              <a:t>Object-Relational Mapper (ORM) for .NET — maps C# classes to database tables</a:t>
+            </a:r>
+          </a:p>
+          <a:p>
+            <a:pPr marL="285750" indent="-285750">
+              <a:buFont typeface="Arial"/>
+              <a:buChar char="•"/>
+            </a:pPr>
+            <a:r>
+              <a:rPr lang="en-US" sz="1800" dirty="0"/>
+              <a:t>Eliminates hand-written SQL for most CRUD operations</a:t>
+            </a:r>
+          </a:p>
+          <a:p>
+            <a:pPr marL="285750" indent="-285750">
+              <a:buFont typeface="Arial"/>
+              <a:buChar char="•"/>
+            </a:pPr>
+            <a:r>
+              <a:rPr lang="en-US" sz="1800" dirty="0"/>
+              <a:t>Cross-platform: runs on Windows, Linux, macOS with .NET Core / .NET 6+</a:t>
+            </a:r>
+          </a:p>
+          <a:p>
+            <a:pPr marL="285750" indent="-285750">
+              <a:buFont typeface="Arial"/>
+              <a:buChar char="•"/>
+            </a:pPr>
+            <a:r>
+              <a:rPr lang="en-US" sz="1800" dirty="0"/>
+              <a:t>Provider model: SQL Server, PostgreSQL, MySQL, SQLite, Cosmos DB</a:t>
+            </a:r>
+          </a:p>
+          <a:p>
+            <a:pPr marL="285750" indent="-285750">
+              <a:buFont typeface="Arial"/>
+              <a:buChar char="•"/>
+            </a:pPr>
+            <a:r>
+              <a:rPr lang="en-US" sz="1800" dirty="0"/>
+              <a:t>LINQ support — write strongly-typed queries in C#</a:t>
+            </a:r>
+          </a:p>
+          <a:p>
+            <a:pPr marL="285750" indent="-285750">
+              <a:buFont typeface="Arial"/>
+              <a:buChar char="•"/>
+            </a:pPr>
+            <a:r>
+              <a:rPr lang="en-US" sz="1800" dirty="0"/>
+              <a:t>Open source, actively developed by Microsoft</a:t>
             </a:r>
           </a:p>
         </p:txBody>
       </p:sp>
     </p:spTree>
+    <p:extLst>
+      <p:ext uri="{BB962C8B-B14F-4D97-AF65-F5344CB8AC3E}">
+        <p14:creationId xmlns:p14="http://schemas.microsoft.com/office/powerpoint/2010/main" val="3269088969"/>
+      </p:ext>
+    </p:extLst>
   </p:cSld>
   <p:clrMapOvr>
     <a:masterClrMapping/>
@@ -16400,52 +16495,774 @@
       </p:grpSpPr>
       <p:sp>
         <p:nvSpPr>
-          <p:cNvPr id="2" name="Title 1"/>
-          <p:cNvSpPr>
-            <a:spLocks noGrp="1"/>
-          </p:cNvSpPr>
-          <p:nvPr>
-            <p:ph type="title"/>
-          </p:nvPr>
+          <p:cNvPr id="2" name="Rectangle: Rounded Corners 1">
+            <a:extLst>
+              <a:ext uri="{FF2B5EF4-FFF2-40B4-BE49-F238E27FC236}">
+                <a16:creationId xmlns:a16="http://schemas.microsoft.com/office/drawing/2014/main" id="{42240A0A-4A05-471A-A7BA-650183F763F4}"/>
+              </a:ext>
+            </a:extLst>
+          </p:cNvPr>
+          <p:cNvSpPr/>
+          <p:nvPr/>
         </p:nvSpPr>
-        <p:spPr/>
+        <p:spPr>
+          <a:xfrm>
+            <a:off x="508000" y="381000"/>
+            <a:ext cx="1651000" cy="457200"/>
+          </a:xfrm>
+          <a:prstGeom prst="roundRect">
+            <a:avLst/>
+          </a:prstGeom>
+          <a:solidFill>
+            <a:srgbClr val="FF6E40"/>
+          </a:solidFill>
+          <a:ln w="15875" cap="flat" cmpd="sng" algn="ctr">
+            <a:noFill/>
+            <a:prstDash val="solid"/>
+          </a:ln>
+        </p:spPr>
+        <p:style>
+          <a:lnRef idx="2">
+            <a:schemeClr val="accent1">
+              <a:shade val="15000"/>
+            </a:schemeClr>
+          </a:lnRef>
+          <a:fillRef idx="1">
+            <a:schemeClr val="accent1"/>
+          </a:fillRef>
+          <a:effectRef idx="0">
+            <a:schemeClr val="accent1"/>
+          </a:effectRef>
+          <a:fontRef idx="minor">
+            <a:schemeClr val="lt1"/>
+          </a:fontRef>
+        </p:style>
         <p:txBody>
-          <a:bodyPr/>
+          <a:bodyPr vertOverflow="clip" horzOverflow="clip" rtlCol="0" anchor="ctr" anchorCtr="0">
+            <a:noAutofit/>
+          </a:bodyPr>
           <a:lstStyle/>
           <a:p>
-            <a:r>
-              <a:t>CRUD Operations</a:t>
+            <a:pPr algn="l"/>
+            <a:r>
+              <a:rPr lang="en-IN" sz="1600" b="1">
+                <a:solidFill>
+                  <a:srgbClr val="FFFFFF"/>
+                </a:solidFill>
+                <a:latin typeface="Segoe UI"/>
+                <a:cs typeface="Segoe UI"/>
+              </a:rPr>
+              <a:t>🧪 LAB 2</a:t>
             </a:r>
           </a:p>
         </p:txBody>
       </p:sp>
       <p:sp>
         <p:nvSpPr>
-          <p:cNvPr id="3" name="Content Placeholder 2"/>
-          <p:cNvSpPr>
-            <a:spLocks noGrp="1"/>
-          </p:cNvSpPr>
-          <p:nvPr>
-            <p:ph idx="1"/>
-          </p:nvPr>
+          <p:cNvPr id="3" name="TextBox 2">
+            <a:extLst>
+              <a:ext uri="{FF2B5EF4-FFF2-40B4-BE49-F238E27FC236}">
+                <a16:creationId xmlns:a16="http://schemas.microsoft.com/office/drawing/2014/main" id="{BF334E66-8C7B-452D-9030-7F186E68D985}"/>
+              </a:ext>
+            </a:extLst>
+          </p:cNvPr>
+          <p:cNvSpPr txBox="1"/>
+          <p:nvPr/>
         </p:nvSpPr>
-        <p:spPr/>
+        <p:spPr>
+          <a:xfrm>
+            <a:off x="2349500" y="381000"/>
+            <a:ext cx="6286500" cy="508000"/>
+          </a:xfrm>
+          <a:prstGeom prst="rect">
+            <a:avLst/>
+          </a:prstGeom>
+          <a:noFill/>
+        </p:spPr>
         <p:txBody>
-          <a:bodyPr/>
+          <a:bodyPr vertOverflow="overflow" vert="horz" wrap="square" rtlCol="0" anchor="ctr" anchorCtr="0">
+            <a:noAutofit/>
+          </a:bodyPr>
           <a:lstStyle/>
           <a:p>
-            <a:r>
-              <a:t>Add, Update, Delete, Get</a:t>
-            </a:r>
-          </a:p>
-          <a:p>
-            <a:r>
-              <a:t>SaveChanges() required</a:t>
-            </a:r>
+            <a:pPr algn="l"/>
+            <a:r>
+              <a:rPr lang="en-US" sz="2800" b="1">
+                <a:solidFill>
+                  <a:srgbClr val="00E5FF"/>
+                </a:solidFill>
+                <a:latin typeface="Segoe UI"/>
+                <a:cs typeface="Segoe UI"/>
+              </a:rPr>
+              <a:t>Wire EF Into a Web API</a:t>
+            </a:r>
+            <a:endParaRPr lang="en-IN" sz="2800" b="1">
+              <a:solidFill>
+                <a:srgbClr val="00E5FF"/>
+              </a:solidFill>
+              <a:latin typeface="Segoe UI"/>
+              <a:cs typeface="Segoe UI"/>
+            </a:endParaRPr>
+          </a:p>
+        </p:txBody>
+      </p:sp>
+      <p:sp>
+        <p:nvSpPr>
+          <p:cNvPr id="4" name="TextBox 3">
+            <a:extLst>
+              <a:ext uri="{FF2B5EF4-FFF2-40B4-BE49-F238E27FC236}">
+                <a16:creationId xmlns:a16="http://schemas.microsoft.com/office/drawing/2014/main" id="{EC0B62BD-7AFF-4356-9F36-30C109EC56B4}"/>
+              </a:ext>
+            </a:extLst>
+          </p:cNvPr>
+          <p:cNvSpPr txBox="1"/>
+          <p:nvPr/>
+        </p:nvSpPr>
+        <p:spPr>
+          <a:xfrm>
+            <a:off x="508000" y="1143000"/>
+            <a:ext cx="8128000" cy="228600"/>
+          </a:xfrm>
+          <a:prstGeom prst="rect">
+            <a:avLst/>
+          </a:prstGeom>
+          <a:noFill/>
+        </p:spPr>
+        <p:txBody>
+          <a:bodyPr vertOverflow="overflow" vert="horz" wrap="square" rtlCol="0" anchor="t" anchorCtr="0">
+            <a:spAutoFit/>
+          </a:bodyPr>
+          <a:lstStyle/>
+          <a:p>
+            <a:pPr algn="l"/>
+            <a:r>
+              <a:rPr lang="en-IN" sz="1100" b="1">
+                <a:solidFill>
+                  <a:srgbClr val="64FFDA"/>
+                </a:solidFill>
+                <a:latin typeface="Segoe UI"/>
+                <a:cs typeface="Segoe UI"/>
+              </a:rPr>
+              <a:t>SCENARIO</a:t>
+            </a:r>
+          </a:p>
+        </p:txBody>
+      </p:sp>
+      <p:sp>
+        <p:nvSpPr>
+          <p:cNvPr id="5" name="TextBox 4">
+            <a:extLst>
+              <a:ext uri="{FF2B5EF4-FFF2-40B4-BE49-F238E27FC236}">
+                <a16:creationId xmlns:a16="http://schemas.microsoft.com/office/drawing/2014/main" id="{B7B84356-0A67-48C3-8F4B-69DD100515FB}"/>
+              </a:ext>
+            </a:extLst>
+          </p:cNvPr>
+          <p:cNvSpPr txBox="1"/>
+          <p:nvPr/>
+        </p:nvSpPr>
+        <p:spPr>
+          <a:xfrm>
+            <a:off x="508000" y="1397000"/>
+            <a:ext cx="8128000" cy="762000"/>
+          </a:xfrm>
+          <a:prstGeom prst="rect">
+            <a:avLst/>
+          </a:prstGeom>
+          <a:noFill/>
+        </p:spPr>
+        <p:txBody>
+          <a:bodyPr vertOverflow="overflow" vert="horz" wrap="square" rtlCol="0" anchor="t" anchorCtr="0">
+            <a:spAutoFit/>
+          </a:bodyPr>
+          <a:lstStyle/>
+          <a:p>
+            <a:pPr algn="l"/>
+            <a:r>
+              <a:rPr lang="en-US" sz="1600">
+                <a:solidFill>
+                  <a:srgbClr val="E8F4F8"/>
+                </a:solidFill>
+                <a:latin typeface="Segoe UI"/>
+                <a:cs typeface="Segoe UI"/>
+              </a:rPr>
+              <a:t>Add a DbContext to a minimal ASP.NET Core API using dependency injection. Verify the request-scoped lifetime.</a:t>
+            </a:r>
+            <a:endParaRPr lang="en-IN" sz="1600">
+              <a:solidFill>
+                <a:srgbClr val="E8F4F8"/>
+              </a:solidFill>
+              <a:latin typeface="Segoe UI"/>
+              <a:cs typeface="Segoe UI"/>
+            </a:endParaRPr>
+          </a:p>
+        </p:txBody>
+      </p:sp>
+      <p:sp>
+        <p:nvSpPr>
+          <p:cNvPr id="6" name="TextBox 5">
+            <a:extLst>
+              <a:ext uri="{FF2B5EF4-FFF2-40B4-BE49-F238E27FC236}">
+                <a16:creationId xmlns:a16="http://schemas.microsoft.com/office/drawing/2014/main" id="{1D29EEC8-071A-457C-A6B6-E78D50BC4BFA}"/>
+              </a:ext>
+            </a:extLst>
+          </p:cNvPr>
+          <p:cNvSpPr txBox="1"/>
+          <p:nvPr/>
+        </p:nvSpPr>
+        <p:spPr>
+          <a:xfrm>
+            <a:off x="508000" y="2286000"/>
+            <a:ext cx="8128000" cy="228600"/>
+          </a:xfrm>
+          <a:prstGeom prst="rect">
+            <a:avLst/>
+          </a:prstGeom>
+          <a:noFill/>
+        </p:spPr>
+        <p:txBody>
+          <a:bodyPr vertOverflow="overflow" vert="horz" wrap="square" rtlCol="0" anchor="t" anchorCtr="0">
+            <a:spAutoFit/>
+          </a:bodyPr>
+          <a:lstStyle/>
+          <a:p>
+            <a:pPr algn="l"/>
+            <a:r>
+              <a:rPr lang="en-IN" sz="1100" b="1">
+                <a:solidFill>
+                  <a:srgbClr val="64FFDA"/>
+                </a:solidFill>
+                <a:latin typeface="Segoe UI"/>
+                <a:cs typeface="Segoe UI"/>
+              </a:rPr>
+              <a:t>YOUR TASKS</a:t>
+            </a:r>
+          </a:p>
+        </p:txBody>
+      </p:sp>
+      <p:sp>
+        <p:nvSpPr>
+          <p:cNvPr id="7" name="Oval 6">
+            <a:extLst>
+              <a:ext uri="{FF2B5EF4-FFF2-40B4-BE49-F238E27FC236}">
+                <a16:creationId xmlns:a16="http://schemas.microsoft.com/office/drawing/2014/main" id="{B1753D43-EB88-43B4-AEC7-D78B9B3A503C}"/>
+              </a:ext>
+            </a:extLst>
+          </p:cNvPr>
+          <p:cNvSpPr/>
+          <p:nvPr/>
+        </p:nvSpPr>
+        <p:spPr>
+          <a:xfrm>
+            <a:off x="571500" y="2603500"/>
+            <a:ext cx="355600" cy="355600"/>
+          </a:xfrm>
+          <a:prstGeom prst="ellipse">
+            <a:avLst/>
+          </a:prstGeom>
+          <a:solidFill>
+            <a:srgbClr val="7C4DFF"/>
+          </a:solidFill>
+          <a:ln w="15875" cap="flat" cmpd="sng" algn="ctr">
+            <a:noFill/>
+            <a:prstDash val="solid"/>
+          </a:ln>
+        </p:spPr>
+        <p:style>
+          <a:lnRef idx="2">
+            <a:schemeClr val="accent1">
+              <a:shade val="15000"/>
+            </a:schemeClr>
+          </a:lnRef>
+          <a:fillRef idx="1">
+            <a:schemeClr val="accent1"/>
+          </a:fillRef>
+          <a:effectRef idx="0">
+            <a:schemeClr val="accent1"/>
+          </a:effectRef>
+          <a:fontRef idx="minor">
+            <a:schemeClr val="lt1"/>
+          </a:fontRef>
+        </p:style>
+        <p:txBody>
+          <a:bodyPr vertOverflow="clip" horzOverflow="clip" wrap="none" rtlCol="0" anchor="ctr" anchorCtr="0">
+            <a:noAutofit/>
+          </a:bodyPr>
+          <a:lstStyle/>
+          <a:p>
+            <a:pPr algn="l"/>
+            <a:r>
+              <a:rPr lang="en-IN" sz="1400" b="1">
+                <a:solidFill>
+                  <a:srgbClr val="FFFFFF"/>
+                </a:solidFill>
+                <a:latin typeface="Segoe UI"/>
+                <a:cs typeface="Segoe UI"/>
+              </a:rPr>
+              <a:t>1</a:t>
+            </a:r>
+          </a:p>
+        </p:txBody>
+      </p:sp>
+      <p:sp>
+        <p:nvSpPr>
+          <p:cNvPr id="8" name="TextBox 7">
+            <a:extLst>
+              <a:ext uri="{FF2B5EF4-FFF2-40B4-BE49-F238E27FC236}">
+                <a16:creationId xmlns:a16="http://schemas.microsoft.com/office/drawing/2014/main" id="{4C1E2456-F8FD-46C7-AB43-2C68740F0FA1}"/>
+              </a:ext>
+            </a:extLst>
+          </p:cNvPr>
+          <p:cNvSpPr txBox="1"/>
+          <p:nvPr/>
+        </p:nvSpPr>
+        <p:spPr>
+          <a:xfrm>
+            <a:off x="1079500" y="2603500"/>
+            <a:ext cx="7556500" cy="457200"/>
+          </a:xfrm>
+          <a:prstGeom prst="rect">
+            <a:avLst/>
+          </a:prstGeom>
+          <a:noFill/>
+        </p:spPr>
+        <p:txBody>
+          <a:bodyPr vertOverflow="overflow" vert="horz" wrap="square" rtlCol="0" anchor="t" anchorCtr="0">
+            <a:noAutofit/>
+          </a:bodyPr>
+          <a:lstStyle/>
+          <a:p>
+            <a:pPr algn="l"/>
+            <a:r>
+              <a:rPr lang="en-IN" sz="1500">
+                <a:solidFill>
+                  <a:srgbClr val="E8F4F8"/>
+                </a:solidFill>
+                <a:latin typeface="Segoe UI"/>
+                <a:cs typeface="Segoe UI"/>
+              </a:rPr>
+              <a:t>AddDbContext&lt;StoreContext&gt;(opt =&gt; opt.UseSqlServer(cfg.GetConnectionString("Db")))</a:t>
+            </a:r>
+          </a:p>
+        </p:txBody>
+      </p:sp>
+      <p:sp>
+        <p:nvSpPr>
+          <p:cNvPr id="9" name="Oval 8">
+            <a:extLst>
+              <a:ext uri="{FF2B5EF4-FFF2-40B4-BE49-F238E27FC236}">
+                <a16:creationId xmlns:a16="http://schemas.microsoft.com/office/drawing/2014/main" id="{398A75EC-08A4-4729-9925-95B8489877B7}"/>
+              </a:ext>
+            </a:extLst>
+          </p:cNvPr>
+          <p:cNvSpPr/>
+          <p:nvPr/>
+        </p:nvSpPr>
+        <p:spPr>
+          <a:xfrm>
+            <a:off x="571500" y="3136900"/>
+            <a:ext cx="355600" cy="355600"/>
+          </a:xfrm>
+          <a:prstGeom prst="ellipse">
+            <a:avLst/>
+          </a:prstGeom>
+          <a:solidFill>
+            <a:srgbClr val="7C4DFF"/>
+          </a:solidFill>
+          <a:ln w="15875" cap="flat" cmpd="sng" algn="ctr">
+            <a:noFill/>
+            <a:prstDash val="solid"/>
+          </a:ln>
+        </p:spPr>
+        <p:style>
+          <a:lnRef idx="2">
+            <a:schemeClr val="accent1">
+              <a:shade val="15000"/>
+            </a:schemeClr>
+          </a:lnRef>
+          <a:fillRef idx="1">
+            <a:schemeClr val="accent1"/>
+          </a:fillRef>
+          <a:effectRef idx="0">
+            <a:schemeClr val="accent1"/>
+          </a:effectRef>
+          <a:fontRef idx="minor">
+            <a:schemeClr val="lt1"/>
+          </a:fontRef>
+        </p:style>
+        <p:txBody>
+          <a:bodyPr vertOverflow="clip" horzOverflow="clip" wrap="none" rtlCol="0" anchor="ctr" anchorCtr="0">
+            <a:noAutofit/>
+          </a:bodyPr>
+          <a:lstStyle/>
+          <a:p>
+            <a:pPr algn="l"/>
+            <a:r>
+              <a:rPr lang="en-IN" sz="1400" b="1">
+                <a:solidFill>
+                  <a:srgbClr val="FFFFFF"/>
+                </a:solidFill>
+                <a:latin typeface="Segoe UI"/>
+                <a:cs typeface="Segoe UI"/>
+              </a:rPr>
+              <a:t>2</a:t>
+            </a:r>
+          </a:p>
+        </p:txBody>
+      </p:sp>
+      <p:sp>
+        <p:nvSpPr>
+          <p:cNvPr id="10" name="TextBox 9">
+            <a:extLst>
+              <a:ext uri="{FF2B5EF4-FFF2-40B4-BE49-F238E27FC236}">
+                <a16:creationId xmlns:a16="http://schemas.microsoft.com/office/drawing/2014/main" id="{8896946B-7CC4-4A69-A4D9-7E187CC565B6}"/>
+              </a:ext>
+            </a:extLst>
+          </p:cNvPr>
+          <p:cNvSpPr txBox="1"/>
+          <p:nvPr/>
+        </p:nvSpPr>
+        <p:spPr>
+          <a:xfrm>
+            <a:off x="1079500" y="3136900"/>
+            <a:ext cx="7556500" cy="457200"/>
+          </a:xfrm>
+          <a:prstGeom prst="rect">
+            <a:avLst/>
+          </a:prstGeom>
+          <a:noFill/>
+        </p:spPr>
+        <p:txBody>
+          <a:bodyPr vertOverflow="overflow" vert="horz" wrap="square" rtlCol="0" anchor="t" anchorCtr="0">
+            <a:noAutofit/>
+          </a:bodyPr>
+          <a:lstStyle/>
+          <a:p>
+            <a:pPr algn="l"/>
+            <a:r>
+              <a:rPr lang="en-US" sz="1500">
+                <a:solidFill>
+                  <a:srgbClr val="E8F4F8"/>
+                </a:solidFill>
+                <a:latin typeface="Segoe UI"/>
+                <a:cs typeface="Segoe UI"/>
+              </a:rPr>
+              <a:t>Inject StoreContext into a /products endpoint</a:t>
+            </a:r>
+            <a:endParaRPr lang="en-IN" sz="1500">
+              <a:solidFill>
+                <a:srgbClr val="E8F4F8"/>
+              </a:solidFill>
+              <a:latin typeface="Segoe UI"/>
+              <a:cs typeface="Segoe UI"/>
+            </a:endParaRPr>
+          </a:p>
+        </p:txBody>
+      </p:sp>
+      <p:sp>
+        <p:nvSpPr>
+          <p:cNvPr id="11" name="Oval 10">
+            <a:extLst>
+              <a:ext uri="{FF2B5EF4-FFF2-40B4-BE49-F238E27FC236}">
+                <a16:creationId xmlns:a16="http://schemas.microsoft.com/office/drawing/2014/main" id="{FBD09102-B146-4828-A132-7CEEC98F033E}"/>
+              </a:ext>
+            </a:extLst>
+          </p:cNvPr>
+          <p:cNvSpPr/>
+          <p:nvPr/>
+        </p:nvSpPr>
+        <p:spPr>
+          <a:xfrm>
+            <a:off x="571500" y="3670300"/>
+            <a:ext cx="355600" cy="355600"/>
+          </a:xfrm>
+          <a:prstGeom prst="ellipse">
+            <a:avLst/>
+          </a:prstGeom>
+          <a:solidFill>
+            <a:srgbClr val="7C4DFF"/>
+          </a:solidFill>
+          <a:ln w="15875" cap="flat" cmpd="sng" algn="ctr">
+            <a:noFill/>
+            <a:prstDash val="solid"/>
+          </a:ln>
+        </p:spPr>
+        <p:style>
+          <a:lnRef idx="2">
+            <a:schemeClr val="accent1">
+              <a:shade val="15000"/>
+            </a:schemeClr>
+          </a:lnRef>
+          <a:fillRef idx="1">
+            <a:schemeClr val="accent1"/>
+          </a:fillRef>
+          <a:effectRef idx="0">
+            <a:schemeClr val="accent1"/>
+          </a:effectRef>
+          <a:fontRef idx="minor">
+            <a:schemeClr val="lt1"/>
+          </a:fontRef>
+        </p:style>
+        <p:txBody>
+          <a:bodyPr vertOverflow="clip" horzOverflow="clip" wrap="none" rtlCol="0" anchor="ctr" anchorCtr="0">
+            <a:noAutofit/>
+          </a:bodyPr>
+          <a:lstStyle/>
+          <a:p>
+            <a:pPr algn="l"/>
+            <a:r>
+              <a:rPr lang="en-IN" sz="1400" b="1">
+                <a:solidFill>
+                  <a:srgbClr val="FFFFFF"/>
+                </a:solidFill>
+                <a:latin typeface="Segoe UI"/>
+                <a:cs typeface="Segoe UI"/>
+              </a:rPr>
+              <a:t>3</a:t>
+            </a:r>
+          </a:p>
+        </p:txBody>
+      </p:sp>
+      <p:sp>
+        <p:nvSpPr>
+          <p:cNvPr id="12" name="TextBox 11">
+            <a:extLst>
+              <a:ext uri="{FF2B5EF4-FFF2-40B4-BE49-F238E27FC236}">
+                <a16:creationId xmlns:a16="http://schemas.microsoft.com/office/drawing/2014/main" id="{EF03F85A-4C7D-4E55-AE27-E50F74DC1B32}"/>
+              </a:ext>
+            </a:extLst>
+          </p:cNvPr>
+          <p:cNvSpPr txBox="1"/>
+          <p:nvPr/>
+        </p:nvSpPr>
+        <p:spPr>
+          <a:xfrm>
+            <a:off x="1079500" y="3670300"/>
+            <a:ext cx="7556500" cy="457200"/>
+          </a:xfrm>
+          <a:prstGeom prst="rect">
+            <a:avLst/>
+          </a:prstGeom>
+          <a:noFill/>
+        </p:spPr>
+        <p:txBody>
+          <a:bodyPr vertOverflow="overflow" vert="horz" wrap="square" rtlCol="0" anchor="t" anchorCtr="0">
+            <a:noAutofit/>
+          </a:bodyPr>
+          <a:lstStyle/>
+          <a:p>
+            <a:pPr algn="l"/>
+            <a:r>
+              <a:rPr lang="en-US" sz="1500">
+                <a:solidFill>
+                  <a:srgbClr val="E8F4F8"/>
+                </a:solidFill>
+                <a:latin typeface="Segoe UI"/>
+                <a:cs typeface="Segoe UI"/>
+              </a:rPr>
+              <a:t>Add appsettings.json with the connection string</a:t>
+            </a:r>
+            <a:endParaRPr lang="en-IN" sz="1500">
+              <a:solidFill>
+                <a:srgbClr val="E8F4F8"/>
+              </a:solidFill>
+              <a:latin typeface="Segoe UI"/>
+              <a:cs typeface="Segoe UI"/>
+            </a:endParaRPr>
+          </a:p>
+        </p:txBody>
+      </p:sp>
+      <p:sp>
+        <p:nvSpPr>
+          <p:cNvPr id="13" name="Oval 12">
+            <a:extLst>
+              <a:ext uri="{FF2B5EF4-FFF2-40B4-BE49-F238E27FC236}">
+                <a16:creationId xmlns:a16="http://schemas.microsoft.com/office/drawing/2014/main" id="{36E45A2E-D5EC-445F-87D1-E554E5AEEBD4}"/>
+              </a:ext>
+            </a:extLst>
+          </p:cNvPr>
+          <p:cNvSpPr/>
+          <p:nvPr/>
+        </p:nvSpPr>
+        <p:spPr>
+          <a:xfrm>
+            <a:off x="571500" y="4203700"/>
+            <a:ext cx="355600" cy="355600"/>
+          </a:xfrm>
+          <a:prstGeom prst="ellipse">
+            <a:avLst/>
+          </a:prstGeom>
+          <a:solidFill>
+            <a:srgbClr val="7C4DFF"/>
+          </a:solidFill>
+          <a:ln w="15875" cap="flat" cmpd="sng" algn="ctr">
+            <a:noFill/>
+            <a:prstDash val="solid"/>
+          </a:ln>
+        </p:spPr>
+        <p:style>
+          <a:lnRef idx="2">
+            <a:schemeClr val="accent1">
+              <a:shade val="15000"/>
+            </a:schemeClr>
+          </a:lnRef>
+          <a:fillRef idx="1">
+            <a:schemeClr val="accent1"/>
+          </a:fillRef>
+          <a:effectRef idx="0">
+            <a:schemeClr val="accent1"/>
+          </a:effectRef>
+          <a:fontRef idx="minor">
+            <a:schemeClr val="lt1"/>
+          </a:fontRef>
+        </p:style>
+        <p:txBody>
+          <a:bodyPr vertOverflow="clip" horzOverflow="clip" wrap="none" rtlCol="0" anchor="ctr" anchorCtr="0">
+            <a:noAutofit/>
+          </a:bodyPr>
+          <a:lstStyle/>
+          <a:p>
+            <a:pPr algn="l"/>
+            <a:r>
+              <a:rPr lang="en-IN" sz="1400" b="1">
+                <a:solidFill>
+                  <a:srgbClr val="FFFFFF"/>
+                </a:solidFill>
+                <a:latin typeface="Segoe UI"/>
+                <a:cs typeface="Segoe UI"/>
+              </a:rPr>
+              <a:t>4</a:t>
+            </a:r>
+          </a:p>
+        </p:txBody>
+      </p:sp>
+      <p:sp>
+        <p:nvSpPr>
+          <p:cNvPr id="14" name="TextBox 13">
+            <a:extLst>
+              <a:ext uri="{FF2B5EF4-FFF2-40B4-BE49-F238E27FC236}">
+                <a16:creationId xmlns:a16="http://schemas.microsoft.com/office/drawing/2014/main" id="{C934DEF7-899E-4FA8-85DF-32288FF73F93}"/>
+              </a:ext>
+            </a:extLst>
+          </p:cNvPr>
+          <p:cNvSpPr txBox="1"/>
+          <p:nvPr/>
+        </p:nvSpPr>
+        <p:spPr>
+          <a:xfrm>
+            <a:off x="1079500" y="4203700"/>
+            <a:ext cx="7556500" cy="457200"/>
+          </a:xfrm>
+          <a:prstGeom prst="rect">
+            <a:avLst/>
+          </a:prstGeom>
+          <a:noFill/>
+        </p:spPr>
+        <p:txBody>
+          <a:bodyPr vertOverflow="overflow" vert="horz" wrap="square" rtlCol="0" anchor="t" anchorCtr="0">
+            <a:noAutofit/>
+          </a:bodyPr>
+          <a:lstStyle/>
+          <a:p>
+            <a:pPr algn="l"/>
+            <a:r>
+              <a:rPr lang="en-US" sz="1500">
+                <a:solidFill>
+                  <a:srgbClr val="E8F4F8"/>
+                </a:solidFill>
+                <a:latin typeface="Segoe UI"/>
+                <a:cs typeface="Segoe UI"/>
+              </a:rPr>
+              <a:t>Hit the endpoint twice — verify a new context per request</a:t>
+            </a:r>
+            <a:endParaRPr lang="en-IN" sz="1500">
+              <a:solidFill>
+                <a:srgbClr val="E8F4F8"/>
+              </a:solidFill>
+              <a:latin typeface="Segoe UI"/>
+              <a:cs typeface="Segoe UI"/>
+            </a:endParaRPr>
+          </a:p>
+        </p:txBody>
+      </p:sp>
+      <p:sp>
+        <p:nvSpPr>
+          <p:cNvPr id="15" name="Rectangle: Rounded Corners 14">
+            <a:extLst>
+              <a:ext uri="{FF2B5EF4-FFF2-40B4-BE49-F238E27FC236}">
+                <a16:creationId xmlns:a16="http://schemas.microsoft.com/office/drawing/2014/main" id="{80AC1B17-FEB3-456E-8302-E8311654FA51}"/>
+              </a:ext>
+            </a:extLst>
+          </p:cNvPr>
+          <p:cNvSpPr/>
+          <p:nvPr/>
+        </p:nvSpPr>
+        <p:spPr>
+          <a:xfrm>
+            <a:off x="508000" y="5842000"/>
+            <a:ext cx="8128000" cy="736600"/>
+          </a:xfrm>
+          <a:prstGeom prst="roundRect">
+            <a:avLst/>
+          </a:prstGeom>
+          <a:solidFill>
+            <a:srgbClr val="1A3A52"/>
+          </a:solidFill>
+          <a:ln w="19050" cap="flat" cmpd="sng" algn="ctr">
+            <a:solidFill>
+              <a:srgbClr val="64FFDA"/>
+            </a:solidFill>
+            <a:prstDash val="solid"/>
+          </a:ln>
+        </p:spPr>
+        <p:style>
+          <a:lnRef idx="2">
+            <a:schemeClr val="accent1">
+              <a:shade val="15000"/>
+            </a:schemeClr>
+          </a:lnRef>
+          <a:fillRef idx="1">
+            <a:schemeClr val="accent1"/>
+          </a:fillRef>
+          <a:effectRef idx="0">
+            <a:schemeClr val="accent1"/>
+          </a:effectRef>
+          <a:fontRef idx="minor">
+            <a:schemeClr val="lt1"/>
+          </a:fontRef>
+        </p:style>
+        <p:txBody>
+          <a:bodyPr vertOverflow="clip" horzOverflow="clip" rtlCol="0" anchor="ctr" anchorCtr="0">
+            <a:noAutofit/>
+          </a:bodyPr>
+          <a:lstStyle/>
+          <a:p>
+            <a:pPr algn="l"/>
+            <a:r>
+              <a:rPr lang="en-US" sz="1300">
+                <a:solidFill>
+                  <a:srgbClr val="E8F4F8"/>
+                </a:solidFill>
+                <a:latin typeface="Segoe UI"/>
+                <a:cs typeface="Segoe UI"/>
+              </a:rPr>
+              <a:t>💡 HINT  Log context.ContextId in the endpoint — it changes per request.</a:t>
+            </a:r>
+            <a:endParaRPr lang="en-IN" sz="1300">
+              <a:solidFill>
+                <a:srgbClr val="E8F4F8"/>
+              </a:solidFill>
+              <a:latin typeface="Segoe UI"/>
+              <a:cs typeface="Segoe UI"/>
+            </a:endParaRPr>
           </a:p>
         </p:txBody>
       </p:sp>
     </p:spTree>
+    <p:extLst>
+      <p:ext uri="{BB962C8B-B14F-4D97-AF65-F5344CB8AC3E}">
+        <p14:creationId xmlns:p14="http://schemas.microsoft.com/office/powerpoint/2010/main" val="2633753568"/>
+      </p:ext>
+    </p:extLst>
   </p:cSld>
   <p:clrMapOvr>
     <a:masterClrMapping/>
@@ -16486,7 +17303,7 @@
           <a:lstStyle/>
           <a:p>
             <a:r>
-              <a:t>LINQ Queries</a:t>
+              <a:t>Configure DbContext</a:t>
             </a:r>
           </a:p>
         </p:txBody>
@@ -16506,18 +17323,102 @@
           <a:bodyPr/>
           <a:lstStyle/>
           <a:p>
-            <a:r>
-              <a:t>Where, Select, FirstOrDefault</a:t>
-            </a:r>
-          </a:p>
-          <a:p>
-            <a:r>
-              <a:t>Converted to SQL</a:t>
+            <a:pPr>
+              <a:buNone/>
+            </a:pPr>
+            <a:r>
+              <a:rPr lang="en-US" sz="1800" b="1" dirty="0">
+                <a:solidFill>
+                  <a:srgbClr val="64FFDA"/>
+                </a:solidFill>
+              </a:rPr>
+              <a:t>Program.cs</a:t>
+            </a:r>
+          </a:p>
+          <a:p>
+            <a:pPr>
+              <a:buNone/>
+            </a:pPr>
+            <a:r>
+              <a:rPr lang="en-US" sz="1400" dirty="0">
+                <a:latin typeface="Consolas"/>
+              </a:rPr>
+              <a:t>var connStr = builder.Configuration</a:t>
+            </a:r>
+          </a:p>
+          <a:p>
+            <a:pPr>
+              <a:buNone/>
+            </a:pPr>
+            <a:r>
+              <a:rPr lang="en-US" sz="1400" dirty="0">
+                <a:latin typeface="Consolas"/>
+              </a:rPr>
+              <a:t>    .GetConnectionString("Default");</a:t>
+            </a:r>
+          </a:p>
+          <a:p>
+            <a:pPr>
+              <a:buNone/>
+            </a:pPr>
+            <a:endParaRPr lang="en-US" sz="800"/>
+          </a:p>
+          <a:p>
+            <a:pPr>
+              <a:buNone/>
+            </a:pPr>
+            <a:r>
+              <a:rPr lang="en-US" sz="1400" dirty="0">
+                <a:latin typeface="Consolas"/>
+              </a:rPr>
+              <a:t>builder.Services.AddDbContext&lt;AppDbContext&gt;(</a:t>
+            </a:r>
+          </a:p>
+          <a:p>
+            <a:pPr>
+              <a:buNone/>
+            </a:pPr>
+            <a:r>
+              <a:rPr lang="en-US" sz="1400" dirty="0">
+                <a:latin typeface="Consolas"/>
+              </a:rPr>
+              <a:t>    options =&gt; options.UseSqlServer(connStr));</a:t>
+            </a:r>
+          </a:p>
+          <a:p>
+            <a:pPr>
+              <a:buNone/>
+            </a:pPr>
+            <a:endParaRPr lang="en-US" sz="800"/>
+          </a:p>
+          <a:p>
+            <a:pPr marL="285750" indent="-285750">
+              <a:buFont typeface="Arial"/>
+              <a:buChar char="•"/>
+            </a:pPr>
+            <a:r>
+              <a:rPr lang="en-US" sz="1600" dirty="0"/>
+              <a:t>UseSqlServer / UseNpgsql / UseSqlite — pick your provider</a:t>
+            </a:r>
+          </a:p>
+          <a:p>
+            <a:pPr marL="285750" indent="-285750">
+              <a:buFont typeface="Arial"/>
+              <a:buChar char="•"/>
+            </a:pPr>
+            <a:r>
+              <a:rPr lang="en-US" sz="1600" dirty="0"/>
+              <a:t>EnableSensitiveDataLogging() — only in Development</a:t>
             </a:r>
           </a:p>
         </p:txBody>
       </p:sp>
     </p:spTree>
+    <p:extLst>
+      <p:ext uri="{BB962C8B-B14F-4D97-AF65-F5344CB8AC3E}">
+        <p14:creationId xmlns:p14="http://schemas.microsoft.com/office/powerpoint/2010/main" val="3124795571"/>
+      </p:ext>
+    </p:extLst>
   </p:cSld>
   <p:clrMapOvr>
     <a:masterClrMapping/>
@@ -16558,7 +17459,7 @@
           <a:lstStyle/>
           <a:p>
             <a:r>
-              <a:t>Migrations</a:t>
+              <a:t>CRUD Operations</a:t>
             </a:r>
           </a:p>
         </p:txBody>
@@ -16578,23 +17479,73 @@
           <a:bodyPr/>
           <a:lstStyle/>
           <a:p>
-            <a:r>
-              <a:t>Create DB schema</a:t>
-            </a:r>
-          </a:p>
-          <a:p>
-            <a:r>
-              <a:t>Add-Migration</a:t>
-            </a:r>
-          </a:p>
-          <a:p>
-            <a:r>
-              <a:t>Update-Database</a:t>
+            <a:pPr marL="285750" indent="-285750">
+              <a:buFont typeface="Arial"/>
+              <a:buChar char="•"/>
+            </a:pPr>
+            <a:r>
+              <a:rPr lang="en-US" sz="1800" dirty="0"/>
+              <a:t>Create — context.Products.Add(item); await context.SaveChangesAsync();</a:t>
+            </a:r>
+          </a:p>
+          <a:p>
+            <a:pPr marL="285750" indent="-285750">
+              <a:buFont typeface="Arial"/>
+              <a:buChar char="•"/>
+            </a:pPr>
+            <a:r>
+              <a:rPr lang="en-US" sz="1800" dirty="0"/>
+              <a:t>Read — await context.Products.FindAsync(id) for primary key lookups</a:t>
+            </a:r>
+          </a:p>
+          <a:p>
+            <a:pPr marL="285750" indent="-285750">
+              <a:buFont typeface="Arial"/>
+              <a:buChar char="•"/>
+            </a:pPr>
+            <a:r>
+              <a:rPr lang="en-US" sz="1800" dirty="0"/>
+              <a:t>Update — modify a tracked entity, then call SaveChangesAsync()</a:t>
+            </a:r>
+          </a:p>
+          <a:p>
+            <a:pPr marL="285750" indent="-285750">
+              <a:buFont typeface="Arial"/>
+              <a:buChar char="•"/>
+            </a:pPr>
+            <a:r>
+              <a:rPr lang="en-US" sz="1800" dirty="0"/>
+              <a:t>Delete — context.Products.Remove(item); SaveChangesAsync();</a:t>
+            </a:r>
+          </a:p>
+          <a:p>
+            <a:pPr marL="285750" indent="-285750">
+              <a:buFont typeface="Arial"/>
+              <a:buChar char="•"/>
+            </a:pPr>
+            <a:r>
+              <a:rPr lang="en-US" sz="1800" dirty="0"/>
+              <a:t>SaveChanges() runs all pending changes in a single transaction</a:t>
+            </a:r>
+          </a:p>
+          <a:p>
+            <a:pPr marL="285750" indent="-285750">
+              <a:buFont typeface="Arial"/>
+              <a:buChar char="•"/>
+            </a:pPr>
+            <a:r>
+              <a:rPr lang="en-US" sz="1800" dirty="0"/>
+              <a:t>Always prefer Async variants in web apps for scalability</a:t>
             </a:r>
           </a:p>
         </p:txBody>
       </p:sp>
     </p:spTree>
+    <p:extLst>
+      <p:ext uri="{BB962C8B-B14F-4D97-AF65-F5344CB8AC3E}">
+        <p14:creationId xmlns:p14="http://schemas.microsoft.com/office/powerpoint/2010/main" val="878917851"/>
+      </p:ext>
+    </p:extLst>
   </p:cSld>
   <p:clrMapOvr>
     <a:masterClrMapping/>
@@ -16621,57 +17572,753 @@
       </p:grpSpPr>
       <p:sp>
         <p:nvSpPr>
-          <p:cNvPr id="2" name="Title 1"/>
-          <p:cNvSpPr>
-            <a:spLocks noGrp="1"/>
-          </p:cNvSpPr>
-          <p:nvPr>
-            <p:ph type="title"/>
-          </p:nvPr>
+          <p:cNvPr id="2" name="Rectangle: Rounded Corners 1">
+            <a:extLst>
+              <a:ext uri="{FF2B5EF4-FFF2-40B4-BE49-F238E27FC236}">
+                <a16:creationId xmlns:a16="http://schemas.microsoft.com/office/drawing/2014/main" id="{3479CB1F-59AE-4CB5-AC4A-501F3F43CFE7}"/>
+              </a:ext>
+            </a:extLst>
+          </p:cNvPr>
+          <p:cNvSpPr/>
+          <p:nvPr/>
         </p:nvSpPr>
-        <p:spPr/>
+        <p:spPr>
+          <a:xfrm>
+            <a:off x="508000" y="381000"/>
+            <a:ext cx="1651000" cy="457200"/>
+          </a:xfrm>
+          <a:prstGeom prst="roundRect">
+            <a:avLst/>
+          </a:prstGeom>
+          <a:solidFill>
+            <a:srgbClr val="FF6E40"/>
+          </a:solidFill>
+          <a:ln w="15875" cap="flat" cmpd="sng" algn="ctr">
+            <a:noFill/>
+            <a:prstDash val="solid"/>
+          </a:ln>
+        </p:spPr>
+        <p:style>
+          <a:lnRef idx="2">
+            <a:schemeClr val="accent1">
+              <a:shade val="15000"/>
+            </a:schemeClr>
+          </a:lnRef>
+          <a:fillRef idx="1">
+            <a:schemeClr val="accent1"/>
+          </a:fillRef>
+          <a:effectRef idx="0">
+            <a:schemeClr val="accent1"/>
+          </a:effectRef>
+          <a:fontRef idx="minor">
+            <a:schemeClr val="lt1"/>
+          </a:fontRef>
+        </p:style>
         <p:txBody>
-          <a:bodyPr/>
+          <a:bodyPr vertOverflow="clip" horzOverflow="clip" rtlCol="0" anchor="ctr" anchorCtr="0">
+            <a:noAutofit/>
+          </a:bodyPr>
           <a:lstStyle/>
           <a:p>
-            <a:r>
-              <a:t>Relationships</a:t>
+            <a:pPr algn="l"/>
+            <a:r>
+              <a:rPr lang="en-IN" sz="1600" b="1">
+                <a:solidFill>
+                  <a:srgbClr val="FFFFFF"/>
+                </a:solidFill>
+                <a:latin typeface="Segoe UI"/>
+                <a:cs typeface="Segoe UI"/>
+              </a:rPr>
+              <a:t>🧪 LAB 3</a:t>
             </a:r>
           </a:p>
         </p:txBody>
       </p:sp>
       <p:sp>
         <p:nvSpPr>
-          <p:cNvPr id="3" name="Content Placeholder 2"/>
-          <p:cNvSpPr>
-            <a:spLocks noGrp="1"/>
-          </p:cNvSpPr>
-          <p:nvPr>
-            <p:ph idx="1"/>
-          </p:nvPr>
+          <p:cNvPr id="3" name="TextBox 2">
+            <a:extLst>
+              <a:ext uri="{FF2B5EF4-FFF2-40B4-BE49-F238E27FC236}">
+                <a16:creationId xmlns:a16="http://schemas.microsoft.com/office/drawing/2014/main" id="{137DBAEA-CD1C-474E-A83E-F9A1649AACB1}"/>
+              </a:ext>
+            </a:extLst>
+          </p:cNvPr>
+          <p:cNvSpPr txBox="1"/>
+          <p:nvPr/>
         </p:nvSpPr>
-        <p:spPr/>
+        <p:spPr>
+          <a:xfrm>
+            <a:off x="2349500" y="381000"/>
+            <a:ext cx="6286500" cy="508000"/>
+          </a:xfrm>
+          <a:prstGeom prst="rect">
+            <a:avLst/>
+          </a:prstGeom>
+          <a:noFill/>
+        </p:spPr>
         <p:txBody>
-          <a:bodyPr/>
+          <a:bodyPr vertOverflow="overflow" vert="horz" wrap="square" rtlCol="0" anchor="ctr" anchorCtr="0">
+            <a:noAutofit/>
+          </a:bodyPr>
           <a:lstStyle/>
           <a:p>
-            <a:r>
-              <a:t>One-to-One</a:t>
-            </a:r>
-          </a:p>
-          <a:p>
-            <a:r>
-              <a:t>One-to-Many</a:t>
-            </a:r>
-          </a:p>
-          <a:p>
-            <a:r>
-              <a:t>Many-to-Many</a:t>
-            </a:r>
+            <a:pPr algn="l"/>
+            <a:r>
+              <a:rPr lang="en-IN" sz="2800" b="1">
+                <a:solidFill>
+                  <a:srgbClr val="00E5FF"/>
+                </a:solidFill>
+                <a:latin typeface="Segoe UI"/>
+                <a:cs typeface="Segoe UI"/>
+              </a:rPr>
+              <a:t>Build CRUD Endpoints</a:t>
+            </a:r>
+          </a:p>
+        </p:txBody>
+      </p:sp>
+      <p:sp>
+        <p:nvSpPr>
+          <p:cNvPr id="4" name="TextBox 3">
+            <a:extLst>
+              <a:ext uri="{FF2B5EF4-FFF2-40B4-BE49-F238E27FC236}">
+                <a16:creationId xmlns:a16="http://schemas.microsoft.com/office/drawing/2014/main" id="{9E91D95E-2694-480B-8AFE-6AADBAF6A532}"/>
+              </a:ext>
+            </a:extLst>
+          </p:cNvPr>
+          <p:cNvSpPr txBox="1"/>
+          <p:nvPr/>
+        </p:nvSpPr>
+        <p:spPr>
+          <a:xfrm>
+            <a:off x="508000" y="1143000"/>
+            <a:ext cx="8128000" cy="228600"/>
+          </a:xfrm>
+          <a:prstGeom prst="rect">
+            <a:avLst/>
+          </a:prstGeom>
+          <a:noFill/>
+        </p:spPr>
+        <p:txBody>
+          <a:bodyPr vertOverflow="overflow" vert="horz" wrap="square" rtlCol="0" anchor="t" anchorCtr="0">
+            <a:spAutoFit/>
+          </a:bodyPr>
+          <a:lstStyle/>
+          <a:p>
+            <a:pPr algn="l"/>
+            <a:r>
+              <a:rPr lang="en-IN" sz="1100" b="1">
+                <a:solidFill>
+                  <a:srgbClr val="64FFDA"/>
+                </a:solidFill>
+                <a:latin typeface="Segoe UI"/>
+                <a:cs typeface="Segoe UI"/>
+              </a:rPr>
+              <a:t>SCENARIO</a:t>
+            </a:r>
+          </a:p>
+        </p:txBody>
+      </p:sp>
+      <p:sp>
+        <p:nvSpPr>
+          <p:cNvPr id="5" name="TextBox 4">
+            <a:extLst>
+              <a:ext uri="{FF2B5EF4-FFF2-40B4-BE49-F238E27FC236}">
+                <a16:creationId xmlns:a16="http://schemas.microsoft.com/office/drawing/2014/main" id="{D3CAA479-88F2-4945-86D3-05111933A9D9}"/>
+              </a:ext>
+            </a:extLst>
+          </p:cNvPr>
+          <p:cNvSpPr txBox="1"/>
+          <p:nvPr/>
+        </p:nvSpPr>
+        <p:spPr>
+          <a:xfrm>
+            <a:off x="508000" y="1397000"/>
+            <a:ext cx="8128000" cy="762000"/>
+          </a:xfrm>
+          <a:prstGeom prst="rect">
+            <a:avLst/>
+          </a:prstGeom>
+          <a:noFill/>
+        </p:spPr>
+        <p:txBody>
+          <a:bodyPr vertOverflow="overflow" vert="horz" wrap="square" rtlCol="0" anchor="t" anchorCtr="0">
+            <a:spAutoFit/>
+          </a:bodyPr>
+          <a:lstStyle/>
+          <a:p>
+            <a:pPr algn="l"/>
+            <a:r>
+              <a:rPr lang="en-US" sz="1600">
+                <a:solidFill>
+                  <a:srgbClr val="E8F4F8"/>
+                </a:solidFill>
+                <a:latin typeface="Segoe UI"/>
+                <a:cs typeface="Segoe UI"/>
+              </a:rPr>
+              <a:t>Expose Create, Read, Update, Delete for Product through controllers or minimal APIs. Use async methods throughout.</a:t>
+            </a:r>
+            <a:endParaRPr lang="en-IN" sz="1600">
+              <a:solidFill>
+                <a:srgbClr val="E8F4F8"/>
+              </a:solidFill>
+              <a:latin typeface="Segoe UI"/>
+              <a:cs typeface="Segoe UI"/>
+            </a:endParaRPr>
+          </a:p>
+        </p:txBody>
+      </p:sp>
+      <p:sp>
+        <p:nvSpPr>
+          <p:cNvPr id="6" name="TextBox 5">
+            <a:extLst>
+              <a:ext uri="{FF2B5EF4-FFF2-40B4-BE49-F238E27FC236}">
+                <a16:creationId xmlns:a16="http://schemas.microsoft.com/office/drawing/2014/main" id="{1F053F73-DEA1-4604-BB81-A9DE958F0318}"/>
+              </a:ext>
+            </a:extLst>
+          </p:cNvPr>
+          <p:cNvSpPr txBox="1"/>
+          <p:nvPr/>
+        </p:nvSpPr>
+        <p:spPr>
+          <a:xfrm>
+            <a:off x="508000" y="2286000"/>
+            <a:ext cx="8128000" cy="228600"/>
+          </a:xfrm>
+          <a:prstGeom prst="rect">
+            <a:avLst/>
+          </a:prstGeom>
+          <a:noFill/>
+        </p:spPr>
+        <p:txBody>
+          <a:bodyPr vertOverflow="overflow" vert="horz" wrap="square" rtlCol="0" anchor="t" anchorCtr="0">
+            <a:spAutoFit/>
+          </a:bodyPr>
+          <a:lstStyle/>
+          <a:p>
+            <a:pPr algn="l"/>
+            <a:r>
+              <a:rPr lang="en-IN" sz="1100" b="1">
+                <a:solidFill>
+                  <a:srgbClr val="64FFDA"/>
+                </a:solidFill>
+                <a:latin typeface="Segoe UI"/>
+                <a:cs typeface="Segoe UI"/>
+              </a:rPr>
+              <a:t>YOUR TASKS</a:t>
+            </a:r>
+          </a:p>
+        </p:txBody>
+      </p:sp>
+      <p:sp>
+        <p:nvSpPr>
+          <p:cNvPr id="7" name="Oval 6">
+            <a:extLst>
+              <a:ext uri="{FF2B5EF4-FFF2-40B4-BE49-F238E27FC236}">
+                <a16:creationId xmlns:a16="http://schemas.microsoft.com/office/drawing/2014/main" id="{55050943-461D-4FEB-B473-1CCD08DC0671}"/>
+              </a:ext>
+            </a:extLst>
+          </p:cNvPr>
+          <p:cNvSpPr/>
+          <p:nvPr/>
+        </p:nvSpPr>
+        <p:spPr>
+          <a:xfrm>
+            <a:off x="571500" y="2603500"/>
+            <a:ext cx="355600" cy="355600"/>
+          </a:xfrm>
+          <a:prstGeom prst="ellipse">
+            <a:avLst/>
+          </a:prstGeom>
+          <a:solidFill>
+            <a:srgbClr val="7C4DFF"/>
+          </a:solidFill>
+          <a:ln w="15875" cap="flat" cmpd="sng" algn="ctr">
+            <a:noFill/>
+            <a:prstDash val="solid"/>
+          </a:ln>
+        </p:spPr>
+        <p:style>
+          <a:lnRef idx="2">
+            <a:schemeClr val="accent1">
+              <a:shade val="15000"/>
+            </a:schemeClr>
+          </a:lnRef>
+          <a:fillRef idx="1">
+            <a:schemeClr val="accent1"/>
+          </a:fillRef>
+          <a:effectRef idx="0">
+            <a:schemeClr val="accent1"/>
+          </a:effectRef>
+          <a:fontRef idx="minor">
+            <a:schemeClr val="lt1"/>
+          </a:fontRef>
+        </p:style>
+        <p:txBody>
+          <a:bodyPr vertOverflow="clip" horzOverflow="clip" wrap="none" rtlCol="0" anchor="ctr" anchorCtr="0">
+            <a:noAutofit/>
+          </a:bodyPr>
+          <a:lstStyle/>
+          <a:p>
+            <a:pPr algn="l"/>
+            <a:r>
+              <a:rPr lang="en-IN" sz="1400" b="1">
+                <a:solidFill>
+                  <a:srgbClr val="FFFFFF"/>
+                </a:solidFill>
+                <a:latin typeface="Segoe UI"/>
+                <a:cs typeface="Segoe UI"/>
+              </a:rPr>
+              <a:t>1</a:t>
+            </a:r>
+          </a:p>
+        </p:txBody>
+      </p:sp>
+      <p:sp>
+        <p:nvSpPr>
+          <p:cNvPr id="8" name="TextBox 7">
+            <a:extLst>
+              <a:ext uri="{FF2B5EF4-FFF2-40B4-BE49-F238E27FC236}">
+                <a16:creationId xmlns:a16="http://schemas.microsoft.com/office/drawing/2014/main" id="{AC362A33-6919-4B6F-9834-77A1BAD4B4B1}"/>
+              </a:ext>
+            </a:extLst>
+          </p:cNvPr>
+          <p:cNvSpPr txBox="1"/>
+          <p:nvPr/>
+        </p:nvSpPr>
+        <p:spPr>
+          <a:xfrm>
+            <a:off x="1079500" y="2603500"/>
+            <a:ext cx="7556500" cy="457200"/>
+          </a:xfrm>
+          <a:prstGeom prst="rect">
+            <a:avLst/>
+          </a:prstGeom>
+          <a:noFill/>
+        </p:spPr>
+        <p:txBody>
+          <a:bodyPr vertOverflow="overflow" vert="horz" wrap="square" rtlCol="0" anchor="t" anchorCtr="0">
+            <a:noAutofit/>
+          </a:bodyPr>
+          <a:lstStyle/>
+          <a:p>
+            <a:pPr algn="l"/>
+            <a:r>
+              <a:rPr lang="en-IN" sz="1500">
+                <a:solidFill>
+                  <a:srgbClr val="E8F4F8"/>
+                </a:solidFill>
+                <a:latin typeface="Segoe UI"/>
+                <a:cs typeface="Segoe UI"/>
+              </a:rPr>
+              <a:t>POST /products → ctx.Products.Add(p); await ctx.SaveChangesAsync();</a:t>
+            </a:r>
+          </a:p>
+        </p:txBody>
+      </p:sp>
+      <p:sp>
+        <p:nvSpPr>
+          <p:cNvPr id="9" name="Oval 8">
+            <a:extLst>
+              <a:ext uri="{FF2B5EF4-FFF2-40B4-BE49-F238E27FC236}">
+                <a16:creationId xmlns:a16="http://schemas.microsoft.com/office/drawing/2014/main" id="{E3FBD421-622C-4CAA-88C0-7DBD507D3BC6}"/>
+              </a:ext>
+            </a:extLst>
+          </p:cNvPr>
+          <p:cNvSpPr/>
+          <p:nvPr/>
+        </p:nvSpPr>
+        <p:spPr>
+          <a:xfrm>
+            <a:off x="571500" y="3136900"/>
+            <a:ext cx="355600" cy="355600"/>
+          </a:xfrm>
+          <a:prstGeom prst="ellipse">
+            <a:avLst/>
+          </a:prstGeom>
+          <a:solidFill>
+            <a:srgbClr val="7C4DFF"/>
+          </a:solidFill>
+          <a:ln w="15875" cap="flat" cmpd="sng" algn="ctr">
+            <a:noFill/>
+            <a:prstDash val="solid"/>
+          </a:ln>
+        </p:spPr>
+        <p:style>
+          <a:lnRef idx="2">
+            <a:schemeClr val="accent1">
+              <a:shade val="15000"/>
+            </a:schemeClr>
+          </a:lnRef>
+          <a:fillRef idx="1">
+            <a:schemeClr val="accent1"/>
+          </a:fillRef>
+          <a:effectRef idx="0">
+            <a:schemeClr val="accent1"/>
+          </a:effectRef>
+          <a:fontRef idx="minor">
+            <a:schemeClr val="lt1"/>
+          </a:fontRef>
+        </p:style>
+        <p:txBody>
+          <a:bodyPr vertOverflow="clip" horzOverflow="clip" wrap="none" rtlCol="0" anchor="ctr" anchorCtr="0">
+            <a:noAutofit/>
+          </a:bodyPr>
+          <a:lstStyle/>
+          <a:p>
+            <a:pPr algn="l"/>
+            <a:r>
+              <a:rPr lang="en-IN" sz="1400" b="1">
+                <a:solidFill>
+                  <a:srgbClr val="FFFFFF"/>
+                </a:solidFill>
+                <a:latin typeface="Segoe UI"/>
+                <a:cs typeface="Segoe UI"/>
+              </a:rPr>
+              <a:t>2</a:t>
+            </a:r>
+          </a:p>
+        </p:txBody>
+      </p:sp>
+      <p:sp>
+        <p:nvSpPr>
+          <p:cNvPr id="10" name="TextBox 9">
+            <a:extLst>
+              <a:ext uri="{FF2B5EF4-FFF2-40B4-BE49-F238E27FC236}">
+                <a16:creationId xmlns:a16="http://schemas.microsoft.com/office/drawing/2014/main" id="{F44E68B0-2963-4C6D-B8BC-1F359B4557AB}"/>
+              </a:ext>
+            </a:extLst>
+          </p:cNvPr>
+          <p:cNvSpPr txBox="1"/>
+          <p:nvPr/>
+        </p:nvSpPr>
+        <p:spPr>
+          <a:xfrm>
+            <a:off x="1079500" y="3136900"/>
+            <a:ext cx="7556500" cy="457200"/>
+          </a:xfrm>
+          <a:prstGeom prst="rect">
+            <a:avLst/>
+          </a:prstGeom>
+          <a:noFill/>
+        </p:spPr>
+        <p:txBody>
+          <a:bodyPr vertOverflow="overflow" vert="horz" wrap="square" rtlCol="0" anchor="t" anchorCtr="0">
+            <a:noAutofit/>
+          </a:bodyPr>
+          <a:lstStyle/>
+          <a:p>
+            <a:pPr algn="l"/>
+            <a:r>
+              <a:rPr lang="en-IN" sz="1500">
+                <a:solidFill>
+                  <a:srgbClr val="E8F4F8"/>
+                </a:solidFill>
+                <a:latin typeface="Segoe UI"/>
+                <a:cs typeface="Segoe UI"/>
+              </a:rPr>
+              <a:t>GET /products/{id} → ctx.Products.FindAsync(id)</a:t>
+            </a:r>
+          </a:p>
+        </p:txBody>
+      </p:sp>
+      <p:sp>
+        <p:nvSpPr>
+          <p:cNvPr id="11" name="Oval 10">
+            <a:extLst>
+              <a:ext uri="{FF2B5EF4-FFF2-40B4-BE49-F238E27FC236}">
+                <a16:creationId xmlns:a16="http://schemas.microsoft.com/office/drawing/2014/main" id="{E4E04B9E-DAEE-487B-9EC5-7D20C45A3B49}"/>
+              </a:ext>
+            </a:extLst>
+          </p:cNvPr>
+          <p:cNvSpPr/>
+          <p:nvPr/>
+        </p:nvSpPr>
+        <p:spPr>
+          <a:xfrm>
+            <a:off x="571500" y="3670300"/>
+            <a:ext cx="355600" cy="355600"/>
+          </a:xfrm>
+          <a:prstGeom prst="ellipse">
+            <a:avLst/>
+          </a:prstGeom>
+          <a:solidFill>
+            <a:srgbClr val="7C4DFF"/>
+          </a:solidFill>
+          <a:ln w="15875" cap="flat" cmpd="sng" algn="ctr">
+            <a:noFill/>
+            <a:prstDash val="solid"/>
+          </a:ln>
+        </p:spPr>
+        <p:style>
+          <a:lnRef idx="2">
+            <a:schemeClr val="accent1">
+              <a:shade val="15000"/>
+            </a:schemeClr>
+          </a:lnRef>
+          <a:fillRef idx="1">
+            <a:schemeClr val="accent1"/>
+          </a:fillRef>
+          <a:effectRef idx="0">
+            <a:schemeClr val="accent1"/>
+          </a:effectRef>
+          <a:fontRef idx="minor">
+            <a:schemeClr val="lt1"/>
+          </a:fontRef>
+        </p:style>
+        <p:txBody>
+          <a:bodyPr vertOverflow="clip" horzOverflow="clip" wrap="none" rtlCol="0" anchor="ctr" anchorCtr="0">
+            <a:noAutofit/>
+          </a:bodyPr>
+          <a:lstStyle/>
+          <a:p>
+            <a:pPr algn="l"/>
+            <a:r>
+              <a:rPr lang="en-IN" sz="1400" b="1">
+                <a:solidFill>
+                  <a:srgbClr val="FFFFFF"/>
+                </a:solidFill>
+                <a:latin typeface="Segoe UI"/>
+                <a:cs typeface="Segoe UI"/>
+              </a:rPr>
+              <a:t>3</a:t>
+            </a:r>
+          </a:p>
+        </p:txBody>
+      </p:sp>
+      <p:sp>
+        <p:nvSpPr>
+          <p:cNvPr id="12" name="TextBox 11">
+            <a:extLst>
+              <a:ext uri="{FF2B5EF4-FFF2-40B4-BE49-F238E27FC236}">
+                <a16:creationId xmlns:a16="http://schemas.microsoft.com/office/drawing/2014/main" id="{6FDDB80C-310B-4573-BA31-9490106A1D93}"/>
+              </a:ext>
+            </a:extLst>
+          </p:cNvPr>
+          <p:cNvSpPr txBox="1"/>
+          <p:nvPr/>
+        </p:nvSpPr>
+        <p:spPr>
+          <a:xfrm>
+            <a:off x="1079500" y="3670300"/>
+            <a:ext cx="7556500" cy="457200"/>
+          </a:xfrm>
+          <a:prstGeom prst="rect">
+            <a:avLst/>
+          </a:prstGeom>
+          <a:noFill/>
+        </p:spPr>
+        <p:txBody>
+          <a:bodyPr vertOverflow="overflow" vert="horz" wrap="square" rtlCol="0" anchor="t" anchorCtr="0">
+            <a:noAutofit/>
+          </a:bodyPr>
+          <a:lstStyle/>
+          <a:p>
+            <a:pPr algn="l"/>
+            <a:r>
+              <a:rPr lang="en-US" sz="1500">
+                <a:solidFill>
+                  <a:srgbClr val="E8F4F8"/>
+                </a:solidFill>
+                <a:latin typeface="Segoe UI"/>
+                <a:cs typeface="Segoe UI"/>
+              </a:rPr>
+              <a:t>PUT /products/{id} → fetch, update fields, save</a:t>
+            </a:r>
+            <a:endParaRPr lang="en-IN" sz="1500">
+              <a:solidFill>
+                <a:srgbClr val="E8F4F8"/>
+              </a:solidFill>
+              <a:latin typeface="Segoe UI"/>
+              <a:cs typeface="Segoe UI"/>
+            </a:endParaRPr>
+          </a:p>
+        </p:txBody>
+      </p:sp>
+      <p:sp>
+        <p:nvSpPr>
+          <p:cNvPr id="13" name="Oval 12">
+            <a:extLst>
+              <a:ext uri="{FF2B5EF4-FFF2-40B4-BE49-F238E27FC236}">
+                <a16:creationId xmlns:a16="http://schemas.microsoft.com/office/drawing/2014/main" id="{0539CA02-02DF-4095-86A7-DA32659BA55B}"/>
+              </a:ext>
+            </a:extLst>
+          </p:cNvPr>
+          <p:cNvSpPr/>
+          <p:nvPr/>
+        </p:nvSpPr>
+        <p:spPr>
+          <a:xfrm>
+            <a:off x="571500" y="4203700"/>
+            <a:ext cx="355600" cy="355600"/>
+          </a:xfrm>
+          <a:prstGeom prst="ellipse">
+            <a:avLst/>
+          </a:prstGeom>
+          <a:solidFill>
+            <a:srgbClr val="7C4DFF"/>
+          </a:solidFill>
+          <a:ln w="15875" cap="flat" cmpd="sng" algn="ctr">
+            <a:noFill/>
+            <a:prstDash val="solid"/>
+          </a:ln>
+        </p:spPr>
+        <p:style>
+          <a:lnRef idx="2">
+            <a:schemeClr val="accent1">
+              <a:shade val="15000"/>
+            </a:schemeClr>
+          </a:lnRef>
+          <a:fillRef idx="1">
+            <a:schemeClr val="accent1"/>
+          </a:fillRef>
+          <a:effectRef idx="0">
+            <a:schemeClr val="accent1"/>
+          </a:effectRef>
+          <a:fontRef idx="minor">
+            <a:schemeClr val="lt1"/>
+          </a:fontRef>
+        </p:style>
+        <p:txBody>
+          <a:bodyPr vertOverflow="clip" horzOverflow="clip" wrap="none" rtlCol="0" anchor="ctr" anchorCtr="0">
+            <a:noAutofit/>
+          </a:bodyPr>
+          <a:lstStyle/>
+          <a:p>
+            <a:pPr algn="l"/>
+            <a:r>
+              <a:rPr lang="en-IN" sz="1400" b="1">
+                <a:solidFill>
+                  <a:srgbClr val="FFFFFF"/>
+                </a:solidFill>
+                <a:latin typeface="Segoe UI"/>
+                <a:cs typeface="Segoe UI"/>
+              </a:rPr>
+              <a:t>4</a:t>
+            </a:r>
+          </a:p>
+        </p:txBody>
+      </p:sp>
+      <p:sp>
+        <p:nvSpPr>
+          <p:cNvPr id="14" name="TextBox 13">
+            <a:extLst>
+              <a:ext uri="{FF2B5EF4-FFF2-40B4-BE49-F238E27FC236}">
+                <a16:creationId xmlns:a16="http://schemas.microsoft.com/office/drawing/2014/main" id="{40C99BC0-6AC6-4885-B071-ABA806168269}"/>
+              </a:ext>
+            </a:extLst>
+          </p:cNvPr>
+          <p:cNvSpPr txBox="1"/>
+          <p:nvPr/>
+        </p:nvSpPr>
+        <p:spPr>
+          <a:xfrm>
+            <a:off x="1079500" y="4203700"/>
+            <a:ext cx="7556500" cy="457200"/>
+          </a:xfrm>
+          <a:prstGeom prst="rect">
+            <a:avLst/>
+          </a:prstGeom>
+          <a:noFill/>
+        </p:spPr>
+        <p:txBody>
+          <a:bodyPr vertOverflow="overflow" vert="horz" wrap="square" rtlCol="0" anchor="t" anchorCtr="0">
+            <a:noAutofit/>
+          </a:bodyPr>
+          <a:lstStyle/>
+          <a:p>
+            <a:pPr algn="l"/>
+            <a:r>
+              <a:rPr lang="en-IN" sz="1500">
+                <a:solidFill>
+                  <a:srgbClr val="E8F4F8"/>
+                </a:solidFill>
+                <a:latin typeface="Segoe UI"/>
+                <a:cs typeface="Segoe UI"/>
+              </a:rPr>
+              <a:t>DELETE /products/{id} → Remove + save; handle 404</a:t>
+            </a:r>
+          </a:p>
+        </p:txBody>
+      </p:sp>
+      <p:sp>
+        <p:nvSpPr>
+          <p:cNvPr id="15" name="Rectangle: Rounded Corners 14">
+            <a:extLst>
+              <a:ext uri="{FF2B5EF4-FFF2-40B4-BE49-F238E27FC236}">
+                <a16:creationId xmlns:a16="http://schemas.microsoft.com/office/drawing/2014/main" id="{21B6E7B7-92D8-454A-BD65-88F05F672283}"/>
+              </a:ext>
+            </a:extLst>
+          </p:cNvPr>
+          <p:cNvSpPr/>
+          <p:nvPr/>
+        </p:nvSpPr>
+        <p:spPr>
+          <a:xfrm>
+            <a:off x="508000" y="5842000"/>
+            <a:ext cx="8128000" cy="736600"/>
+          </a:xfrm>
+          <a:prstGeom prst="roundRect">
+            <a:avLst/>
+          </a:prstGeom>
+          <a:solidFill>
+            <a:srgbClr val="1A3A52"/>
+          </a:solidFill>
+          <a:ln w="19050" cap="flat" cmpd="sng" algn="ctr">
+            <a:solidFill>
+              <a:srgbClr val="64FFDA"/>
+            </a:solidFill>
+            <a:prstDash val="solid"/>
+          </a:ln>
+        </p:spPr>
+        <p:style>
+          <a:lnRef idx="2">
+            <a:schemeClr val="accent1">
+              <a:shade val="15000"/>
+            </a:schemeClr>
+          </a:lnRef>
+          <a:fillRef idx="1">
+            <a:schemeClr val="accent1"/>
+          </a:fillRef>
+          <a:effectRef idx="0">
+            <a:schemeClr val="accent1"/>
+          </a:effectRef>
+          <a:fontRef idx="minor">
+            <a:schemeClr val="lt1"/>
+          </a:fontRef>
+        </p:style>
+        <p:txBody>
+          <a:bodyPr vertOverflow="clip" horzOverflow="clip" rtlCol="0" anchor="ctr" anchorCtr="0">
+            <a:noAutofit/>
+          </a:bodyPr>
+          <a:lstStyle/>
+          <a:p>
+            <a:pPr algn="l"/>
+            <a:r>
+              <a:rPr lang="en-US" sz="1300">
+                <a:solidFill>
+                  <a:srgbClr val="E8F4F8"/>
+                </a:solidFill>
+                <a:latin typeface="Segoe UI"/>
+                <a:cs typeface="Segoe UI"/>
+              </a:rPr>
+              <a:t>💡 HINT  Return Results.NotFound() when FindAsync returns null.</a:t>
+            </a:r>
+            <a:endParaRPr lang="en-IN" sz="1300">
+              <a:solidFill>
+                <a:srgbClr val="E8F4F8"/>
+              </a:solidFill>
+              <a:latin typeface="Segoe UI"/>
+              <a:cs typeface="Segoe UI"/>
+            </a:endParaRPr>
           </a:p>
         </p:txBody>
       </p:sp>
     </p:spTree>
+    <p:extLst>
+      <p:ext uri="{BB962C8B-B14F-4D97-AF65-F5344CB8AC3E}">
+        <p14:creationId xmlns:p14="http://schemas.microsoft.com/office/powerpoint/2010/main" val="1400459252"/>
+      </p:ext>
+    </p:extLst>
   </p:cSld>
   <p:clrMapOvr>
     <a:masterClrMapping/>
@@ -16712,7 +18359,7 @@
           <a:lstStyle/>
           <a:p>
             <a:r>
-              <a:t>Change Tracking</a:t>
+              <a:t>LINQ Queries</a:t>
             </a:r>
           </a:p>
         </p:txBody>
@@ -16732,18 +18379,73 @@
           <a:bodyPr/>
           <a:lstStyle/>
           <a:p>
-            <a:r>
-              <a:t>Tracks entity changes</a:t>
-            </a:r>
-          </a:p>
-          <a:p>
-            <a:r>
-              <a:t>Auto updates DB</a:t>
+            <a:pPr marL="285750" indent="-285750">
+              <a:buFont typeface="Arial"/>
+              <a:buChar char="•"/>
+            </a:pPr>
+            <a:r>
+              <a:rPr lang="en-US" sz="1800" dirty="0"/>
+              <a:t>LINQ queries are translated to SQL by the provider at execution time</a:t>
+            </a:r>
+          </a:p>
+          <a:p>
+            <a:pPr marL="285750" indent="-285750">
+              <a:buFont typeface="Arial"/>
+              <a:buChar char="•"/>
+            </a:pPr>
+            <a:r>
+              <a:rPr lang="en-US" sz="1800" dirty="0"/>
+              <a:t>Filtering: .Where(p =&gt; p.Price &gt; 100)</a:t>
+            </a:r>
+          </a:p>
+          <a:p>
+            <a:pPr marL="285750" indent="-285750">
+              <a:buFont typeface="Arial"/>
+              <a:buChar char="•"/>
+            </a:pPr>
+            <a:r>
+              <a:rPr lang="en-US" sz="1800" dirty="0"/>
+              <a:t>Projection: .Select(p =&gt; new { p.Name, p.Price })</a:t>
+            </a:r>
+          </a:p>
+          <a:p>
+            <a:pPr marL="285750" indent="-285750">
+              <a:buFont typeface="Arial"/>
+              <a:buChar char="•"/>
+            </a:pPr>
+            <a:r>
+              <a:rPr lang="en-US" sz="1800" dirty="0"/>
+              <a:t>Eager loading: .Include(o =&gt; o.Customer).ThenInclude(c =&gt; c.Address)</a:t>
+            </a:r>
+          </a:p>
+          <a:p>
+            <a:pPr marL="285750" indent="-285750">
+              <a:buFont typeface="Arial"/>
+              <a:buChar char="•"/>
+            </a:pPr>
+            <a:r>
+              <a:rPr lang="en-US" sz="1800" dirty="0"/>
+              <a:t>Aggregations: .Count(), .Sum(), .Average(), .GroupBy()</a:t>
+            </a:r>
+          </a:p>
+          <a:p>
+            <a:pPr marL="285750" indent="-285750">
+              <a:buFont typeface="Arial"/>
+              <a:buChar char="•"/>
+            </a:pPr>
+            <a:r>
+              <a:rPr lang="en-US" sz="1800" dirty="0"/>
+              <a:t>Use ToListAsync() / FirstOrDefaultAsync() — always async in web apps</a:t>
             </a:r>
           </a:p>
         </p:txBody>
       </p:sp>
     </p:spTree>
+    <p:extLst>
+      <p:ext uri="{BB962C8B-B14F-4D97-AF65-F5344CB8AC3E}">
+        <p14:creationId xmlns:p14="http://schemas.microsoft.com/office/powerpoint/2010/main" val="3787730256"/>
+      </p:ext>
+    </p:extLst>
   </p:cSld>
   <p:clrMapOvr>
     <a:masterClrMapping/>
@@ -16784,7 +18486,7 @@
           <a:lstStyle/>
           <a:p>
             <a:r>
-              <a:t>EF Core Logging</a:t>
+              <a:t>Migrations</a:t>
             </a:r>
           </a:p>
         </p:txBody>
@@ -16804,18 +18506,73 @@
           <a:bodyPr/>
           <a:lstStyle/>
           <a:p>
-            <a:r>
-              <a:t>Logs SQL queries</a:t>
-            </a:r>
-          </a:p>
-          <a:p>
-            <a:r>
-              <a:t>Useful for debugging</a:t>
+            <a:pPr marL="285750" indent="-285750">
+              <a:buFont typeface="Arial"/>
+              <a:buChar char="•"/>
+            </a:pPr>
+            <a:r>
+              <a:rPr lang="en-US" sz="1800" dirty="0"/>
+              <a:t>Migrations evolve the database schema in version-controlled code</a:t>
+            </a:r>
+          </a:p>
+          <a:p>
+            <a:pPr marL="285750" indent="-285750">
+              <a:buFont typeface="Arial"/>
+              <a:buChar char="•"/>
+            </a:pPr>
+            <a:r>
+              <a:rPr lang="en-US" sz="1800" dirty="0"/>
+              <a:t>dotnet ef migrations add InitialCreate — generate the migration</a:t>
+            </a:r>
+          </a:p>
+          <a:p>
+            <a:pPr marL="285750" indent="-285750">
+              <a:buFont typeface="Arial"/>
+              <a:buChar char="•"/>
+            </a:pPr>
+            <a:r>
+              <a:rPr lang="en-US" sz="1800" dirty="0"/>
+              <a:t>dotnet ef database update — apply pending migrations to the DB</a:t>
+            </a:r>
+          </a:p>
+          <a:p>
+            <a:pPr marL="285750" indent="-285750">
+              <a:buFont typeface="Arial"/>
+              <a:buChar char="•"/>
+            </a:pPr>
+            <a:r>
+              <a:rPr lang="en-US" sz="1800" dirty="0"/>
+              <a:t>dotnet ef migrations remove — undo the last unapplied migration</a:t>
+            </a:r>
+          </a:p>
+          <a:p>
+            <a:pPr marL="285750" indent="-285750">
+              <a:buFont typeface="Arial"/>
+              <a:buChar char="•"/>
+            </a:pPr>
+            <a:r>
+              <a:rPr lang="en-US" sz="1800" dirty="0"/>
+              <a:t>Each migration creates Up() and Down() methods — forward &amp; rollback</a:t>
+            </a:r>
+          </a:p>
+          <a:p>
+            <a:pPr marL="285750" indent="-285750">
+              <a:buFont typeface="Arial"/>
+              <a:buChar char="•"/>
+            </a:pPr>
+            <a:r>
+              <a:rPr lang="en-US" sz="1800" dirty="0"/>
+              <a:t>Never edit applied migrations — add a new one for further changes</a:t>
             </a:r>
           </a:p>
         </p:txBody>
       </p:sp>
     </p:spTree>
+    <p:extLst>
+      <p:ext uri="{BB962C8B-B14F-4D97-AF65-F5344CB8AC3E}">
+        <p14:creationId xmlns:p14="http://schemas.microsoft.com/office/powerpoint/2010/main" val="540449943"/>
+      </p:ext>
+    </p:extLst>
   </p:cSld>
   <p:clrMapOvr>
     <a:masterClrMapping/>
@@ -16842,57 +18599,767 @@
       </p:grpSpPr>
       <p:sp>
         <p:nvSpPr>
-          <p:cNvPr id="2" name="Title 1"/>
-          <p:cNvSpPr>
-            <a:spLocks noGrp="1"/>
-          </p:cNvSpPr>
-          <p:nvPr>
-            <p:ph type="title"/>
-          </p:nvPr>
+          <p:cNvPr id="2" name="Rectangle: Rounded Corners 1">
+            <a:extLst>
+              <a:ext uri="{FF2B5EF4-FFF2-40B4-BE49-F238E27FC236}">
+                <a16:creationId xmlns:a16="http://schemas.microsoft.com/office/drawing/2014/main" id="{2529826A-02ED-46C2-B4E6-1BFCBF4387FF}"/>
+              </a:ext>
+            </a:extLst>
+          </p:cNvPr>
+          <p:cNvSpPr/>
+          <p:nvPr/>
         </p:nvSpPr>
-        <p:spPr/>
+        <p:spPr>
+          <a:xfrm>
+            <a:off x="508000" y="381000"/>
+            <a:ext cx="1651000" cy="457200"/>
+          </a:xfrm>
+          <a:prstGeom prst="roundRect">
+            <a:avLst/>
+          </a:prstGeom>
+          <a:solidFill>
+            <a:srgbClr val="FF6E40"/>
+          </a:solidFill>
+          <a:ln w="15875" cap="flat" cmpd="sng" algn="ctr">
+            <a:noFill/>
+            <a:prstDash val="solid"/>
+          </a:ln>
+        </p:spPr>
+        <p:style>
+          <a:lnRef idx="2">
+            <a:schemeClr val="accent1">
+              <a:shade val="15000"/>
+            </a:schemeClr>
+          </a:lnRef>
+          <a:fillRef idx="1">
+            <a:schemeClr val="accent1"/>
+          </a:fillRef>
+          <a:effectRef idx="0">
+            <a:schemeClr val="accent1"/>
+          </a:effectRef>
+          <a:fontRef idx="minor">
+            <a:schemeClr val="lt1"/>
+          </a:fontRef>
+        </p:style>
         <p:txBody>
-          <a:bodyPr/>
+          <a:bodyPr vertOverflow="clip" horzOverflow="clip" rtlCol="0" anchor="ctr" anchorCtr="0">
+            <a:noAutofit/>
+          </a:bodyPr>
           <a:lstStyle/>
           <a:p>
-            <a:r>
-              <a:t>Best Practices</a:t>
+            <a:pPr algn="l"/>
+            <a:r>
+              <a:rPr lang="en-IN" sz="1600" b="1">
+                <a:solidFill>
+                  <a:srgbClr val="FFFFFF"/>
+                </a:solidFill>
+                <a:latin typeface="Segoe UI"/>
+                <a:cs typeface="Segoe UI"/>
+              </a:rPr>
+              <a:t>🧪 LAB 4</a:t>
             </a:r>
           </a:p>
         </p:txBody>
       </p:sp>
       <p:sp>
         <p:nvSpPr>
-          <p:cNvPr id="3" name="Content Placeholder 2"/>
-          <p:cNvSpPr>
-            <a:spLocks noGrp="1"/>
-          </p:cNvSpPr>
-          <p:nvPr>
-            <p:ph idx="1"/>
-          </p:nvPr>
+          <p:cNvPr id="3" name="TextBox 2">
+            <a:extLst>
+              <a:ext uri="{FF2B5EF4-FFF2-40B4-BE49-F238E27FC236}">
+                <a16:creationId xmlns:a16="http://schemas.microsoft.com/office/drawing/2014/main" id="{15BBB350-274B-450F-B72C-B74219FB76C8}"/>
+              </a:ext>
+            </a:extLst>
+          </p:cNvPr>
+          <p:cNvSpPr txBox="1"/>
+          <p:nvPr/>
         </p:nvSpPr>
-        <p:spPr/>
+        <p:spPr>
+          <a:xfrm>
+            <a:off x="2349500" y="381000"/>
+            <a:ext cx="6286500" cy="508000"/>
+          </a:xfrm>
+          <a:prstGeom prst="rect">
+            <a:avLst/>
+          </a:prstGeom>
+          <a:noFill/>
+        </p:spPr>
         <p:txBody>
-          <a:bodyPr/>
+          <a:bodyPr vertOverflow="overflow" vert="horz" wrap="square" rtlCol="0" anchor="ctr" anchorCtr="0">
+            <a:noAutofit/>
+          </a:bodyPr>
           <a:lstStyle/>
           <a:p>
-            <a:r>
-              <a:t>Use async methods</a:t>
-            </a:r>
-          </a:p>
-          <a:p>
-            <a:r>
-              <a:t>Use repository pattern</a:t>
-            </a:r>
-          </a:p>
-          <a:p>
-            <a:r>
-              <a:t>Avoid large queries</a:t>
-            </a:r>
+            <a:pPr algn="l"/>
+            <a:r>
+              <a:rPr lang="en-IN" sz="2800" b="1">
+                <a:solidFill>
+                  <a:srgbClr val="00E5FF"/>
+                </a:solidFill>
+                <a:latin typeface="Segoe UI"/>
+                <a:cs typeface="Segoe UI"/>
+              </a:rPr>
+              <a:t>Your First Migration</a:t>
+            </a:r>
+          </a:p>
+        </p:txBody>
+      </p:sp>
+      <p:sp>
+        <p:nvSpPr>
+          <p:cNvPr id="4" name="TextBox 3">
+            <a:extLst>
+              <a:ext uri="{FF2B5EF4-FFF2-40B4-BE49-F238E27FC236}">
+                <a16:creationId xmlns:a16="http://schemas.microsoft.com/office/drawing/2014/main" id="{BC1071C4-5380-4896-84C2-10BB43220DD9}"/>
+              </a:ext>
+            </a:extLst>
+          </p:cNvPr>
+          <p:cNvSpPr txBox="1"/>
+          <p:nvPr/>
+        </p:nvSpPr>
+        <p:spPr>
+          <a:xfrm>
+            <a:off x="508000" y="1143000"/>
+            <a:ext cx="8128000" cy="228600"/>
+          </a:xfrm>
+          <a:prstGeom prst="rect">
+            <a:avLst/>
+          </a:prstGeom>
+          <a:noFill/>
+        </p:spPr>
+        <p:txBody>
+          <a:bodyPr vertOverflow="overflow" vert="horz" wrap="square" rtlCol="0" anchor="t" anchorCtr="0">
+            <a:spAutoFit/>
+          </a:bodyPr>
+          <a:lstStyle/>
+          <a:p>
+            <a:pPr algn="l"/>
+            <a:r>
+              <a:rPr lang="en-IN" sz="1100" b="1">
+                <a:solidFill>
+                  <a:srgbClr val="64FFDA"/>
+                </a:solidFill>
+                <a:latin typeface="Segoe UI"/>
+                <a:cs typeface="Segoe UI"/>
+              </a:rPr>
+              <a:t>SCENARIO</a:t>
+            </a:r>
+          </a:p>
+        </p:txBody>
+      </p:sp>
+      <p:sp>
+        <p:nvSpPr>
+          <p:cNvPr id="5" name="TextBox 4">
+            <a:extLst>
+              <a:ext uri="{FF2B5EF4-FFF2-40B4-BE49-F238E27FC236}">
+                <a16:creationId xmlns:a16="http://schemas.microsoft.com/office/drawing/2014/main" id="{177AF618-4CCE-4B4F-9A11-17504AEF9193}"/>
+              </a:ext>
+            </a:extLst>
+          </p:cNvPr>
+          <p:cNvSpPr txBox="1"/>
+          <p:nvPr/>
+        </p:nvSpPr>
+        <p:spPr>
+          <a:xfrm>
+            <a:off x="508000" y="1397000"/>
+            <a:ext cx="8128000" cy="762000"/>
+          </a:xfrm>
+          <a:prstGeom prst="rect">
+            <a:avLst/>
+          </a:prstGeom>
+          <a:noFill/>
+        </p:spPr>
+        <p:txBody>
+          <a:bodyPr vertOverflow="overflow" vert="horz" wrap="square" rtlCol="0" anchor="t" anchorCtr="0">
+            <a:spAutoFit/>
+          </a:bodyPr>
+          <a:lstStyle/>
+          <a:p>
+            <a:pPr algn="l"/>
+            <a:r>
+              <a:rPr lang="en-US" sz="1600">
+                <a:solidFill>
+                  <a:srgbClr val="E8F4F8"/>
+                </a:solidFill>
+                <a:latin typeface="Segoe UI"/>
+                <a:cs typeface="Segoe UI"/>
+              </a:rPr>
+              <a:t>Create the initial migration, inspect the generated code, and apply it to a real database.</a:t>
+            </a:r>
+            <a:endParaRPr lang="en-IN" sz="1600">
+              <a:solidFill>
+                <a:srgbClr val="E8F4F8"/>
+              </a:solidFill>
+              <a:latin typeface="Segoe UI"/>
+              <a:cs typeface="Segoe UI"/>
+            </a:endParaRPr>
+          </a:p>
+        </p:txBody>
+      </p:sp>
+      <p:sp>
+        <p:nvSpPr>
+          <p:cNvPr id="6" name="TextBox 5">
+            <a:extLst>
+              <a:ext uri="{FF2B5EF4-FFF2-40B4-BE49-F238E27FC236}">
+                <a16:creationId xmlns:a16="http://schemas.microsoft.com/office/drawing/2014/main" id="{37234438-82A6-4091-940A-90A9CBB64AEA}"/>
+              </a:ext>
+            </a:extLst>
+          </p:cNvPr>
+          <p:cNvSpPr txBox="1"/>
+          <p:nvPr/>
+        </p:nvSpPr>
+        <p:spPr>
+          <a:xfrm>
+            <a:off x="508000" y="2286000"/>
+            <a:ext cx="8128000" cy="228600"/>
+          </a:xfrm>
+          <a:prstGeom prst="rect">
+            <a:avLst/>
+          </a:prstGeom>
+          <a:noFill/>
+        </p:spPr>
+        <p:txBody>
+          <a:bodyPr vertOverflow="overflow" vert="horz" wrap="square" rtlCol="0" anchor="t" anchorCtr="0">
+            <a:spAutoFit/>
+          </a:bodyPr>
+          <a:lstStyle/>
+          <a:p>
+            <a:pPr algn="l"/>
+            <a:r>
+              <a:rPr lang="en-IN" sz="1100" b="1">
+                <a:solidFill>
+                  <a:srgbClr val="64FFDA"/>
+                </a:solidFill>
+                <a:latin typeface="Segoe UI"/>
+                <a:cs typeface="Segoe UI"/>
+              </a:rPr>
+              <a:t>YOUR TASKS</a:t>
+            </a:r>
+          </a:p>
+        </p:txBody>
+      </p:sp>
+      <p:sp>
+        <p:nvSpPr>
+          <p:cNvPr id="7" name="Oval 6">
+            <a:extLst>
+              <a:ext uri="{FF2B5EF4-FFF2-40B4-BE49-F238E27FC236}">
+                <a16:creationId xmlns:a16="http://schemas.microsoft.com/office/drawing/2014/main" id="{E037FE32-2B1E-43D2-9E0D-0205C89044F5}"/>
+              </a:ext>
+            </a:extLst>
+          </p:cNvPr>
+          <p:cNvSpPr/>
+          <p:nvPr/>
+        </p:nvSpPr>
+        <p:spPr>
+          <a:xfrm>
+            <a:off x="571500" y="2603500"/>
+            <a:ext cx="355600" cy="355600"/>
+          </a:xfrm>
+          <a:prstGeom prst="ellipse">
+            <a:avLst/>
+          </a:prstGeom>
+          <a:solidFill>
+            <a:srgbClr val="7C4DFF"/>
+          </a:solidFill>
+          <a:ln w="15875" cap="flat" cmpd="sng" algn="ctr">
+            <a:noFill/>
+            <a:prstDash val="solid"/>
+          </a:ln>
+        </p:spPr>
+        <p:style>
+          <a:lnRef idx="2">
+            <a:schemeClr val="accent1">
+              <a:shade val="15000"/>
+            </a:schemeClr>
+          </a:lnRef>
+          <a:fillRef idx="1">
+            <a:schemeClr val="accent1"/>
+          </a:fillRef>
+          <a:effectRef idx="0">
+            <a:schemeClr val="accent1"/>
+          </a:effectRef>
+          <a:fontRef idx="minor">
+            <a:schemeClr val="lt1"/>
+          </a:fontRef>
+        </p:style>
+        <p:txBody>
+          <a:bodyPr vertOverflow="clip" horzOverflow="clip" wrap="none" rtlCol="0" anchor="ctr" anchorCtr="0">
+            <a:noAutofit/>
+          </a:bodyPr>
+          <a:lstStyle/>
+          <a:p>
+            <a:pPr algn="l"/>
+            <a:r>
+              <a:rPr lang="en-IN" sz="1400" b="1">
+                <a:solidFill>
+                  <a:srgbClr val="FFFFFF"/>
+                </a:solidFill>
+                <a:latin typeface="Segoe UI"/>
+                <a:cs typeface="Segoe UI"/>
+              </a:rPr>
+              <a:t>1</a:t>
+            </a:r>
+          </a:p>
+        </p:txBody>
+      </p:sp>
+      <p:sp>
+        <p:nvSpPr>
+          <p:cNvPr id="8" name="TextBox 7">
+            <a:extLst>
+              <a:ext uri="{FF2B5EF4-FFF2-40B4-BE49-F238E27FC236}">
+                <a16:creationId xmlns:a16="http://schemas.microsoft.com/office/drawing/2014/main" id="{F615530C-0232-4D4B-93DE-AB8FEDB1E6B6}"/>
+              </a:ext>
+            </a:extLst>
+          </p:cNvPr>
+          <p:cNvSpPr txBox="1"/>
+          <p:nvPr/>
+        </p:nvSpPr>
+        <p:spPr>
+          <a:xfrm>
+            <a:off x="1079500" y="2603500"/>
+            <a:ext cx="7556500" cy="457200"/>
+          </a:xfrm>
+          <a:prstGeom prst="rect">
+            <a:avLst/>
+          </a:prstGeom>
+          <a:noFill/>
+        </p:spPr>
+        <p:txBody>
+          <a:bodyPr vertOverflow="overflow" vert="horz" wrap="square" rtlCol="0" anchor="t" anchorCtr="0">
+            <a:noAutofit/>
+          </a:bodyPr>
+          <a:lstStyle/>
+          <a:p>
+            <a:pPr algn="l"/>
+            <a:r>
+              <a:rPr lang="en-US" sz="1500">
+                <a:solidFill>
+                  <a:srgbClr val="E8F4F8"/>
+                </a:solidFill>
+                <a:latin typeface="Segoe UI"/>
+                <a:cs typeface="Segoe UI"/>
+              </a:rPr>
+              <a:t>dotnet ef migrations add InitialCreate</a:t>
+            </a:r>
+            <a:endParaRPr lang="en-IN" sz="1500">
+              <a:solidFill>
+                <a:srgbClr val="E8F4F8"/>
+              </a:solidFill>
+              <a:latin typeface="Segoe UI"/>
+              <a:cs typeface="Segoe UI"/>
+            </a:endParaRPr>
+          </a:p>
+        </p:txBody>
+      </p:sp>
+      <p:sp>
+        <p:nvSpPr>
+          <p:cNvPr id="9" name="Oval 8">
+            <a:extLst>
+              <a:ext uri="{FF2B5EF4-FFF2-40B4-BE49-F238E27FC236}">
+                <a16:creationId xmlns:a16="http://schemas.microsoft.com/office/drawing/2014/main" id="{D36472A0-1547-493F-AB69-ED4663F66BB2}"/>
+              </a:ext>
+            </a:extLst>
+          </p:cNvPr>
+          <p:cNvSpPr/>
+          <p:nvPr/>
+        </p:nvSpPr>
+        <p:spPr>
+          <a:xfrm>
+            <a:off x="571500" y="3136900"/>
+            <a:ext cx="355600" cy="355600"/>
+          </a:xfrm>
+          <a:prstGeom prst="ellipse">
+            <a:avLst/>
+          </a:prstGeom>
+          <a:solidFill>
+            <a:srgbClr val="7C4DFF"/>
+          </a:solidFill>
+          <a:ln w="15875" cap="flat" cmpd="sng" algn="ctr">
+            <a:noFill/>
+            <a:prstDash val="solid"/>
+          </a:ln>
+        </p:spPr>
+        <p:style>
+          <a:lnRef idx="2">
+            <a:schemeClr val="accent1">
+              <a:shade val="15000"/>
+            </a:schemeClr>
+          </a:lnRef>
+          <a:fillRef idx="1">
+            <a:schemeClr val="accent1"/>
+          </a:fillRef>
+          <a:effectRef idx="0">
+            <a:schemeClr val="accent1"/>
+          </a:effectRef>
+          <a:fontRef idx="minor">
+            <a:schemeClr val="lt1"/>
+          </a:fontRef>
+        </p:style>
+        <p:txBody>
+          <a:bodyPr vertOverflow="clip" horzOverflow="clip" wrap="none" rtlCol="0" anchor="ctr" anchorCtr="0">
+            <a:noAutofit/>
+          </a:bodyPr>
+          <a:lstStyle/>
+          <a:p>
+            <a:pPr algn="l"/>
+            <a:r>
+              <a:rPr lang="en-IN" sz="1400" b="1">
+                <a:solidFill>
+                  <a:srgbClr val="FFFFFF"/>
+                </a:solidFill>
+                <a:latin typeface="Segoe UI"/>
+                <a:cs typeface="Segoe UI"/>
+              </a:rPr>
+              <a:t>2</a:t>
+            </a:r>
+          </a:p>
+        </p:txBody>
+      </p:sp>
+      <p:sp>
+        <p:nvSpPr>
+          <p:cNvPr id="10" name="TextBox 9">
+            <a:extLst>
+              <a:ext uri="{FF2B5EF4-FFF2-40B4-BE49-F238E27FC236}">
+                <a16:creationId xmlns:a16="http://schemas.microsoft.com/office/drawing/2014/main" id="{D73B0B31-CD1C-4D06-8EFA-56487825A309}"/>
+              </a:ext>
+            </a:extLst>
+          </p:cNvPr>
+          <p:cNvSpPr txBox="1"/>
+          <p:nvPr/>
+        </p:nvSpPr>
+        <p:spPr>
+          <a:xfrm>
+            <a:off x="1079500" y="3136900"/>
+            <a:ext cx="7556500" cy="457200"/>
+          </a:xfrm>
+          <a:prstGeom prst="rect">
+            <a:avLst/>
+          </a:prstGeom>
+          <a:noFill/>
+        </p:spPr>
+        <p:txBody>
+          <a:bodyPr vertOverflow="overflow" vert="horz" wrap="square" rtlCol="0" anchor="t" anchorCtr="0">
+            <a:noAutofit/>
+          </a:bodyPr>
+          <a:lstStyle/>
+          <a:p>
+            <a:pPr algn="l"/>
+            <a:r>
+              <a:rPr lang="en-US" sz="1500">
+                <a:solidFill>
+                  <a:srgbClr val="E8F4F8"/>
+                </a:solidFill>
+                <a:latin typeface="Segoe UI"/>
+                <a:cs typeface="Segoe UI"/>
+              </a:rPr>
+              <a:t>Open Migrations/*_InitialCreate.cs — read Up() and Down()</a:t>
+            </a:r>
+            <a:endParaRPr lang="en-IN" sz="1500">
+              <a:solidFill>
+                <a:srgbClr val="E8F4F8"/>
+              </a:solidFill>
+              <a:latin typeface="Segoe UI"/>
+              <a:cs typeface="Segoe UI"/>
+            </a:endParaRPr>
+          </a:p>
+        </p:txBody>
+      </p:sp>
+      <p:sp>
+        <p:nvSpPr>
+          <p:cNvPr id="11" name="Oval 10">
+            <a:extLst>
+              <a:ext uri="{FF2B5EF4-FFF2-40B4-BE49-F238E27FC236}">
+                <a16:creationId xmlns:a16="http://schemas.microsoft.com/office/drawing/2014/main" id="{09FE2437-0FEE-4F07-9577-0DABCD854998}"/>
+              </a:ext>
+            </a:extLst>
+          </p:cNvPr>
+          <p:cNvSpPr/>
+          <p:nvPr/>
+        </p:nvSpPr>
+        <p:spPr>
+          <a:xfrm>
+            <a:off x="571500" y="3670300"/>
+            <a:ext cx="355600" cy="355600"/>
+          </a:xfrm>
+          <a:prstGeom prst="ellipse">
+            <a:avLst/>
+          </a:prstGeom>
+          <a:solidFill>
+            <a:srgbClr val="7C4DFF"/>
+          </a:solidFill>
+          <a:ln w="15875" cap="flat" cmpd="sng" algn="ctr">
+            <a:noFill/>
+            <a:prstDash val="solid"/>
+          </a:ln>
+        </p:spPr>
+        <p:style>
+          <a:lnRef idx="2">
+            <a:schemeClr val="accent1">
+              <a:shade val="15000"/>
+            </a:schemeClr>
+          </a:lnRef>
+          <a:fillRef idx="1">
+            <a:schemeClr val="accent1"/>
+          </a:fillRef>
+          <a:effectRef idx="0">
+            <a:schemeClr val="accent1"/>
+          </a:effectRef>
+          <a:fontRef idx="minor">
+            <a:schemeClr val="lt1"/>
+          </a:fontRef>
+        </p:style>
+        <p:txBody>
+          <a:bodyPr vertOverflow="clip" horzOverflow="clip" wrap="none" rtlCol="0" anchor="ctr" anchorCtr="0">
+            <a:noAutofit/>
+          </a:bodyPr>
+          <a:lstStyle/>
+          <a:p>
+            <a:pPr algn="l"/>
+            <a:r>
+              <a:rPr lang="en-IN" sz="1400" b="1">
+                <a:solidFill>
+                  <a:srgbClr val="FFFFFF"/>
+                </a:solidFill>
+                <a:latin typeface="Segoe UI"/>
+                <a:cs typeface="Segoe UI"/>
+              </a:rPr>
+              <a:t>3</a:t>
+            </a:r>
+          </a:p>
+        </p:txBody>
+      </p:sp>
+      <p:sp>
+        <p:nvSpPr>
+          <p:cNvPr id="12" name="TextBox 11">
+            <a:extLst>
+              <a:ext uri="{FF2B5EF4-FFF2-40B4-BE49-F238E27FC236}">
+                <a16:creationId xmlns:a16="http://schemas.microsoft.com/office/drawing/2014/main" id="{BD42BA4D-2D2E-4284-A388-1F85FFDAA749}"/>
+              </a:ext>
+            </a:extLst>
+          </p:cNvPr>
+          <p:cNvSpPr txBox="1"/>
+          <p:nvPr/>
+        </p:nvSpPr>
+        <p:spPr>
+          <a:xfrm>
+            <a:off x="1079500" y="3670300"/>
+            <a:ext cx="7556500" cy="457200"/>
+          </a:xfrm>
+          <a:prstGeom prst="rect">
+            <a:avLst/>
+          </a:prstGeom>
+          <a:noFill/>
+        </p:spPr>
+        <p:txBody>
+          <a:bodyPr vertOverflow="overflow" vert="horz" wrap="square" rtlCol="0" anchor="t" anchorCtr="0">
+            <a:noAutofit/>
+          </a:bodyPr>
+          <a:lstStyle/>
+          <a:p>
+            <a:pPr algn="l"/>
+            <a:r>
+              <a:rPr lang="en-IN" sz="1500">
+                <a:solidFill>
+                  <a:srgbClr val="E8F4F8"/>
+                </a:solidFill>
+                <a:latin typeface="Segoe UI"/>
+                <a:cs typeface="Segoe UI"/>
+              </a:rPr>
+              <a:t>dotnet ef database update</a:t>
+            </a:r>
+          </a:p>
+        </p:txBody>
+      </p:sp>
+      <p:sp>
+        <p:nvSpPr>
+          <p:cNvPr id="13" name="Oval 12">
+            <a:extLst>
+              <a:ext uri="{FF2B5EF4-FFF2-40B4-BE49-F238E27FC236}">
+                <a16:creationId xmlns:a16="http://schemas.microsoft.com/office/drawing/2014/main" id="{94C4676E-4D85-4D1B-A254-411479C78411}"/>
+              </a:ext>
+            </a:extLst>
+          </p:cNvPr>
+          <p:cNvSpPr/>
+          <p:nvPr/>
+        </p:nvSpPr>
+        <p:spPr>
+          <a:xfrm>
+            <a:off x="571500" y="4203700"/>
+            <a:ext cx="355600" cy="355600"/>
+          </a:xfrm>
+          <a:prstGeom prst="ellipse">
+            <a:avLst/>
+          </a:prstGeom>
+          <a:solidFill>
+            <a:srgbClr val="7C4DFF"/>
+          </a:solidFill>
+          <a:ln w="15875" cap="flat" cmpd="sng" algn="ctr">
+            <a:noFill/>
+            <a:prstDash val="solid"/>
+          </a:ln>
+        </p:spPr>
+        <p:style>
+          <a:lnRef idx="2">
+            <a:schemeClr val="accent1">
+              <a:shade val="15000"/>
+            </a:schemeClr>
+          </a:lnRef>
+          <a:fillRef idx="1">
+            <a:schemeClr val="accent1"/>
+          </a:fillRef>
+          <a:effectRef idx="0">
+            <a:schemeClr val="accent1"/>
+          </a:effectRef>
+          <a:fontRef idx="minor">
+            <a:schemeClr val="lt1"/>
+          </a:fontRef>
+        </p:style>
+        <p:txBody>
+          <a:bodyPr vertOverflow="clip" horzOverflow="clip" wrap="none" rtlCol="0" anchor="ctr" anchorCtr="0">
+            <a:noAutofit/>
+          </a:bodyPr>
+          <a:lstStyle/>
+          <a:p>
+            <a:pPr algn="l"/>
+            <a:r>
+              <a:rPr lang="en-IN" sz="1400" b="1">
+                <a:solidFill>
+                  <a:srgbClr val="FFFFFF"/>
+                </a:solidFill>
+                <a:latin typeface="Segoe UI"/>
+                <a:cs typeface="Segoe UI"/>
+              </a:rPr>
+              <a:t>4</a:t>
+            </a:r>
+          </a:p>
+        </p:txBody>
+      </p:sp>
+      <p:sp>
+        <p:nvSpPr>
+          <p:cNvPr id="14" name="TextBox 13">
+            <a:extLst>
+              <a:ext uri="{FF2B5EF4-FFF2-40B4-BE49-F238E27FC236}">
+                <a16:creationId xmlns:a16="http://schemas.microsoft.com/office/drawing/2014/main" id="{BC2712FF-A0EF-42EF-BD9F-A3754F6B57E0}"/>
+              </a:ext>
+            </a:extLst>
+          </p:cNvPr>
+          <p:cNvSpPr txBox="1"/>
+          <p:nvPr/>
+        </p:nvSpPr>
+        <p:spPr>
+          <a:xfrm>
+            <a:off x="1079500" y="4203700"/>
+            <a:ext cx="7556500" cy="457200"/>
+          </a:xfrm>
+          <a:prstGeom prst="rect">
+            <a:avLst/>
+          </a:prstGeom>
+          <a:noFill/>
+        </p:spPr>
+        <p:txBody>
+          <a:bodyPr vertOverflow="overflow" vert="horz" wrap="square" rtlCol="0" anchor="t" anchorCtr="0">
+            <a:noAutofit/>
+          </a:bodyPr>
+          <a:lstStyle/>
+          <a:p>
+            <a:pPr algn="l"/>
+            <a:r>
+              <a:rPr lang="en-US" sz="1500">
+                <a:solidFill>
+                  <a:srgbClr val="E8F4F8"/>
+                </a:solidFill>
+                <a:latin typeface="Segoe UI"/>
+                <a:cs typeface="Segoe UI"/>
+              </a:rPr>
+              <a:t>Add a Description column to Product and migrate again</a:t>
+            </a:r>
+            <a:endParaRPr lang="en-IN" sz="1500">
+              <a:solidFill>
+                <a:srgbClr val="E8F4F8"/>
+              </a:solidFill>
+              <a:latin typeface="Segoe UI"/>
+              <a:cs typeface="Segoe UI"/>
+            </a:endParaRPr>
+          </a:p>
+        </p:txBody>
+      </p:sp>
+      <p:sp>
+        <p:nvSpPr>
+          <p:cNvPr id="15" name="Rectangle: Rounded Corners 14">
+            <a:extLst>
+              <a:ext uri="{FF2B5EF4-FFF2-40B4-BE49-F238E27FC236}">
+                <a16:creationId xmlns:a16="http://schemas.microsoft.com/office/drawing/2014/main" id="{581A8A85-C15A-4329-91AC-4ABFCA5894D8}"/>
+              </a:ext>
+            </a:extLst>
+          </p:cNvPr>
+          <p:cNvSpPr/>
+          <p:nvPr/>
+        </p:nvSpPr>
+        <p:spPr>
+          <a:xfrm>
+            <a:off x="508000" y="5842000"/>
+            <a:ext cx="8128000" cy="736600"/>
+          </a:xfrm>
+          <a:prstGeom prst="roundRect">
+            <a:avLst/>
+          </a:prstGeom>
+          <a:solidFill>
+            <a:srgbClr val="1A3A52"/>
+          </a:solidFill>
+          <a:ln w="19050" cap="flat" cmpd="sng" algn="ctr">
+            <a:solidFill>
+              <a:srgbClr val="64FFDA"/>
+            </a:solidFill>
+            <a:prstDash val="solid"/>
+          </a:ln>
+        </p:spPr>
+        <p:style>
+          <a:lnRef idx="2">
+            <a:schemeClr val="accent1">
+              <a:shade val="15000"/>
+            </a:schemeClr>
+          </a:lnRef>
+          <a:fillRef idx="1">
+            <a:schemeClr val="accent1"/>
+          </a:fillRef>
+          <a:effectRef idx="0">
+            <a:schemeClr val="accent1"/>
+          </a:effectRef>
+          <a:fontRef idx="minor">
+            <a:schemeClr val="lt1"/>
+          </a:fontRef>
+        </p:style>
+        <p:txBody>
+          <a:bodyPr vertOverflow="clip" horzOverflow="clip" rtlCol="0" anchor="ctr" anchorCtr="0">
+            <a:noAutofit/>
+          </a:bodyPr>
+          <a:lstStyle/>
+          <a:p>
+            <a:pPr algn="l"/>
+            <a:r>
+              <a:rPr lang="en-US" sz="1300">
+                <a:solidFill>
+                  <a:srgbClr val="E8F4F8"/>
+                </a:solidFill>
+                <a:latin typeface="Segoe UI"/>
+                <a:cs typeface="Segoe UI"/>
+              </a:rPr>
+              <a:t>💡 HINT  Use dotnet ef migrations script to see the raw SQL EF will run.</a:t>
+            </a:r>
+            <a:endParaRPr lang="en-IN" sz="1300">
+              <a:solidFill>
+                <a:srgbClr val="E8F4F8"/>
+              </a:solidFill>
+              <a:latin typeface="Segoe UI"/>
+              <a:cs typeface="Segoe UI"/>
+            </a:endParaRPr>
           </a:p>
         </p:txBody>
       </p:sp>
     </p:spTree>
+    <p:extLst>
+      <p:ext uri="{BB962C8B-B14F-4D97-AF65-F5344CB8AC3E}">
+        <p14:creationId xmlns:p14="http://schemas.microsoft.com/office/powerpoint/2010/main" val="3142117971"/>
+      </p:ext>
+    </p:extLst>
   </p:cSld>
   <p:clrMapOvr>
     <a:masterClrMapping/>
@@ -16933,7 +19400,567 @@
           <a:lstStyle/>
           <a:p>
             <a:r>
-              <a:t>Summary</a:t>
+              <a:t>Relationships</a:t>
+            </a:r>
+          </a:p>
+        </p:txBody>
+      </p:sp>
+      <p:sp>
+        <p:nvSpPr>
+          <p:cNvPr id="3" name="Content Placeholder 2"/>
+          <p:cNvSpPr>
+            <a:spLocks noGrp="1"/>
+          </p:cNvSpPr>
+          <p:nvPr>
+            <p:ph idx="1"/>
+          </p:nvPr>
+        </p:nvSpPr>
+        <p:spPr>
+          <a:xfrm>
+            <a:off x="768096" y="2286000"/>
+            <a:ext cx="7290055" cy="2540000"/>
+          </a:xfrm>
+        </p:spPr>
+        <p:txBody>
+          <a:bodyPr>
+            <a:normAutofit fontScale="92500"/>
+          </a:bodyPr>
+          <a:lstStyle/>
+          <a:p>
+            <a:pPr marL="285750" indent="-285750">
+              <a:buFont typeface="Arial"/>
+              <a:buChar char="•"/>
+            </a:pPr>
+            <a:r>
+              <a:rPr lang="en-US" sz="1800" dirty="0"/>
+              <a:t>One-to-One — User ↔ Profile, shared primary key</a:t>
+            </a:r>
+          </a:p>
+          <a:p>
+            <a:pPr marL="285750" indent="-285750">
+              <a:buFont typeface="Arial"/>
+              <a:buChar char="•"/>
+            </a:pPr>
+            <a:r>
+              <a:rPr lang="en-US" sz="1800" dirty="0"/>
+              <a:t>One-to-Many — Customer → Orders, foreign key on the 'many' side</a:t>
+            </a:r>
+          </a:p>
+          <a:p>
+            <a:pPr marL="285750" indent="-285750">
+              <a:buFont typeface="Arial"/>
+              <a:buChar char="•"/>
+            </a:pPr>
+            <a:r>
+              <a:rPr lang="en-US" sz="1800" dirty="0"/>
+              <a:t>Many-to-Many — Student ↔ Course, EF Core 5+ auto-creates join table</a:t>
+            </a:r>
+          </a:p>
+          <a:p>
+            <a:pPr marL="285750" indent="-285750">
+              <a:buFont typeface="Arial"/>
+              <a:buChar char="•"/>
+            </a:pPr>
+            <a:r>
+              <a:rPr lang="en-US" sz="1800" dirty="0"/>
+              <a:t>Navigation properties express relationships in C# (e.g. order.Customer)</a:t>
+            </a:r>
+          </a:p>
+          <a:p>
+            <a:pPr marL="285750" indent="-285750">
+              <a:buFont typeface="Arial"/>
+              <a:buChar char="•"/>
+            </a:pPr>
+            <a:r>
+              <a:rPr lang="en-US" sz="1800" dirty="0"/>
+              <a:t>[ForeignKey] attribute or Fluent API to override conventions</a:t>
+            </a:r>
+          </a:p>
+          <a:p>
+            <a:pPr marL="285750" indent="-285750">
+              <a:buFont typeface="Arial"/>
+              <a:buChar char="•"/>
+            </a:pPr>
+            <a:r>
+              <a:rPr lang="en-US" sz="1800" dirty="0"/>
+              <a:t>Cascade delete: configure via OnDelete(DeleteBehavior.Cascade/Restrict)</a:t>
+            </a:r>
+          </a:p>
+        </p:txBody>
+      </p:sp>
+      <p:sp>
+        <p:nvSpPr>
+          <p:cNvPr id="4" name="Rectangle 3">
+            <a:extLst>
+              <a:ext uri="{FF2B5EF4-FFF2-40B4-BE49-F238E27FC236}">
+                <a16:creationId xmlns:a16="http://schemas.microsoft.com/office/drawing/2014/main" id="{FBDC8D9B-31D4-4A0A-902A-6C7AD1CBA125}"/>
+              </a:ext>
+            </a:extLst>
+          </p:cNvPr>
+          <p:cNvSpPr/>
+          <p:nvPr/>
+        </p:nvSpPr>
+        <p:spPr>
+          <a:xfrm>
+            <a:off x="762000" y="5207000"/>
+            <a:ext cx="1651000" cy="889000"/>
+          </a:xfrm>
+          <a:prstGeom prst="rect">
+            <a:avLst/>
+          </a:prstGeom>
+          <a:solidFill>
+            <a:srgbClr val="00E5FF"/>
+          </a:solidFill>
+          <a:ln w="15875" cap="flat" cmpd="sng" algn="ctr">
+            <a:noFill/>
+            <a:prstDash val="solid"/>
+          </a:ln>
+        </p:spPr>
+        <p:style>
+          <a:lnRef idx="2">
+            <a:schemeClr val="accent1">
+              <a:shade val="15000"/>
+            </a:schemeClr>
+          </a:lnRef>
+          <a:fillRef idx="1">
+            <a:schemeClr val="accent1"/>
+          </a:fillRef>
+          <a:effectRef idx="0">
+            <a:schemeClr val="accent1"/>
+          </a:effectRef>
+          <a:fontRef idx="minor">
+            <a:schemeClr val="lt1"/>
+          </a:fontRef>
+        </p:style>
+        <p:txBody>
+          <a:bodyPr vertOverflow="clip" horzOverflow="clip" rtlCol="0" anchor="ctr" anchorCtr="0">
+            <a:noAutofit/>
+          </a:bodyPr>
+          <a:lstStyle/>
+          <a:p>
+            <a:pPr algn="l"/>
+            <a:r>
+              <a:rPr lang="en-IN" sz="1200" b="1">
+                <a:solidFill>
+                  <a:srgbClr val="0A1929"/>
+                </a:solidFill>
+                <a:latin typeface="Segoe UI"/>
+                <a:cs typeface="Segoe UI"/>
+              </a:rPr>
+              <a:t>Blog
+Id, Title</a:t>
+            </a:r>
+          </a:p>
+        </p:txBody>
+      </p:sp>
+      <p:sp>
+        <p:nvSpPr>
+          <p:cNvPr id="5" name="Rectangle 4">
+            <a:extLst>
+              <a:ext uri="{FF2B5EF4-FFF2-40B4-BE49-F238E27FC236}">
+                <a16:creationId xmlns:a16="http://schemas.microsoft.com/office/drawing/2014/main" id="{D1BA04AC-153B-4448-9AE6-2BC0499170CC}"/>
+              </a:ext>
+            </a:extLst>
+          </p:cNvPr>
+          <p:cNvSpPr/>
+          <p:nvPr/>
+        </p:nvSpPr>
+        <p:spPr>
+          <a:xfrm>
+            <a:off x="3746500" y="5207000"/>
+            <a:ext cx="1651000" cy="889000"/>
+          </a:xfrm>
+          <a:prstGeom prst="rect">
+            <a:avLst/>
+          </a:prstGeom>
+          <a:solidFill>
+            <a:srgbClr val="7C4DFF"/>
+          </a:solidFill>
+          <a:ln w="15875" cap="flat" cmpd="sng" algn="ctr">
+            <a:noFill/>
+            <a:prstDash val="solid"/>
+          </a:ln>
+        </p:spPr>
+        <p:style>
+          <a:lnRef idx="2">
+            <a:schemeClr val="accent1">
+              <a:shade val="15000"/>
+            </a:schemeClr>
+          </a:lnRef>
+          <a:fillRef idx="1">
+            <a:schemeClr val="accent1"/>
+          </a:fillRef>
+          <a:effectRef idx="0">
+            <a:schemeClr val="accent1"/>
+          </a:effectRef>
+          <a:fontRef idx="minor">
+            <a:schemeClr val="lt1"/>
+          </a:fontRef>
+        </p:style>
+        <p:txBody>
+          <a:bodyPr vertOverflow="clip" horzOverflow="clip" rtlCol="0" anchor="ctr" anchorCtr="0">
+            <a:noAutofit/>
+          </a:bodyPr>
+          <a:lstStyle/>
+          <a:p>
+            <a:pPr algn="l"/>
+            <a:r>
+              <a:rPr lang="en-IN" sz="1200" b="1">
+                <a:solidFill>
+                  <a:srgbClr val="FFFFFF"/>
+                </a:solidFill>
+                <a:latin typeface="Segoe UI"/>
+                <a:cs typeface="Segoe UI"/>
+              </a:rPr>
+              <a:t>Post
+Id, BlogId, Body</a:t>
+            </a:r>
+          </a:p>
+        </p:txBody>
+      </p:sp>
+      <p:sp>
+        <p:nvSpPr>
+          <p:cNvPr id="6" name="Rectangle 5">
+            <a:extLst>
+              <a:ext uri="{FF2B5EF4-FFF2-40B4-BE49-F238E27FC236}">
+                <a16:creationId xmlns:a16="http://schemas.microsoft.com/office/drawing/2014/main" id="{AF4D02C9-78B8-4E66-8696-EF7A10679CB1}"/>
+              </a:ext>
+            </a:extLst>
+          </p:cNvPr>
+          <p:cNvSpPr/>
+          <p:nvPr/>
+        </p:nvSpPr>
+        <p:spPr>
+          <a:xfrm>
+            <a:off x="6731000" y="5207000"/>
+            <a:ext cx="1651000" cy="889000"/>
+          </a:xfrm>
+          <a:prstGeom prst="rect">
+            <a:avLst/>
+          </a:prstGeom>
+          <a:solidFill>
+            <a:srgbClr val="FF6E40"/>
+          </a:solidFill>
+          <a:ln w="15875" cap="flat" cmpd="sng" algn="ctr">
+            <a:noFill/>
+            <a:prstDash val="solid"/>
+          </a:ln>
+        </p:spPr>
+        <p:style>
+          <a:lnRef idx="2">
+            <a:schemeClr val="accent1">
+              <a:shade val="15000"/>
+            </a:schemeClr>
+          </a:lnRef>
+          <a:fillRef idx="1">
+            <a:schemeClr val="accent1"/>
+          </a:fillRef>
+          <a:effectRef idx="0">
+            <a:schemeClr val="accent1"/>
+          </a:effectRef>
+          <a:fontRef idx="minor">
+            <a:schemeClr val="lt1"/>
+          </a:fontRef>
+        </p:style>
+        <p:txBody>
+          <a:bodyPr vertOverflow="clip" horzOverflow="clip" rtlCol="0" anchor="ctr" anchorCtr="0">
+            <a:noAutofit/>
+          </a:bodyPr>
+          <a:lstStyle/>
+          <a:p>
+            <a:pPr algn="l"/>
+            <a:r>
+              <a:rPr lang="en-IN" sz="1200" b="1">
+                <a:solidFill>
+                  <a:srgbClr val="FFFFFF"/>
+                </a:solidFill>
+                <a:latin typeface="Segoe UI"/>
+                <a:cs typeface="Segoe UI"/>
+              </a:rPr>
+              <a:t>Tag
+Id, Name</a:t>
+            </a:r>
+          </a:p>
+        </p:txBody>
+      </p:sp>
+      <p:sp>
+        <p:nvSpPr>
+          <p:cNvPr id="8" name="TextBox 7">
+            <a:extLst>
+              <a:ext uri="{FF2B5EF4-FFF2-40B4-BE49-F238E27FC236}">
+                <a16:creationId xmlns:a16="http://schemas.microsoft.com/office/drawing/2014/main" id="{8562EEAB-DA3E-417E-B535-A7CCF8E27B8D}"/>
+              </a:ext>
+            </a:extLst>
+          </p:cNvPr>
+          <p:cNvSpPr txBox="1"/>
+          <p:nvPr/>
+        </p:nvSpPr>
+        <p:spPr>
+          <a:xfrm>
+            <a:off x="2476500" y="5334000"/>
+            <a:ext cx="1270000" cy="254000"/>
+          </a:xfrm>
+          <a:prstGeom prst="rect">
+            <a:avLst/>
+          </a:prstGeom>
+          <a:noFill/>
+        </p:spPr>
+        <p:txBody>
+          <a:bodyPr vertOverflow="overflow" vert="horz" wrap="square" rtlCol="0" anchor="t" anchorCtr="0">
+            <a:spAutoFit/>
+          </a:bodyPr>
+          <a:lstStyle/>
+          <a:p>
+            <a:pPr algn="l"/>
+            <a:r>
+              <a:rPr lang="en-IN" sz="1100" b="1">
+                <a:solidFill>
+                  <a:srgbClr val="64FFDA"/>
+                </a:solidFill>
+              </a:rPr>
+              <a:t>1 ── *</a:t>
+            </a:r>
+          </a:p>
+        </p:txBody>
+      </p:sp>
+      <p:sp>
+        <p:nvSpPr>
+          <p:cNvPr id="10" name="TextBox 9">
+            <a:extLst>
+              <a:ext uri="{FF2B5EF4-FFF2-40B4-BE49-F238E27FC236}">
+                <a16:creationId xmlns:a16="http://schemas.microsoft.com/office/drawing/2014/main" id="{DD70BEB7-9D44-4262-8455-0480AAD68B73}"/>
+              </a:ext>
+            </a:extLst>
+          </p:cNvPr>
+          <p:cNvSpPr txBox="1"/>
+          <p:nvPr/>
+        </p:nvSpPr>
+        <p:spPr>
+          <a:xfrm>
+            <a:off x="5461000" y="5334000"/>
+            <a:ext cx="1270000" cy="254000"/>
+          </a:xfrm>
+          <a:prstGeom prst="rect">
+            <a:avLst/>
+          </a:prstGeom>
+          <a:noFill/>
+        </p:spPr>
+        <p:txBody>
+          <a:bodyPr vertOverflow="overflow" vert="horz" wrap="square" rtlCol="0" anchor="t" anchorCtr="0">
+            <a:spAutoFit/>
+          </a:bodyPr>
+          <a:lstStyle/>
+          <a:p>
+            <a:pPr algn="l"/>
+            <a:r>
+              <a:rPr lang="en-IN" sz="1100" b="1">
+                <a:solidFill>
+                  <a:srgbClr val="64FFDA"/>
+                </a:solidFill>
+              </a:rPr>
+              <a:t>* ── *</a:t>
+            </a:r>
+          </a:p>
+        </p:txBody>
+      </p:sp>
+      <p:sp>
+        <p:nvSpPr>
+          <p:cNvPr id="11" name="TextBox 10">
+            <a:extLst>
+              <a:ext uri="{FF2B5EF4-FFF2-40B4-BE49-F238E27FC236}">
+                <a16:creationId xmlns:a16="http://schemas.microsoft.com/office/drawing/2014/main" id="{FEC693DF-0579-485E-BAEF-4FCCD5B2CF55}"/>
+              </a:ext>
+            </a:extLst>
+          </p:cNvPr>
+          <p:cNvSpPr txBox="1"/>
+          <p:nvPr/>
+        </p:nvSpPr>
+        <p:spPr>
+          <a:xfrm>
+            <a:off x="635000" y="6286500"/>
+            <a:ext cx="7683500" cy="279400"/>
+          </a:xfrm>
+          <a:prstGeom prst="rect">
+            <a:avLst/>
+          </a:prstGeom>
+          <a:noFill/>
+        </p:spPr>
+        <p:txBody>
+          <a:bodyPr vertOverflow="overflow" vert="horz" wrap="square" rtlCol="0" anchor="t" anchorCtr="0">
+            <a:spAutoFit/>
+          </a:bodyPr>
+          <a:lstStyle/>
+          <a:p>
+            <a:pPr algn="l"/>
+            <a:r>
+              <a:rPr lang="en-US" sz="1100" i="1">
+                <a:solidFill>
+                  <a:srgbClr val="A0C4D8"/>
+                </a:solidFill>
+              </a:rPr>
+              <a:t>One-to-many: Blog has many Posts   •   Many-to-many: Post has many Tags</a:t>
+            </a:r>
+            <a:endParaRPr lang="en-IN" sz="1100" i="1">
+              <a:solidFill>
+                <a:srgbClr val="A0C4D8"/>
+              </a:solidFill>
+            </a:endParaRPr>
+          </a:p>
+        </p:txBody>
+      </p:sp>
+      <p:sp>
+        <p:nvSpPr>
+          <p:cNvPr id="12" name="Rectangle 11">
+            <a:extLst>
+              <a:ext uri="{FF2B5EF4-FFF2-40B4-BE49-F238E27FC236}">
+                <a16:creationId xmlns:a16="http://schemas.microsoft.com/office/drawing/2014/main" id="{FEF65299-76CD-4CA2-9A4A-ACFC1FAAEE07}"/>
+              </a:ext>
+            </a:extLst>
+          </p:cNvPr>
+          <p:cNvSpPr/>
+          <p:nvPr/>
+        </p:nvSpPr>
+        <p:spPr>
+          <a:xfrm>
+            <a:off x="2413000" y="5638800"/>
+            <a:ext cx="1333500" cy="25400"/>
+          </a:xfrm>
+          <a:prstGeom prst="rect">
+            <a:avLst/>
+          </a:prstGeom>
+          <a:solidFill>
+            <a:srgbClr val="E8F4F8"/>
+          </a:solidFill>
+          <a:ln w="15875" cap="flat" cmpd="sng" algn="ctr">
+            <a:noFill/>
+            <a:prstDash val="solid"/>
+          </a:ln>
+        </p:spPr>
+        <p:style>
+          <a:lnRef idx="2">
+            <a:schemeClr val="accent1">
+              <a:shade val="15000"/>
+            </a:schemeClr>
+          </a:lnRef>
+          <a:fillRef idx="1">
+            <a:schemeClr val="accent1"/>
+          </a:fillRef>
+          <a:effectRef idx="0">
+            <a:schemeClr val="accent1"/>
+          </a:effectRef>
+          <a:fontRef idx="minor">
+            <a:schemeClr val="lt1"/>
+          </a:fontRef>
+        </p:style>
+        <p:txBody>
+          <a:bodyPr vertOverflow="clip" horzOverflow="clip" rtlCol="0" anchor="t"/>
+          <a:lstStyle/>
+          <a:p>
+            <a:pPr algn="l"/>
+            <a:endParaRPr lang="en-IN"/>
+          </a:p>
+        </p:txBody>
+      </p:sp>
+      <p:sp>
+        <p:nvSpPr>
+          <p:cNvPr id="13" name="Rectangle 12">
+            <a:extLst>
+              <a:ext uri="{FF2B5EF4-FFF2-40B4-BE49-F238E27FC236}">
+                <a16:creationId xmlns:a16="http://schemas.microsoft.com/office/drawing/2014/main" id="{F0E8C046-1404-4476-8295-335F7AEB22BD}"/>
+              </a:ext>
+            </a:extLst>
+          </p:cNvPr>
+          <p:cNvSpPr/>
+          <p:nvPr/>
+        </p:nvSpPr>
+        <p:spPr>
+          <a:xfrm>
+            <a:off x="5397500" y="5638800"/>
+            <a:ext cx="1333500" cy="25400"/>
+          </a:xfrm>
+          <a:prstGeom prst="rect">
+            <a:avLst/>
+          </a:prstGeom>
+          <a:solidFill>
+            <a:srgbClr val="E8F4F8"/>
+          </a:solidFill>
+          <a:ln w="15875" cap="flat" cmpd="sng" algn="ctr">
+            <a:noFill/>
+            <a:prstDash val="solid"/>
+          </a:ln>
+        </p:spPr>
+        <p:style>
+          <a:lnRef idx="2">
+            <a:schemeClr val="accent1">
+              <a:shade val="15000"/>
+            </a:schemeClr>
+          </a:lnRef>
+          <a:fillRef idx="1">
+            <a:schemeClr val="accent1"/>
+          </a:fillRef>
+          <a:effectRef idx="0">
+            <a:schemeClr val="accent1"/>
+          </a:effectRef>
+          <a:fontRef idx="minor">
+            <a:schemeClr val="lt1"/>
+          </a:fontRef>
+        </p:style>
+        <p:txBody>
+          <a:bodyPr vertOverflow="clip" horzOverflow="clip" rtlCol="0" anchor="t"/>
+          <a:lstStyle/>
+          <a:p>
+            <a:pPr algn="l"/>
+            <a:endParaRPr lang="en-IN"/>
+          </a:p>
+        </p:txBody>
+      </p:sp>
+    </p:spTree>
+    <p:extLst>
+      <p:ext uri="{BB962C8B-B14F-4D97-AF65-F5344CB8AC3E}">
+        <p14:creationId xmlns:p14="http://schemas.microsoft.com/office/powerpoint/2010/main" val="1828199463"/>
+      </p:ext>
+    </p:extLst>
+  </p:cSld>
+  <p:clrMapOvr>
+    <a:masterClrMapping/>
+  </p:clrMapOvr>
+</p:sld>
+</file>
+
+<file path=ppt/slides/slide18.xml><?xml version="1.0" encoding="utf-8"?>
+<p:sld xmlns:a="http://schemas.openxmlformats.org/drawingml/2006/main" xmlns:r="http://schemas.openxmlformats.org/officeDocument/2006/relationships" xmlns:p="http://schemas.openxmlformats.org/presentationml/2006/main">
+  <p:cSld>
+    <p:spTree>
+      <p:nvGrpSpPr>
+        <p:cNvPr id="1" name=""/>
+        <p:cNvGrpSpPr/>
+        <p:nvPr/>
+      </p:nvGrpSpPr>
+      <p:grpSpPr>
+        <a:xfrm>
+          <a:off x="0" y="0"/>
+          <a:ext cx="0" cy="0"/>
+          <a:chOff x="0" y="0"/>
+          <a:chExt cx="0" cy="0"/>
+        </a:xfrm>
+      </p:grpSpPr>
+      <p:sp>
+        <p:nvSpPr>
+          <p:cNvPr id="2" name="Title 1"/>
+          <p:cNvSpPr>
+            <a:spLocks noGrp="1"/>
+          </p:cNvSpPr>
+          <p:nvPr>
+            <p:ph type="title"/>
+          </p:nvPr>
+        </p:nvSpPr>
+        <p:spPr/>
+        <p:txBody>
+          <a:bodyPr/>
+          <a:lstStyle/>
+          <a:p>
+            <a:r>
+              <a:t>Change Tracking</a:t>
             </a:r>
           </a:p>
         </p:txBody>
@@ -16953,23 +19980,867 @@
           <a:bodyPr/>
           <a:lstStyle/>
           <a:p>
-            <a:r>
-              <a:t>EF Core simplifies DB access</a:t>
-            </a:r>
-          </a:p>
-          <a:p>
-            <a:r>
-              <a:t>Integrates with ASP.NET Core</a:t>
-            </a:r>
-          </a:p>
-          <a:p>
-            <a:r>
-              <a:t>Supports scalable apps</a:t>
+            <a:pPr marL="285750" indent="-285750">
+              <a:buFont typeface="Arial"/>
+              <a:buChar char="•"/>
+            </a:pPr>
+            <a:r>
+              <a:rPr lang="en-US" sz="1800" dirty="0"/>
+              <a:t>EF Core auto-tracks entities returned from queries (default behavior)</a:t>
+            </a:r>
+          </a:p>
+          <a:p>
+            <a:pPr marL="285750" indent="-285750">
+              <a:buFont typeface="Arial"/>
+              <a:buChar char="•"/>
+            </a:pPr>
+            <a:r>
+              <a:rPr lang="en-US" sz="1800" dirty="0"/>
+              <a:t>Entity states: Added, Modified, Deleted, Unchanged, Detached</a:t>
+            </a:r>
+          </a:p>
+          <a:p>
+            <a:pPr marL="285750" indent="-285750">
+              <a:buFont typeface="Arial"/>
+              <a:buChar char="•"/>
+            </a:pPr>
+            <a:r>
+              <a:rPr lang="en-US" sz="1800" dirty="0"/>
+              <a:t>SaveChanges() generates INSERT/UPDATE/DELETE only for changed entities</a:t>
+            </a:r>
+          </a:p>
+          <a:p>
+            <a:pPr marL="285750" indent="-285750">
+              <a:buFont typeface="Arial"/>
+              <a:buChar char="•"/>
+            </a:pPr>
+            <a:r>
+              <a:rPr lang="en-US" sz="1800" dirty="0"/>
+              <a:t>context.ChangeTracker.Entries() — inspect tracked entities</a:t>
+            </a:r>
+          </a:p>
+          <a:p>
+            <a:pPr marL="285750" indent="-285750">
+              <a:buFont typeface="Arial"/>
+              <a:buChar char="•"/>
+            </a:pPr>
+            <a:r>
+              <a:rPr lang="en-US" sz="1800" dirty="0"/>
+              <a:t>AsNoTracking() — skip tracking for read-only queries (faster)</a:t>
+            </a:r>
+          </a:p>
+          <a:p>
+            <a:pPr marL="285750" indent="-285750">
+              <a:buFont typeface="Arial"/>
+              <a:buChar char="•"/>
+            </a:pPr>
+            <a:r>
+              <a:rPr lang="en-US" sz="1800" dirty="0"/>
+              <a:t>Detach entity: context.Entry(entity).State = EntityState.Detached</a:t>
             </a:r>
           </a:p>
         </p:txBody>
       </p:sp>
     </p:spTree>
+    <p:extLst>
+      <p:ext uri="{BB962C8B-B14F-4D97-AF65-F5344CB8AC3E}">
+        <p14:creationId xmlns:p14="http://schemas.microsoft.com/office/powerpoint/2010/main" val="2495481468"/>
+      </p:ext>
+    </p:extLst>
+  </p:cSld>
+  <p:clrMapOvr>
+    <a:masterClrMapping/>
+  </p:clrMapOvr>
+</p:sld>
+</file>
+
+<file path=ppt/slides/slide19.xml><?xml version="1.0" encoding="utf-8"?>
+<p:sld xmlns:a="http://schemas.openxmlformats.org/drawingml/2006/main" xmlns:r="http://schemas.openxmlformats.org/officeDocument/2006/relationships" xmlns:p="http://schemas.openxmlformats.org/presentationml/2006/main">
+  <p:cSld>
+    <p:spTree>
+      <p:nvGrpSpPr>
+        <p:cNvPr id="1" name=""/>
+        <p:cNvGrpSpPr/>
+        <p:nvPr/>
+      </p:nvGrpSpPr>
+      <p:grpSpPr>
+        <a:xfrm>
+          <a:off x="0" y="0"/>
+          <a:ext cx="0" cy="0"/>
+          <a:chOff x="0" y="0"/>
+          <a:chExt cx="0" cy="0"/>
+        </a:xfrm>
+      </p:grpSpPr>
+      <p:sp>
+        <p:nvSpPr>
+          <p:cNvPr id="2" name="Rectangle: Rounded Corners 1">
+            <a:extLst>
+              <a:ext uri="{FF2B5EF4-FFF2-40B4-BE49-F238E27FC236}">
+                <a16:creationId xmlns:a16="http://schemas.microsoft.com/office/drawing/2014/main" id="{05F78CBF-DF5A-433C-8B21-7C9423087414}"/>
+              </a:ext>
+            </a:extLst>
+          </p:cNvPr>
+          <p:cNvSpPr/>
+          <p:nvPr/>
+        </p:nvSpPr>
+        <p:spPr>
+          <a:xfrm>
+            <a:off x="508000" y="381000"/>
+            <a:ext cx="1651000" cy="457200"/>
+          </a:xfrm>
+          <a:prstGeom prst="roundRect">
+            <a:avLst/>
+          </a:prstGeom>
+          <a:solidFill>
+            <a:srgbClr val="FF6E40"/>
+          </a:solidFill>
+          <a:ln w="15875" cap="flat" cmpd="sng" algn="ctr">
+            <a:noFill/>
+            <a:prstDash val="solid"/>
+          </a:ln>
+        </p:spPr>
+        <p:style>
+          <a:lnRef idx="2">
+            <a:schemeClr val="accent1">
+              <a:shade val="15000"/>
+            </a:schemeClr>
+          </a:lnRef>
+          <a:fillRef idx="1">
+            <a:schemeClr val="accent1"/>
+          </a:fillRef>
+          <a:effectRef idx="0">
+            <a:schemeClr val="accent1"/>
+          </a:effectRef>
+          <a:fontRef idx="minor">
+            <a:schemeClr val="lt1"/>
+          </a:fontRef>
+        </p:style>
+        <p:txBody>
+          <a:bodyPr vertOverflow="clip" horzOverflow="clip" rtlCol="0" anchor="ctr" anchorCtr="0">
+            <a:noAutofit/>
+          </a:bodyPr>
+          <a:lstStyle/>
+          <a:p>
+            <a:pPr algn="l"/>
+            <a:r>
+              <a:rPr lang="en-IN" sz="1600" b="1">
+                <a:solidFill>
+                  <a:srgbClr val="FFFFFF"/>
+                </a:solidFill>
+                <a:latin typeface="Segoe UI"/>
+                <a:cs typeface="Segoe UI"/>
+              </a:rPr>
+              <a:t>🧪 LAB 5</a:t>
+            </a:r>
+          </a:p>
+        </p:txBody>
+      </p:sp>
+      <p:sp>
+        <p:nvSpPr>
+          <p:cNvPr id="3" name="TextBox 2">
+            <a:extLst>
+              <a:ext uri="{FF2B5EF4-FFF2-40B4-BE49-F238E27FC236}">
+                <a16:creationId xmlns:a16="http://schemas.microsoft.com/office/drawing/2014/main" id="{1A8CA2CB-7E48-4DE0-9CCE-A4CE31B7DA96}"/>
+              </a:ext>
+            </a:extLst>
+          </p:cNvPr>
+          <p:cNvSpPr txBox="1"/>
+          <p:nvPr/>
+        </p:nvSpPr>
+        <p:spPr>
+          <a:xfrm>
+            <a:off x="2349500" y="381000"/>
+            <a:ext cx="6286500" cy="508000"/>
+          </a:xfrm>
+          <a:prstGeom prst="rect">
+            <a:avLst/>
+          </a:prstGeom>
+          <a:noFill/>
+        </p:spPr>
+        <p:txBody>
+          <a:bodyPr vertOverflow="overflow" vert="horz" wrap="square" rtlCol="0" anchor="ctr" anchorCtr="0">
+            <a:noAutofit/>
+          </a:bodyPr>
+          <a:lstStyle/>
+          <a:p>
+            <a:pPr algn="l"/>
+            <a:r>
+              <a:rPr lang="en-IN" sz="2800" b="1">
+                <a:solidFill>
+                  <a:srgbClr val="00E5FF"/>
+                </a:solidFill>
+                <a:latin typeface="Segoe UI"/>
+                <a:cs typeface="Segoe UI"/>
+              </a:rPr>
+              <a:t>Diagnose Change Tracking</a:t>
+            </a:r>
+          </a:p>
+        </p:txBody>
+      </p:sp>
+      <p:sp>
+        <p:nvSpPr>
+          <p:cNvPr id="4" name="TextBox 3">
+            <a:extLst>
+              <a:ext uri="{FF2B5EF4-FFF2-40B4-BE49-F238E27FC236}">
+                <a16:creationId xmlns:a16="http://schemas.microsoft.com/office/drawing/2014/main" id="{21347156-2F20-4FD0-A093-D978CF56E92E}"/>
+              </a:ext>
+            </a:extLst>
+          </p:cNvPr>
+          <p:cNvSpPr txBox="1"/>
+          <p:nvPr/>
+        </p:nvSpPr>
+        <p:spPr>
+          <a:xfrm>
+            <a:off x="508000" y="1143000"/>
+            <a:ext cx="8128000" cy="228600"/>
+          </a:xfrm>
+          <a:prstGeom prst="rect">
+            <a:avLst/>
+          </a:prstGeom>
+          <a:noFill/>
+        </p:spPr>
+        <p:txBody>
+          <a:bodyPr vertOverflow="overflow" vert="horz" wrap="square" rtlCol="0" anchor="t" anchorCtr="0">
+            <a:spAutoFit/>
+          </a:bodyPr>
+          <a:lstStyle/>
+          <a:p>
+            <a:pPr algn="l"/>
+            <a:r>
+              <a:rPr lang="en-IN" sz="1100" b="1">
+                <a:solidFill>
+                  <a:srgbClr val="64FFDA"/>
+                </a:solidFill>
+                <a:latin typeface="Segoe UI"/>
+                <a:cs typeface="Segoe UI"/>
+              </a:rPr>
+              <a:t>SCENARIO</a:t>
+            </a:r>
+          </a:p>
+        </p:txBody>
+      </p:sp>
+      <p:sp>
+        <p:nvSpPr>
+          <p:cNvPr id="5" name="TextBox 4">
+            <a:extLst>
+              <a:ext uri="{FF2B5EF4-FFF2-40B4-BE49-F238E27FC236}">
+                <a16:creationId xmlns:a16="http://schemas.microsoft.com/office/drawing/2014/main" id="{8FA90B56-D86A-4599-9327-A0A0BF52E974}"/>
+              </a:ext>
+            </a:extLst>
+          </p:cNvPr>
+          <p:cNvSpPr txBox="1"/>
+          <p:nvPr/>
+        </p:nvSpPr>
+        <p:spPr>
+          <a:xfrm>
+            <a:off x="508000" y="1397000"/>
+            <a:ext cx="8128000" cy="762000"/>
+          </a:xfrm>
+          <a:prstGeom prst="rect">
+            <a:avLst/>
+          </a:prstGeom>
+          <a:noFill/>
+        </p:spPr>
+        <p:txBody>
+          <a:bodyPr vertOverflow="overflow" vert="horz" wrap="square" rtlCol="0" anchor="t" anchorCtr="0">
+            <a:spAutoFit/>
+          </a:bodyPr>
+          <a:lstStyle/>
+          <a:p>
+            <a:pPr algn="l"/>
+            <a:r>
+              <a:rPr lang="en-US" sz="1600">
+                <a:solidFill>
+                  <a:srgbClr val="E8F4F8"/>
+                </a:solidFill>
+                <a:latin typeface="Segoe UI"/>
+                <a:cs typeface="Segoe UI"/>
+              </a:rPr>
+              <a:t>Compare tracked vs no-tracking queries and observe what SaveChanges actually persists.</a:t>
+            </a:r>
+            <a:endParaRPr lang="en-IN" sz="1600">
+              <a:solidFill>
+                <a:srgbClr val="E8F4F8"/>
+              </a:solidFill>
+              <a:latin typeface="Segoe UI"/>
+              <a:cs typeface="Segoe UI"/>
+            </a:endParaRPr>
+          </a:p>
+        </p:txBody>
+      </p:sp>
+      <p:sp>
+        <p:nvSpPr>
+          <p:cNvPr id="6" name="TextBox 5">
+            <a:extLst>
+              <a:ext uri="{FF2B5EF4-FFF2-40B4-BE49-F238E27FC236}">
+                <a16:creationId xmlns:a16="http://schemas.microsoft.com/office/drawing/2014/main" id="{526780FA-989A-419A-B1A6-B93DB53526D7}"/>
+              </a:ext>
+            </a:extLst>
+          </p:cNvPr>
+          <p:cNvSpPr txBox="1"/>
+          <p:nvPr/>
+        </p:nvSpPr>
+        <p:spPr>
+          <a:xfrm>
+            <a:off x="508000" y="2286000"/>
+            <a:ext cx="8128000" cy="228600"/>
+          </a:xfrm>
+          <a:prstGeom prst="rect">
+            <a:avLst/>
+          </a:prstGeom>
+          <a:noFill/>
+        </p:spPr>
+        <p:txBody>
+          <a:bodyPr vertOverflow="overflow" vert="horz" wrap="square" rtlCol="0" anchor="t" anchorCtr="0">
+            <a:spAutoFit/>
+          </a:bodyPr>
+          <a:lstStyle/>
+          <a:p>
+            <a:pPr algn="l"/>
+            <a:r>
+              <a:rPr lang="en-IN" sz="1100" b="1">
+                <a:solidFill>
+                  <a:srgbClr val="64FFDA"/>
+                </a:solidFill>
+                <a:latin typeface="Segoe UI"/>
+                <a:cs typeface="Segoe UI"/>
+              </a:rPr>
+              <a:t>YOUR TASKS</a:t>
+            </a:r>
+          </a:p>
+        </p:txBody>
+      </p:sp>
+      <p:sp>
+        <p:nvSpPr>
+          <p:cNvPr id="7" name="Oval 6">
+            <a:extLst>
+              <a:ext uri="{FF2B5EF4-FFF2-40B4-BE49-F238E27FC236}">
+                <a16:creationId xmlns:a16="http://schemas.microsoft.com/office/drawing/2014/main" id="{58E21080-3C32-4EBC-91B9-78B9405F3C48}"/>
+              </a:ext>
+            </a:extLst>
+          </p:cNvPr>
+          <p:cNvSpPr/>
+          <p:nvPr/>
+        </p:nvSpPr>
+        <p:spPr>
+          <a:xfrm>
+            <a:off x="571500" y="2603500"/>
+            <a:ext cx="355600" cy="355600"/>
+          </a:xfrm>
+          <a:prstGeom prst="ellipse">
+            <a:avLst/>
+          </a:prstGeom>
+          <a:solidFill>
+            <a:srgbClr val="7C4DFF"/>
+          </a:solidFill>
+          <a:ln w="15875" cap="flat" cmpd="sng" algn="ctr">
+            <a:noFill/>
+            <a:prstDash val="solid"/>
+          </a:ln>
+        </p:spPr>
+        <p:style>
+          <a:lnRef idx="2">
+            <a:schemeClr val="accent1">
+              <a:shade val="15000"/>
+            </a:schemeClr>
+          </a:lnRef>
+          <a:fillRef idx="1">
+            <a:schemeClr val="accent1"/>
+          </a:fillRef>
+          <a:effectRef idx="0">
+            <a:schemeClr val="accent1"/>
+          </a:effectRef>
+          <a:fontRef idx="minor">
+            <a:schemeClr val="lt1"/>
+          </a:fontRef>
+        </p:style>
+        <p:txBody>
+          <a:bodyPr vertOverflow="clip" horzOverflow="clip" wrap="none" rtlCol="0" anchor="ctr" anchorCtr="0">
+            <a:noAutofit/>
+          </a:bodyPr>
+          <a:lstStyle/>
+          <a:p>
+            <a:pPr algn="l"/>
+            <a:r>
+              <a:rPr lang="en-IN" sz="1400" b="1">
+                <a:solidFill>
+                  <a:srgbClr val="FFFFFF"/>
+                </a:solidFill>
+                <a:latin typeface="Segoe UI"/>
+                <a:cs typeface="Segoe UI"/>
+              </a:rPr>
+              <a:t>1</a:t>
+            </a:r>
+          </a:p>
+        </p:txBody>
+      </p:sp>
+      <p:sp>
+        <p:nvSpPr>
+          <p:cNvPr id="8" name="TextBox 7">
+            <a:extLst>
+              <a:ext uri="{FF2B5EF4-FFF2-40B4-BE49-F238E27FC236}">
+                <a16:creationId xmlns:a16="http://schemas.microsoft.com/office/drawing/2014/main" id="{EE98C63C-99C7-4757-AD17-E0A9B65B04CA}"/>
+              </a:ext>
+            </a:extLst>
+          </p:cNvPr>
+          <p:cNvSpPr txBox="1"/>
+          <p:nvPr/>
+        </p:nvSpPr>
+        <p:spPr>
+          <a:xfrm>
+            <a:off x="1079500" y="2603500"/>
+            <a:ext cx="7556500" cy="457200"/>
+          </a:xfrm>
+          <a:prstGeom prst="rect">
+            <a:avLst/>
+          </a:prstGeom>
+          <a:noFill/>
+        </p:spPr>
+        <p:txBody>
+          <a:bodyPr vertOverflow="overflow" vert="horz" wrap="square" rtlCol="0" anchor="t" anchorCtr="0">
+            <a:noAutofit/>
+          </a:bodyPr>
+          <a:lstStyle/>
+          <a:p>
+            <a:pPr algn="l"/>
+            <a:r>
+              <a:rPr lang="en-US" sz="1500">
+                <a:solidFill>
+                  <a:srgbClr val="E8F4F8"/>
+                </a:solidFill>
+                <a:latin typeface="Segoe UI"/>
+                <a:cs typeface="Segoe UI"/>
+              </a:rPr>
+              <a:t>Load a product with Find — inspect ChangeTracker.Entries()</a:t>
+            </a:r>
+            <a:endParaRPr lang="en-IN" sz="1500">
+              <a:solidFill>
+                <a:srgbClr val="E8F4F8"/>
+              </a:solidFill>
+              <a:latin typeface="Segoe UI"/>
+              <a:cs typeface="Segoe UI"/>
+            </a:endParaRPr>
+          </a:p>
+        </p:txBody>
+      </p:sp>
+      <p:sp>
+        <p:nvSpPr>
+          <p:cNvPr id="9" name="Oval 8">
+            <a:extLst>
+              <a:ext uri="{FF2B5EF4-FFF2-40B4-BE49-F238E27FC236}">
+                <a16:creationId xmlns:a16="http://schemas.microsoft.com/office/drawing/2014/main" id="{84C22AFF-3071-4F50-BC50-C6C504987EB8}"/>
+              </a:ext>
+            </a:extLst>
+          </p:cNvPr>
+          <p:cNvSpPr/>
+          <p:nvPr/>
+        </p:nvSpPr>
+        <p:spPr>
+          <a:xfrm>
+            <a:off x="571500" y="3136900"/>
+            <a:ext cx="355600" cy="355600"/>
+          </a:xfrm>
+          <a:prstGeom prst="ellipse">
+            <a:avLst/>
+          </a:prstGeom>
+          <a:solidFill>
+            <a:srgbClr val="7C4DFF"/>
+          </a:solidFill>
+          <a:ln w="15875" cap="flat" cmpd="sng" algn="ctr">
+            <a:noFill/>
+            <a:prstDash val="solid"/>
+          </a:ln>
+        </p:spPr>
+        <p:style>
+          <a:lnRef idx="2">
+            <a:schemeClr val="accent1">
+              <a:shade val="15000"/>
+            </a:schemeClr>
+          </a:lnRef>
+          <a:fillRef idx="1">
+            <a:schemeClr val="accent1"/>
+          </a:fillRef>
+          <a:effectRef idx="0">
+            <a:schemeClr val="accent1"/>
+          </a:effectRef>
+          <a:fontRef idx="minor">
+            <a:schemeClr val="lt1"/>
+          </a:fontRef>
+        </p:style>
+        <p:txBody>
+          <a:bodyPr vertOverflow="clip" horzOverflow="clip" wrap="none" rtlCol="0" anchor="ctr" anchorCtr="0">
+            <a:noAutofit/>
+          </a:bodyPr>
+          <a:lstStyle/>
+          <a:p>
+            <a:pPr algn="l"/>
+            <a:r>
+              <a:rPr lang="en-IN" sz="1400" b="1">
+                <a:solidFill>
+                  <a:srgbClr val="FFFFFF"/>
+                </a:solidFill>
+                <a:latin typeface="Segoe UI"/>
+                <a:cs typeface="Segoe UI"/>
+              </a:rPr>
+              <a:t>2</a:t>
+            </a:r>
+          </a:p>
+        </p:txBody>
+      </p:sp>
+      <p:sp>
+        <p:nvSpPr>
+          <p:cNvPr id="10" name="TextBox 9">
+            <a:extLst>
+              <a:ext uri="{FF2B5EF4-FFF2-40B4-BE49-F238E27FC236}">
+                <a16:creationId xmlns:a16="http://schemas.microsoft.com/office/drawing/2014/main" id="{81003451-6308-4B3B-8C93-AECF6FA5A0A5}"/>
+              </a:ext>
+            </a:extLst>
+          </p:cNvPr>
+          <p:cNvSpPr txBox="1"/>
+          <p:nvPr/>
+        </p:nvSpPr>
+        <p:spPr>
+          <a:xfrm>
+            <a:off x="1079500" y="3136900"/>
+            <a:ext cx="7556500" cy="457200"/>
+          </a:xfrm>
+          <a:prstGeom prst="rect">
+            <a:avLst/>
+          </a:prstGeom>
+          <a:noFill/>
+        </p:spPr>
+        <p:txBody>
+          <a:bodyPr vertOverflow="overflow" vert="horz" wrap="square" rtlCol="0" anchor="t" anchorCtr="0">
+            <a:noAutofit/>
+          </a:bodyPr>
+          <a:lstStyle/>
+          <a:p>
+            <a:pPr algn="l"/>
+            <a:r>
+              <a:rPr lang="en-US" sz="1500">
+                <a:solidFill>
+                  <a:srgbClr val="E8F4F8"/>
+                </a:solidFill>
+                <a:latin typeface="Segoe UI"/>
+                <a:cs typeface="Segoe UI"/>
+              </a:rPr>
+              <a:t>Modify a property — note state changes Unchanged → Modified</a:t>
+            </a:r>
+            <a:endParaRPr lang="en-IN" sz="1500">
+              <a:solidFill>
+                <a:srgbClr val="E8F4F8"/>
+              </a:solidFill>
+              <a:latin typeface="Segoe UI"/>
+              <a:cs typeface="Segoe UI"/>
+            </a:endParaRPr>
+          </a:p>
+        </p:txBody>
+      </p:sp>
+      <p:sp>
+        <p:nvSpPr>
+          <p:cNvPr id="11" name="Oval 10">
+            <a:extLst>
+              <a:ext uri="{FF2B5EF4-FFF2-40B4-BE49-F238E27FC236}">
+                <a16:creationId xmlns:a16="http://schemas.microsoft.com/office/drawing/2014/main" id="{E52C0ED6-5BD5-4F09-9ABE-BA5164F69574}"/>
+              </a:ext>
+            </a:extLst>
+          </p:cNvPr>
+          <p:cNvSpPr/>
+          <p:nvPr/>
+        </p:nvSpPr>
+        <p:spPr>
+          <a:xfrm>
+            <a:off x="571500" y="3670300"/>
+            <a:ext cx="355600" cy="355600"/>
+          </a:xfrm>
+          <a:prstGeom prst="ellipse">
+            <a:avLst/>
+          </a:prstGeom>
+          <a:solidFill>
+            <a:srgbClr val="7C4DFF"/>
+          </a:solidFill>
+          <a:ln w="15875" cap="flat" cmpd="sng" algn="ctr">
+            <a:noFill/>
+            <a:prstDash val="solid"/>
+          </a:ln>
+        </p:spPr>
+        <p:style>
+          <a:lnRef idx="2">
+            <a:schemeClr val="accent1">
+              <a:shade val="15000"/>
+            </a:schemeClr>
+          </a:lnRef>
+          <a:fillRef idx="1">
+            <a:schemeClr val="accent1"/>
+          </a:fillRef>
+          <a:effectRef idx="0">
+            <a:schemeClr val="accent1"/>
+          </a:effectRef>
+          <a:fontRef idx="minor">
+            <a:schemeClr val="lt1"/>
+          </a:fontRef>
+        </p:style>
+        <p:txBody>
+          <a:bodyPr vertOverflow="clip" horzOverflow="clip" wrap="none" rtlCol="0" anchor="ctr" anchorCtr="0">
+            <a:noAutofit/>
+          </a:bodyPr>
+          <a:lstStyle/>
+          <a:p>
+            <a:pPr algn="l"/>
+            <a:r>
+              <a:rPr lang="en-IN" sz="1400" b="1">
+                <a:solidFill>
+                  <a:srgbClr val="FFFFFF"/>
+                </a:solidFill>
+                <a:latin typeface="Segoe UI"/>
+                <a:cs typeface="Segoe UI"/>
+              </a:rPr>
+              <a:t>3</a:t>
+            </a:r>
+          </a:p>
+        </p:txBody>
+      </p:sp>
+      <p:sp>
+        <p:nvSpPr>
+          <p:cNvPr id="12" name="TextBox 11">
+            <a:extLst>
+              <a:ext uri="{FF2B5EF4-FFF2-40B4-BE49-F238E27FC236}">
+                <a16:creationId xmlns:a16="http://schemas.microsoft.com/office/drawing/2014/main" id="{0526E4F1-0AD0-4F61-83E2-D7C4904A7AB4}"/>
+              </a:ext>
+            </a:extLst>
+          </p:cNvPr>
+          <p:cNvSpPr txBox="1"/>
+          <p:nvPr/>
+        </p:nvSpPr>
+        <p:spPr>
+          <a:xfrm>
+            <a:off x="1079500" y="3670300"/>
+            <a:ext cx="7556500" cy="457200"/>
+          </a:xfrm>
+          <a:prstGeom prst="rect">
+            <a:avLst/>
+          </a:prstGeom>
+          <a:noFill/>
+        </p:spPr>
+        <p:txBody>
+          <a:bodyPr vertOverflow="overflow" vert="horz" wrap="square" rtlCol="0" anchor="t" anchorCtr="0">
+            <a:noAutofit/>
+          </a:bodyPr>
+          <a:lstStyle/>
+          <a:p>
+            <a:pPr algn="l"/>
+            <a:r>
+              <a:rPr lang="en-US" sz="1500">
+                <a:solidFill>
+                  <a:srgbClr val="E8F4F8"/>
+                </a:solidFill>
+                <a:latin typeface="Segoe UI"/>
+                <a:cs typeface="Segoe UI"/>
+              </a:rPr>
+              <a:t>Repeat with AsNoTracking() — verify nothing is tracked</a:t>
+            </a:r>
+            <a:endParaRPr lang="en-IN" sz="1500">
+              <a:solidFill>
+                <a:srgbClr val="E8F4F8"/>
+              </a:solidFill>
+              <a:latin typeface="Segoe UI"/>
+              <a:cs typeface="Segoe UI"/>
+            </a:endParaRPr>
+          </a:p>
+        </p:txBody>
+      </p:sp>
+      <p:sp>
+        <p:nvSpPr>
+          <p:cNvPr id="13" name="Oval 12">
+            <a:extLst>
+              <a:ext uri="{FF2B5EF4-FFF2-40B4-BE49-F238E27FC236}">
+                <a16:creationId xmlns:a16="http://schemas.microsoft.com/office/drawing/2014/main" id="{B0EE81C4-FE2D-4E73-AC22-B9D17C4DE033}"/>
+              </a:ext>
+            </a:extLst>
+          </p:cNvPr>
+          <p:cNvSpPr/>
+          <p:nvPr/>
+        </p:nvSpPr>
+        <p:spPr>
+          <a:xfrm>
+            <a:off x="571500" y="4203700"/>
+            <a:ext cx="355600" cy="355600"/>
+          </a:xfrm>
+          <a:prstGeom prst="ellipse">
+            <a:avLst/>
+          </a:prstGeom>
+          <a:solidFill>
+            <a:srgbClr val="7C4DFF"/>
+          </a:solidFill>
+          <a:ln w="15875" cap="flat" cmpd="sng" algn="ctr">
+            <a:noFill/>
+            <a:prstDash val="solid"/>
+          </a:ln>
+        </p:spPr>
+        <p:style>
+          <a:lnRef idx="2">
+            <a:schemeClr val="accent1">
+              <a:shade val="15000"/>
+            </a:schemeClr>
+          </a:lnRef>
+          <a:fillRef idx="1">
+            <a:schemeClr val="accent1"/>
+          </a:fillRef>
+          <a:effectRef idx="0">
+            <a:schemeClr val="accent1"/>
+          </a:effectRef>
+          <a:fontRef idx="minor">
+            <a:schemeClr val="lt1"/>
+          </a:fontRef>
+        </p:style>
+        <p:txBody>
+          <a:bodyPr vertOverflow="clip" horzOverflow="clip" wrap="none" rtlCol="0" anchor="ctr" anchorCtr="0">
+            <a:noAutofit/>
+          </a:bodyPr>
+          <a:lstStyle/>
+          <a:p>
+            <a:pPr algn="l"/>
+            <a:r>
+              <a:rPr lang="en-IN" sz="1400" b="1">
+                <a:solidFill>
+                  <a:srgbClr val="FFFFFF"/>
+                </a:solidFill>
+                <a:latin typeface="Segoe UI"/>
+                <a:cs typeface="Segoe UI"/>
+              </a:rPr>
+              <a:t>4</a:t>
+            </a:r>
+          </a:p>
+        </p:txBody>
+      </p:sp>
+      <p:sp>
+        <p:nvSpPr>
+          <p:cNvPr id="14" name="TextBox 13">
+            <a:extLst>
+              <a:ext uri="{FF2B5EF4-FFF2-40B4-BE49-F238E27FC236}">
+                <a16:creationId xmlns:a16="http://schemas.microsoft.com/office/drawing/2014/main" id="{DE1DAFB2-0573-48CA-9955-969DDDCBC414}"/>
+              </a:ext>
+            </a:extLst>
+          </p:cNvPr>
+          <p:cNvSpPr txBox="1"/>
+          <p:nvPr/>
+        </p:nvSpPr>
+        <p:spPr>
+          <a:xfrm>
+            <a:off x="1079500" y="4203700"/>
+            <a:ext cx="7556500" cy="457200"/>
+          </a:xfrm>
+          <a:prstGeom prst="rect">
+            <a:avLst/>
+          </a:prstGeom>
+          <a:noFill/>
+        </p:spPr>
+        <p:txBody>
+          <a:bodyPr vertOverflow="overflow" vert="horz" wrap="square" rtlCol="0" anchor="t" anchorCtr="0">
+            <a:noAutofit/>
+          </a:bodyPr>
+          <a:lstStyle/>
+          <a:p>
+            <a:pPr algn="l"/>
+            <a:r>
+              <a:rPr lang="en-US" sz="1500">
+                <a:solidFill>
+                  <a:srgbClr val="E8F4F8"/>
+                </a:solidFill>
+                <a:latin typeface="Segoe UI"/>
+                <a:cs typeface="Segoe UI"/>
+              </a:rPr>
+              <a:t>Call ChangeTracker.DebugView.LongView before SaveChanges</a:t>
+            </a:r>
+            <a:endParaRPr lang="en-IN" sz="1500">
+              <a:solidFill>
+                <a:srgbClr val="E8F4F8"/>
+              </a:solidFill>
+              <a:latin typeface="Segoe UI"/>
+              <a:cs typeface="Segoe UI"/>
+            </a:endParaRPr>
+          </a:p>
+        </p:txBody>
+      </p:sp>
+      <p:sp>
+        <p:nvSpPr>
+          <p:cNvPr id="15" name="Rectangle: Rounded Corners 14">
+            <a:extLst>
+              <a:ext uri="{FF2B5EF4-FFF2-40B4-BE49-F238E27FC236}">
+                <a16:creationId xmlns:a16="http://schemas.microsoft.com/office/drawing/2014/main" id="{CB91E83B-6F1F-4797-AB2B-0E6EEE492741}"/>
+              </a:ext>
+            </a:extLst>
+          </p:cNvPr>
+          <p:cNvSpPr/>
+          <p:nvPr/>
+        </p:nvSpPr>
+        <p:spPr>
+          <a:xfrm>
+            <a:off x="508000" y="5842000"/>
+            <a:ext cx="8128000" cy="736600"/>
+          </a:xfrm>
+          <a:prstGeom prst="roundRect">
+            <a:avLst/>
+          </a:prstGeom>
+          <a:solidFill>
+            <a:srgbClr val="1A3A52"/>
+          </a:solidFill>
+          <a:ln w="19050" cap="flat" cmpd="sng" algn="ctr">
+            <a:solidFill>
+              <a:srgbClr val="64FFDA"/>
+            </a:solidFill>
+            <a:prstDash val="solid"/>
+          </a:ln>
+        </p:spPr>
+        <p:style>
+          <a:lnRef idx="2">
+            <a:schemeClr val="accent1">
+              <a:shade val="15000"/>
+            </a:schemeClr>
+          </a:lnRef>
+          <a:fillRef idx="1">
+            <a:schemeClr val="accent1"/>
+          </a:fillRef>
+          <a:effectRef idx="0">
+            <a:schemeClr val="accent1"/>
+          </a:effectRef>
+          <a:fontRef idx="minor">
+            <a:schemeClr val="lt1"/>
+          </a:fontRef>
+        </p:style>
+        <p:txBody>
+          <a:bodyPr vertOverflow="clip" horzOverflow="clip" rtlCol="0" anchor="ctr" anchorCtr="0">
+            <a:noAutofit/>
+          </a:bodyPr>
+          <a:lstStyle/>
+          <a:p>
+            <a:pPr algn="l"/>
+            <a:r>
+              <a:rPr lang="en-US" sz="1300">
+                <a:solidFill>
+                  <a:srgbClr val="E8F4F8"/>
+                </a:solidFill>
+                <a:latin typeface="Segoe UI"/>
+                <a:cs typeface="Segoe UI"/>
+              </a:rPr>
+              <a:t>💡 HINT  Tracking adds overhead — prefer AsNoTracking for read-only list endpoints.</a:t>
+            </a:r>
+            <a:endParaRPr lang="en-IN" sz="1300">
+              <a:solidFill>
+                <a:srgbClr val="E8F4F8"/>
+              </a:solidFill>
+              <a:latin typeface="Segoe UI"/>
+              <a:cs typeface="Segoe UI"/>
+            </a:endParaRPr>
+          </a:p>
+        </p:txBody>
+      </p:sp>
+    </p:spTree>
+    <p:extLst>
+      <p:ext uri="{BB962C8B-B14F-4D97-AF65-F5344CB8AC3E}">
+        <p14:creationId xmlns:p14="http://schemas.microsoft.com/office/powerpoint/2010/main" val="1631566258"/>
+      </p:ext>
+    </p:extLst>
   </p:cSld>
   <p:clrMapOvr>
     <a:masterClrMapping/>
@@ -17030,28 +20901,454 @@
           <a:bodyPr/>
           <a:lstStyle/>
           <a:p>
-            <a:r>
-              <a:t>Faster development</a:t>
-            </a:r>
-          </a:p>
-          <a:p>
-            <a:r>
-              <a:t>Database abstraction</a:t>
-            </a:r>
-          </a:p>
-          <a:p>
-            <a:r>
-              <a:t>Supports multiple DBs</a:t>
-            </a:r>
-          </a:p>
-          <a:p>
-            <a:r>
-              <a:t>Change tracking</a:t>
+            <a:pPr marL="285750" indent="-285750">
+              <a:buFont typeface="Arial"/>
+              <a:buChar char="•"/>
+            </a:pPr>
+            <a:r>
+              <a:rPr lang="en-US" sz="1800" dirty="0"/>
+              <a:t>Productivity — write data access code in minutes, not hours</a:t>
+            </a:r>
+          </a:p>
+          <a:p>
+            <a:pPr marL="285750" indent="-285750">
+              <a:buFont typeface="Arial"/>
+              <a:buChar char="•"/>
+            </a:pPr>
+            <a:r>
+              <a:rPr lang="en-US" sz="1800" dirty="0"/>
+              <a:t>Database abstraction — same code works against multiple providers</a:t>
+            </a:r>
+          </a:p>
+          <a:p>
+            <a:pPr marL="285750" indent="-285750">
+              <a:buFont typeface="Arial"/>
+              <a:buChar char="•"/>
+            </a:pPr>
+            <a:r>
+              <a:rPr lang="en-US" sz="1800" dirty="0"/>
+              <a:t>Type safety — compile-time checks prevent runtime SQL errors</a:t>
+            </a:r>
+          </a:p>
+          <a:p>
+            <a:pPr marL="285750" indent="-285750">
+              <a:buFont typeface="Arial"/>
+              <a:buChar char="•"/>
+            </a:pPr>
+            <a:r>
+              <a:rPr lang="en-US" sz="1800" dirty="0"/>
+              <a:t>Automatic change tracking — EF figures out what to INSERT/UPDATE</a:t>
+            </a:r>
+          </a:p>
+          <a:p>
+            <a:pPr marL="285750" indent="-285750">
+              <a:buFont typeface="Arial"/>
+              <a:buChar char="•"/>
+            </a:pPr>
+            <a:r>
+              <a:rPr lang="en-US" sz="1800" dirty="0"/>
+              <a:t>Migrations — evolve schema in code, version-controlled with Git</a:t>
+            </a:r>
+          </a:p>
+          <a:p>
+            <a:pPr marL="285750" indent="-285750">
+              <a:buFont typeface="Arial"/>
+              <a:buChar char="•"/>
+            </a:pPr>
+            <a:r>
+              <a:rPr lang="en-US" sz="1800" dirty="0"/>
+              <a:t>Async-first — built for scalable web apps from day one</a:t>
             </a:r>
           </a:p>
         </p:txBody>
       </p:sp>
     </p:spTree>
+    <p:extLst>
+      <p:ext uri="{BB962C8B-B14F-4D97-AF65-F5344CB8AC3E}">
+        <p14:creationId xmlns:p14="http://schemas.microsoft.com/office/powerpoint/2010/main" val="1144339001"/>
+      </p:ext>
+    </p:extLst>
+  </p:cSld>
+  <p:clrMapOvr>
+    <a:masterClrMapping/>
+  </p:clrMapOvr>
+</p:sld>
+</file>
+
+<file path=ppt/slides/slide20.xml><?xml version="1.0" encoding="utf-8"?>
+<p:sld xmlns:a="http://schemas.openxmlformats.org/drawingml/2006/main" xmlns:r="http://schemas.openxmlformats.org/officeDocument/2006/relationships" xmlns:p="http://schemas.openxmlformats.org/presentationml/2006/main">
+  <p:cSld>
+    <p:spTree>
+      <p:nvGrpSpPr>
+        <p:cNvPr id="1" name=""/>
+        <p:cNvGrpSpPr/>
+        <p:nvPr/>
+      </p:nvGrpSpPr>
+      <p:grpSpPr>
+        <a:xfrm>
+          <a:off x="0" y="0"/>
+          <a:ext cx="0" cy="0"/>
+          <a:chOff x="0" y="0"/>
+          <a:chExt cx="0" cy="0"/>
+        </a:xfrm>
+      </p:grpSpPr>
+      <p:sp>
+        <p:nvSpPr>
+          <p:cNvPr id="2" name="Title 1"/>
+          <p:cNvSpPr>
+            <a:spLocks noGrp="1"/>
+          </p:cNvSpPr>
+          <p:nvPr>
+            <p:ph type="title"/>
+          </p:nvPr>
+        </p:nvSpPr>
+        <p:spPr/>
+        <p:txBody>
+          <a:bodyPr/>
+          <a:lstStyle/>
+          <a:p>
+            <a:r>
+              <a:t>EF Core Logging</a:t>
+            </a:r>
+          </a:p>
+        </p:txBody>
+      </p:sp>
+      <p:sp>
+        <p:nvSpPr>
+          <p:cNvPr id="3" name="Content Placeholder 2"/>
+          <p:cNvSpPr>
+            <a:spLocks noGrp="1"/>
+          </p:cNvSpPr>
+          <p:nvPr>
+            <p:ph idx="1"/>
+          </p:nvPr>
+        </p:nvSpPr>
+        <p:spPr/>
+        <p:txBody>
+          <a:bodyPr/>
+          <a:lstStyle/>
+          <a:p>
+            <a:pPr marL="285750" indent="-285750">
+              <a:buFont typeface="Arial"/>
+              <a:buChar char="•"/>
+            </a:pPr>
+            <a:r>
+              <a:rPr lang="en-US" sz="1800" dirty="0"/>
+              <a:t>EF Core integrates with the standard ILogger&lt;T&gt; infrastructure</a:t>
+            </a:r>
+          </a:p>
+          <a:p>
+            <a:pPr marL="285750" indent="-285750">
+              <a:buFont typeface="Arial"/>
+              <a:buChar char="•"/>
+            </a:pPr>
+            <a:r>
+              <a:rPr lang="en-US" sz="1800" dirty="0"/>
+              <a:t>Logs generated SQL, parameter values, change-tracker activity</a:t>
+            </a:r>
+          </a:p>
+          <a:p>
+            <a:pPr marL="285750" indent="-285750">
+              <a:buFont typeface="Arial"/>
+              <a:buChar char="•"/>
+            </a:pPr>
+            <a:r>
+              <a:rPr lang="en-US" sz="1800" dirty="0"/>
+              <a:t>Configure log levels in appsettings.json under 'Logging' section</a:t>
+            </a:r>
+          </a:p>
+          <a:p>
+            <a:pPr marL="285750" indent="-285750">
+              <a:buFont typeface="Arial"/>
+              <a:buChar char="•"/>
+            </a:pPr>
+            <a:r>
+              <a:rPr lang="en-US" sz="1800" dirty="0"/>
+              <a:t>EnableSensitiveDataLogging() — shows parameter values (Dev only!)</a:t>
+            </a:r>
+          </a:p>
+          <a:p>
+            <a:pPr marL="285750" indent="-285750">
+              <a:buFont typeface="Arial"/>
+              <a:buChar char="•"/>
+            </a:pPr>
+            <a:r>
+              <a:rPr lang="en-US" sz="1800" dirty="0"/>
+              <a:t>LogTo(Console.WriteLine) — quick logging for prototyping</a:t>
+            </a:r>
+          </a:p>
+          <a:p>
+            <a:pPr marL="285750" indent="-285750">
+              <a:buFont typeface="Arial"/>
+              <a:buChar char="•"/>
+            </a:pPr>
+            <a:r>
+              <a:rPr lang="en-US" sz="1800" dirty="0"/>
+              <a:t>Use to spot N+1 queries, missing indexes, accidental client evaluation</a:t>
+            </a:r>
+          </a:p>
+        </p:txBody>
+      </p:sp>
+    </p:spTree>
+    <p:extLst>
+      <p:ext uri="{BB962C8B-B14F-4D97-AF65-F5344CB8AC3E}">
+        <p14:creationId xmlns:p14="http://schemas.microsoft.com/office/powerpoint/2010/main" val="1004711850"/>
+      </p:ext>
+    </p:extLst>
+  </p:cSld>
+  <p:clrMapOvr>
+    <a:masterClrMapping/>
+  </p:clrMapOvr>
+</p:sld>
+</file>
+
+<file path=ppt/slides/slide21.xml><?xml version="1.0" encoding="utf-8"?>
+<p:sld xmlns:a="http://schemas.openxmlformats.org/drawingml/2006/main" xmlns:r="http://schemas.openxmlformats.org/officeDocument/2006/relationships" xmlns:p="http://schemas.openxmlformats.org/presentationml/2006/main">
+  <p:cSld>
+    <p:spTree>
+      <p:nvGrpSpPr>
+        <p:cNvPr id="1" name=""/>
+        <p:cNvGrpSpPr/>
+        <p:nvPr/>
+      </p:nvGrpSpPr>
+      <p:grpSpPr>
+        <a:xfrm>
+          <a:off x="0" y="0"/>
+          <a:ext cx="0" cy="0"/>
+          <a:chOff x="0" y="0"/>
+          <a:chExt cx="0" cy="0"/>
+        </a:xfrm>
+      </p:grpSpPr>
+      <p:sp>
+        <p:nvSpPr>
+          <p:cNvPr id="2" name="Title 1"/>
+          <p:cNvSpPr>
+            <a:spLocks noGrp="1"/>
+          </p:cNvSpPr>
+          <p:nvPr>
+            <p:ph type="title"/>
+          </p:nvPr>
+        </p:nvSpPr>
+        <p:spPr/>
+        <p:txBody>
+          <a:bodyPr/>
+          <a:lstStyle/>
+          <a:p>
+            <a:r>
+              <a:t>Best Practices</a:t>
+            </a:r>
+          </a:p>
+        </p:txBody>
+      </p:sp>
+      <p:sp>
+        <p:nvSpPr>
+          <p:cNvPr id="3" name="Content Placeholder 2"/>
+          <p:cNvSpPr>
+            <a:spLocks noGrp="1"/>
+          </p:cNvSpPr>
+          <p:nvPr>
+            <p:ph idx="1"/>
+          </p:nvPr>
+        </p:nvSpPr>
+        <p:spPr/>
+        <p:txBody>
+          <a:bodyPr/>
+          <a:lstStyle/>
+          <a:p>
+            <a:pPr marL="285750" indent="-285750">
+              <a:buFont typeface="Arial"/>
+              <a:buChar char="•"/>
+            </a:pPr>
+            <a:r>
+              <a:rPr lang="en-US" sz="1800" dirty="0"/>
+              <a:t>Always use Async methods — ToListAsync, SaveChangesAsync, etc.</a:t>
+            </a:r>
+          </a:p>
+          <a:p>
+            <a:pPr marL="285750" indent="-285750">
+              <a:buFont typeface="Arial"/>
+              <a:buChar char="•"/>
+            </a:pPr>
+            <a:r>
+              <a:rPr lang="en-US" sz="1800" dirty="0"/>
+              <a:t>AsNoTracking() for read-only queries — measurable performance win</a:t>
+            </a:r>
+          </a:p>
+          <a:p>
+            <a:pPr marL="285750" indent="-285750">
+              <a:buFont typeface="Arial"/>
+              <a:buChar char="•"/>
+            </a:pPr>
+            <a:r>
+              <a:rPr lang="en-US" sz="1800" dirty="0"/>
+              <a:t>Use .Select() projections — don't fetch columns you won't use</a:t>
+            </a:r>
+          </a:p>
+          <a:p>
+            <a:pPr marL="285750" indent="-285750">
+              <a:buFont typeface="Arial"/>
+              <a:buChar char="•"/>
+            </a:pPr>
+            <a:r>
+              <a:rPr lang="en-US" sz="1800" dirty="0"/>
+              <a:t>Avoid N+1 — use .Include() or explicit loading carefully</a:t>
+            </a:r>
+          </a:p>
+          <a:p>
+            <a:pPr marL="285750" indent="-285750">
+              <a:buFont typeface="Arial"/>
+              <a:buChar char="•"/>
+            </a:pPr>
+            <a:r>
+              <a:rPr lang="en-US" sz="1800" dirty="0"/>
+              <a:t>Paginate large result sets with .Skip() and .Take()</a:t>
+            </a:r>
+          </a:p>
+          <a:p>
+            <a:pPr marL="285750" indent="-285750">
+              <a:buFont typeface="Arial"/>
+              <a:buChar char="•"/>
+            </a:pPr>
+            <a:r>
+              <a:rPr lang="en-US" sz="1800" dirty="0"/>
+              <a:t>Keep DbContext scoped to a single unit of work — never a singleton</a:t>
+            </a:r>
+          </a:p>
+        </p:txBody>
+      </p:sp>
+    </p:spTree>
+    <p:extLst>
+      <p:ext uri="{BB962C8B-B14F-4D97-AF65-F5344CB8AC3E}">
+        <p14:creationId xmlns:p14="http://schemas.microsoft.com/office/powerpoint/2010/main" val="755471337"/>
+      </p:ext>
+    </p:extLst>
+  </p:cSld>
+  <p:clrMapOvr>
+    <a:masterClrMapping/>
+  </p:clrMapOvr>
+</p:sld>
+</file>
+
+<file path=ppt/slides/slide22.xml><?xml version="1.0" encoding="utf-8"?>
+<p:sld xmlns:a="http://schemas.openxmlformats.org/drawingml/2006/main" xmlns:r="http://schemas.openxmlformats.org/officeDocument/2006/relationships" xmlns:p="http://schemas.openxmlformats.org/presentationml/2006/main">
+  <p:cSld>
+    <p:spTree>
+      <p:nvGrpSpPr>
+        <p:cNvPr id="1" name=""/>
+        <p:cNvGrpSpPr/>
+        <p:nvPr/>
+      </p:nvGrpSpPr>
+      <p:grpSpPr>
+        <a:xfrm>
+          <a:off x="0" y="0"/>
+          <a:ext cx="0" cy="0"/>
+          <a:chOff x="0" y="0"/>
+          <a:chExt cx="0" cy="0"/>
+        </a:xfrm>
+      </p:grpSpPr>
+      <p:sp>
+        <p:nvSpPr>
+          <p:cNvPr id="2" name="Title 1"/>
+          <p:cNvSpPr>
+            <a:spLocks noGrp="1"/>
+          </p:cNvSpPr>
+          <p:nvPr>
+            <p:ph type="title"/>
+          </p:nvPr>
+        </p:nvSpPr>
+        <p:spPr/>
+        <p:txBody>
+          <a:bodyPr/>
+          <a:lstStyle/>
+          <a:p>
+            <a:r>
+              <a:t>Summary</a:t>
+            </a:r>
+          </a:p>
+        </p:txBody>
+      </p:sp>
+      <p:sp>
+        <p:nvSpPr>
+          <p:cNvPr id="3" name="Content Placeholder 2"/>
+          <p:cNvSpPr>
+            <a:spLocks noGrp="1"/>
+          </p:cNvSpPr>
+          <p:nvPr>
+            <p:ph idx="1"/>
+          </p:nvPr>
+        </p:nvSpPr>
+        <p:spPr/>
+        <p:txBody>
+          <a:bodyPr/>
+          <a:lstStyle/>
+          <a:p>
+            <a:pPr marL="285750" indent="-285750">
+              <a:buFont typeface="Arial"/>
+              <a:buChar char="•"/>
+            </a:pPr>
+            <a:r>
+              <a:rPr lang="en-US" sz="1800" dirty="0"/>
+              <a:t>EF Core is the modern, recommended ORM for .NET applications</a:t>
+            </a:r>
+          </a:p>
+          <a:p>
+            <a:pPr marL="285750" indent="-285750">
+              <a:buFont typeface="Arial"/>
+              <a:buChar char="•"/>
+            </a:pPr>
+            <a:r>
+              <a:rPr lang="en-US" sz="1800" dirty="0"/>
+              <a:t>DbContext + DbSet + Entity classes give you a typed data layer</a:t>
+            </a:r>
+          </a:p>
+          <a:p>
+            <a:pPr marL="285750" indent="-285750">
+              <a:buFont typeface="Arial"/>
+              <a:buChar char="•"/>
+            </a:pPr>
+            <a:r>
+              <a:rPr lang="en-US" sz="1800" dirty="0"/>
+              <a:t>Seamless integration with ASP.NET Core via dependency injection</a:t>
+            </a:r>
+          </a:p>
+          <a:p>
+            <a:pPr marL="285750" indent="-285750">
+              <a:buFont typeface="Arial"/>
+              <a:buChar char="•"/>
+            </a:pPr>
+            <a:r>
+              <a:rPr lang="en-US" sz="1800" dirty="0"/>
+              <a:t>Migrations let your schema evolve in source-controlled code</a:t>
+            </a:r>
+          </a:p>
+          <a:p>
+            <a:pPr marL="285750" indent="-285750">
+              <a:buFont typeface="Arial"/>
+              <a:buChar char="•"/>
+            </a:pPr>
+            <a:r>
+              <a:rPr lang="en-US" sz="1800" dirty="0"/>
+              <a:t>LINQ + Async + Change Tracking — productivity without sacrificing power</a:t>
+            </a:r>
+          </a:p>
+          <a:p>
+            <a:pPr marL="285750" indent="-285750">
+              <a:buFont typeface="Arial"/>
+              <a:buChar char="•"/>
+            </a:pPr>
+            <a:r>
+              <a:rPr lang="en-US" sz="1800" dirty="0"/>
+              <a:t>Next step: build a real CRUD API and explore advanced patterns</a:t>
+            </a:r>
+          </a:p>
+        </p:txBody>
+      </p:sp>
+    </p:spTree>
+    <p:extLst>
+      <p:ext uri="{BB962C8B-B14F-4D97-AF65-F5344CB8AC3E}">
+        <p14:creationId xmlns:p14="http://schemas.microsoft.com/office/powerpoint/2010/main" val="1955990852"/>
+      </p:ext>
+    </p:extLst>
   </p:cSld>
   <p:clrMapOvr>
     <a:masterClrMapping/>
@@ -17107,33 +21404,555 @@
             <p:ph idx="1"/>
           </p:nvPr>
         </p:nvSpPr>
-        <p:spPr/>
+        <p:spPr>
+          <a:xfrm>
+            <a:off x="508000" y="2222500"/>
+            <a:ext cx="4318000" cy="4064000"/>
+          </a:xfrm>
+        </p:spPr>
         <p:txBody>
           <a:bodyPr/>
           <a:lstStyle/>
           <a:p>
-            <a:r>
-              <a:t>DbContext</a:t>
-            </a:r>
-          </a:p>
-          <a:p>
-            <a:r>
-              <a:t>DbSet</a:t>
-            </a:r>
-          </a:p>
-          <a:p>
-            <a:r>
-              <a:t>Entities</a:t>
-            </a:r>
-          </a:p>
-          <a:p>
-            <a:r>
-              <a:t>LINQ to SQL translation</a:t>
-            </a:r>
+            <a:pPr marL="285750" indent="-285750">
+              <a:buFont typeface="Arial"/>
+              <a:buChar char="•"/>
+            </a:pPr>
+            <a:r>
+              <a:rPr lang="en-US" sz="1800" dirty="0"/>
+              <a:t>DbContext — your gateway to the database (one per request)</a:t>
+            </a:r>
+          </a:p>
+          <a:p>
+            <a:pPr marL="285750" indent="-285750">
+              <a:buFont typeface="Arial"/>
+              <a:buChar char="•"/>
+            </a:pPr>
+            <a:r>
+              <a:rPr lang="en-US" sz="1800" dirty="0"/>
+              <a:t>DbSet&lt;TEntity&gt; — represents a table; query and modify via LINQ</a:t>
+            </a:r>
+          </a:p>
+          <a:p>
+            <a:pPr marL="285750" indent="-285750">
+              <a:buFont typeface="Arial"/>
+              <a:buChar char="•"/>
+            </a:pPr>
+            <a:r>
+              <a:rPr lang="en-US" sz="1800" dirty="0"/>
+              <a:t>Entity classes — plain C# POCOs mapped to rows</a:t>
+            </a:r>
+          </a:p>
+          <a:p>
+            <a:pPr marL="285750" indent="-285750">
+              <a:buFont typeface="Arial"/>
+              <a:buChar char="•"/>
+            </a:pPr>
+            <a:r>
+              <a:rPr lang="en-US" sz="1800" dirty="0"/>
+              <a:t>Change Tracker — watches entities for modifications</a:t>
+            </a:r>
+          </a:p>
+          <a:p>
+            <a:pPr marL="285750" indent="-285750">
+              <a:buFont typeface="Arial"/>
+              <a:buChar char="•"/>
+            </a:pPr>
+            <a:r>
+              <a:rPr lang="en-US" sz="1800" dirty="0"/>
+              <a:t>Query Pipeline — translates LINQ expressions into provider SQL</a:t>
+            </a:r>
+          </a:p>
+          <a:p>
+            <a:pPr marL="285750" indent="-285750">
+              <a:buFont typeface="Arial"/>
+              <a:buChar char="•"/>
+            </a:pPr>
+            <a:r>
+              <a:rPr lang="en-US" sz="1800" dirty="0"/>
+              <a:t>Database Provider — dialect-specific (SQL Server, PostgreSQL, etc.)</a:t>
+            </a:r>
+          </a:p>
+        </p:txBody>
+      </p:sp>
+      <p:sp>
+        <p:nvSpPr>
+          <p:cNvPr id="4" name="Rectangle: Rounded Corners 3">
+            <a:extLst>
+              <a:ext uri="{FF2B5EF4-FFF2-40B4-BE49-F238E27FC236}">
+                <a16:creationId xmlns:a16="http://schemas.microsoft.com/office/drawing/2014/main" id="{F028670F-2BF3-42EB-8D5A-EE21950B75FD}"/>
+              </a:ext>
+            </a:extLst>
+          </p:cNvPr>
+          <p:cNvSpPr/>
+          <p:nvPr/>
+        </p:nvSpPr>
+        <p:spPr>
+          <a:xfrm>
+            <a:off x="5207000" y="2286000"/>
+            <a:ext cx="3429000" cy="698500"/>
+          </a:xfrm>
+          <a:prstGeom prst="roundRect">
+            <a:avLst/>
+          </a:prstGeom>
+          <a:solidFill>
+            <a:srgbClr val="00E5FF"/>
+          </a:solidFill>
+          <a:ln w="15875" cap="flat" cmpd="sng" algn="ctr">
+            <a:noFill/>
+            <a:prstDash val="solid"/>
+          </a:ln>
+        </p:spPr>
+        <p:style>
+          <a:lnRef idx="2">
+            <a:schemeClr val="accent1">
+              <a:shade val="15000"/>
+            </a:schemeClr>
+          </a:lnRef>
+          <a:fillRef idx="1">
+            <a:schemeClr val="accent1"/>
+          </a:fillRef>
+          <a:effectRef idx="0">
+            <a:schemeClr val="accent1"/>
+          </a:effectRef>
+          <a:fontRef idx="minor">
+            <a:schemeClr val="lt1"/>
+          </a:fontRef>
+        </p:style>
+        <p:txBody>
+          <a:bodyPr vertOverflow="clip" horzOverflow="clip" rtlCol="0" anchor="ctr" anchorCtr="0">
+            <a:noAutofit/>
+          </a:bodyPr>
+          <a:lstStyle/>
+          <a:p>
+            <a:pPr algn="l"/>
+            <a:r>
+              <a:rPr lang="en-IN" sz="1300" b="1">
+                <a:solidFill>
+                  <a:srgbClr val="0A1929"/>
+                </a:solidFill>
+                <a:latin typeface="Segoe UI"/>
+                <a:cs typeface="Segoe UI"/>
+              </a:rPr>
+              <a:t>Your Application
+Controllers • Services</a:t>
+            </a:r>
+          </a:p>
+        </p:txBody>
+      </p:sp>
+      <p:sp>
+        <p:nvSpPr>
+          <p:cNvPr id="5" name="Rectangle: Rounded Corners 4">
+            <a:extLst>
+              <a:ext uri="{FF2B5EF4-FFF2-40B4-BE49-F238E27FC236}">
+                <a16:creationId xmlns:a16="http://schemas.microsoft.com/office/drawing/2014/main" id="{A94CBFE8-DA31-439A-BF01-D11A9603CA1A}"/>
+              </a:ext>
+            </a:extLst>
+          </p:cNvPr>
+          <p:cNvSpPr/>
+          <p:nvPr/>
+        </p:nvSpPr>
+        <p:spPr>
+          <a:xfrm>
+            <a:off x="5207000" y="3175000"/>
+            <a:ext cx="3429000" cy="698500"/>
+          </a:xfrm>
+          <a:prstGeom prst="roundRect">
+            <a:avLst/>
+          </a:prstGeom>
+          <a:solidFill>
+            <a:srgbClr val="64FFDA"/>
+          </a:solidFill>
+          <a:ln w="15875" cap="flat" cmpd="sng" algn="ctr">
+            <a:noFill/>
+            <a:prstDash val="solid"/>
+          </a:ln>
+        </p:spPr>
+        <p:style>
+          <a:lnRef idx="2">
+            <a:schemeClr val="accent1">
+              <a:shade val="15000"/>
+            </a:schemeClr>
+          </a:lnRef>
+          <a:fillRef idx="1">
+            <a:schemeClr val="accent1"/>
+          </a:fillRef>
+          <a:effectRef idx="0">
+            <a:schemeClr val="accent1"/>
+          </a:effectRef>
+          <a:fontRef idx="minor">
+            <a:schemeClr val="lt1"/>
+          </a:fontRef>
+        </p:style>
+        <p:txBody>
+          <a:bodyPr vertOverflow="clip" horzOverflow="clip" rtlCol="0" anchor="ctr" anchorCtr="0">
+            <a:noAutofit/>
+          </a:bodyPr>
+          <a:lstStyle/>
+          <a:p>
+            <a:pPr algn="l"/>
+            <a:r>
+              <a:rPr lang="en-IN" sz="1300" b="1">
+                <a:solidFill>
+                  <a:srgbClr val="0A1929"/>
+                </a:solidFill>
+                <a:latin typeface="Segoe UI"/>
+                <a:cs typeface="Segoe UI"/>
+              </a:rPr>
+              <a:t>EF Core API
+DbContext • DbSet • LINQ</a:t>
+            </a:r>
+          </a:p>
+        </p:txBody>
+      </p:sp>
+      <p:sp>
+        <p:nvSpPr>
+          <p:cNvPr id="6" name="Rectangle: Rounded Corners 5">
+            <a:extLst>
+              <a:ext uri="{FF2B5EF4-FFF2-40B4-BE49-F238E27FC236}">
+                <a16:creationId xmlns:a16="http://schemas.microsoft.com/office/drawing/2014/main" id="{982D77E5-187B-4C54-8858-0F2F0AE9D558}"/>
+              </a:ext>
+            </a:extLst>
+          </p:cNvPr>
+          <p:cNvSpPr/>
+          <p:nvPr/>
+        </p:nvSpPr>
+        <p:spPr>
+          <a:xfrm>
+            <a:off x="5207000" y="4064000"/>
+            <a:ext cx="3429000" cy="698500"/>
+          </a:xfrm>
+          <a:prstGeom prst="roundRect">
+            <a:avLst/>
+          </a:prstGeom>
+          <a:solidFill>
+            <a:srgbClr val="7C4DFF"/>
+          </a:solidFill>
+          <a:ln w="15875" cap="flat" cmpd="sng" algn="ctr">
+            <a:noFill/>
+            <a:prstDash val="solid"/>
+          </a:ln>
+        </p:spPr>
+        <p:style>
+          <a:lnRef idx="2">
+            <a:schemeClr val="accent1">
+              <a:shade val="15000"/>
+            </a:schemeClr>
+          </a:lnRef>
+          <a:fillRef idx="1">
+            <a:schemeClr val="accent1"/>
+          </a:fillRef>
+          <a:effectRef idx="0">
+            <a:schemeClr val="accent1"/>
+          </a:effectRef>
+          <a:fontRef idx="minor">
+            <a:schemeClr val="lt1"/>
+          </a:fontRef>
+        </p:style>
+        <p:txBody>
+          <a:bodyPr vertOverflow="clip" horzOverflow="clip" rtlCol="0" anchor="ctr" anchorCtr="0">
+            <a:noAutofit/>
+          </a:bodyPr>
+          <a:lstStyle/>
+          <a:p>
+            <a:pPr algn="l"/>
+            <a:r>
+              <a:rPr lang="en-US" sz="1300" b="1">
+                <a:solidFill>
+                  <a:srgbClr val="FFFFFF"/>
+                </a:solidFill>
+                <a:latin typeface="Segoe UI"/>
+                <a:cs typeface="Segoe UI"/>
+              </a:rPr>
+              <a:t>Query Pipeline
+Translator • Change Tracker</a:t>
+            </a:r>
+            <a:endParaRPr lang="en-IN" sz="1300" b="1">
+              <a:solidFill>
+                <a:srgbClr val="FFFFFF"/>
+              </a:solidFill>
+              <a:latin typeface="Segoe UI"/>
+              <a:cs typeface="Segoe UI"/>
+            </a:endParaRPr>
+          </a:p>
+        </p:txBody>
+      </p:sp>
+      <p:sp>
+        <p:nvSpPr>
+          <p:cNvPr id="7" name="Rectangle: Rounded Corners 6">
+            <a:extLst>
+              <a:ext uri="{FF2B5EF4-FFF2-40B4-BE49-F238E27FC236}">
+                <a16:creationId xmlns:a16="http://schemas.microsoft.com/office/drawing/2014/main" id="{663B3320-039A-4797-B1F1-47767C7DCC31}"/>
+              </a:ext>
+            </a:extLst>
+          </p:cNvPr>
+          <p:cNvSpPr/>
+          <p:nvPr/>
+        </p:nvSpPr>
+        <p:spPr>
+          <a:xfrm>
+            <a:off x="5207000" y="4953000"/>
+            <a:ext cx="3429000" cy="698500"/>
+          </a:xfrm>
+          <a:prstGeom prst="roundRect">
+            <a:avLst/>
+          </a:prstGeom>
+          <a:solidFill>
+            <a:srgbClr val="FF6E40"/>
+          </a:solidFill>
+          <a:ln w="15875" cap="flat" cmpd="sng" algn="ctr">
+            <a:noFill/>
+            <a:prstDash val="solid"/>
+          </a:ln>
+        </p:spPr>
+        <p:style>
+          <a:lnRef idx="2">
+            <a:schemeClr val="accent1">
+              <a:shade val="15000"/>
+            </a:schemeClr>
+          </a:lnRef>
+          <a:fillRef idx="1">
+            <a:schemeClr val="accent1"/>
+          </a:fillRef>
+          <a:effectRef idx="0">
+            <a:schemeClr val="accent1"/>
+          </a:effectRef>
+          <a:fontRef idx="minor">
+            <a:schemeClr val="lt1"/>
+          </a:fontRef>
+        </p:style>
+        <p:txBody>
+          <a:bodyPr vertOverflow="clip" horzOverflow="clip" rtlCol="0" anchor="ctr" anchorCtr="0">
+            <a:noAutofit/>
+          </a:bodyPr>
+          <a:lstStyle/>
+          <a:p>
+            <a:pPr algn="l"/>
+            <a:r>
+              <a:rPr lang="en-IN" sz="1300" b="1">
+                <a:solidFill>
+                  <a:srgbClr val="FFFFFF"/>
+                </a:solidFill>
+                <a:latin typeface="Segoe UI"/>
+                <a:cs typeface="Segoe UI"/>
+              </a:rPr>
+              <a:t>Database Provider
+SQL Server • Postgres • SQLite</a:t>
+            </a:r>
+          </a:p>
+        </p:txBody>
+      </p:sp>
+      <p:sp>
+        <p:nvSpPr>
+          <p:cNvPr id="8" name="Arrow: Down 7">
+            <a:extLst>
+              <a:ext uri="{FF2B5EF4-FFF2-40B4-BE49-F238E27FC236}">
+                <a16:creationId xmlns:a16="http://schemas.microsoft.com/office/drawing/2014/main" id="{520E146E-C13B-43FD-A367-F3C3ECE43124}"/>
+              </a:ext>
+            </a:extLst>
+          </p:cNvPr>
+          <p:cNvSpPr/>
+          <p:nvPr/>
+        </p:nvSpPr>
+        <p:spPr>
+          <a:xfrm>
+            <a:off x="6731000" y="2984500"/>
+            <a:ext cx="381000" cy="190500"/>
+          </a:xfrm>
+          <a:prstGeom prst="downArrow">
+            <a:avLst/>
+          </a:prstGeom>
+          <a:solidFill>
+            <a:srgbClr val="E8F4F8"/>
+          </a:solidFill>
+          <a:ln w="15875" cap="flat" cmpd="sng" algn="ctr">
+            <a:noFill/>
+            <a:prstDash val="solid"/>
+          </a:ln>
+        </p:spPr>
+        <p:style>
+          <a:lnRef idx="2">
+            <a:schemeClr val="accent1">
+              <a:shade val="15000"/>
+            </a:schemeClr>
+          </a:lnRef>
+          <a:fillRef idx="1">
+            <a:schemeClr val="accent1"/>
+          </a:fillRef>
+          <a:effectRef idx="0">
+            <a:schemeClr val="accent1"/>
+          </a:effectRef>
+          <a:fontRef idx="minor">
+            <a:schemeClr val="lt1"/>
+          </a:fontRef>
+        </p:style>
+        <p:txBody>
+          <a:bodyPr vertOverflow="clip" horzOverflow="clip" rtlCol="0" anchor="t"/>
+          <a:lstStyle/>
+          <a:p>
+            <a:pPr algn="l"/>
+            <a:endParaRPr lang="en-IN"/>
+          </a:p>
+        </p:txBody>
+      </p:sp>
+      <p:sp>
+        <p:nvSpPr>
+          <p:cNvPr id="9" name="Arrow: Down 8">
+            <a:extLst>
+              <a:ext uri="{FF2B5EF4-FFF2-40B4-BE49-F238E27FC236}">
+                <a16:creationId xmlns:a16="http://schemas.microsoft.com/office/drawing/2014/main" id="{626FE1DF-2138-4F23-8311-5C6CED194D72}"/>
+              </a:ext>
+            </a:extLst>
+          </p:cNvPr>
+          <p:cNvSpPr/>
+          <p:nvPr/>
+        </p:nvSpPr>
+        <p:spPr>
+          <a:xfrm>
+            <a:off x="6731000" y="3873500"/>
+            <a:ext cx="381000" cy="190500"/>
+          </a:xfrm>
+          <a:prstGeom prst="downArrow">
+            <a:avLst/>
+          </a:prstGeom>
+          <a:solidFill>
+            <a:srgbClr val="E8F4F8"/>
+          </a:solidFill>
+          <a:ln w="15875" cap="flat" cmpd="sng" algn="ctr">
+            <a:noFill/>
+            <a:prstDash val="solid"/>
+          </a:ln>
+        </p:spPr>
+        <p:style>
+          <a:lnRef idx="2">
+            <a:schemeClr val="accent1">
+              <a:shade val="15000"/>
+            </a:schemeClr>
+          </a:lnRef>
+          <a:fillRef idx="1">
+            <a:schemeClr val="accent1"/>
+          </a:fillRef>
+          <a:effectRef idx="0">
+            <a:schemeClr val="accent1"/>
+          </a:effectRef>
+          <a:fontRef idx="minor">
+            <a:schemeClr val="lt1"/>
+          </a:fontRef>
+        </p:style>
+        <p:txBody>
+          <a:bodyPr vertOverflow="clip" horzOverflow="clip" rtlCol="0" anchor="t"/>
+          <a:lstStyle/>
+          <a:p>
+            <a:pPr algn="l"/>
+            <a:endParaRPr lang="en-IN"/>
+          </a:p>
+        </p:txBody>
+      </p:sp>
+      <p:sp>
+        <p:nvSpPr>
+          <p:cNvPr id="10" name="Arrow: Down 9">
+            <a:extLst>
+              <a:ext uri="{FF2B5EF4-FFF2-40B4-BE49-F238E27FC236}">
+                <a16:creationId xmlns:a16="http://schemas.microsoft.com/office/drawing/2014/main" id="{8B830B06-3E9C-41F3-98C0-738BBF9ED3CF}"/>
+              </a:ext>
+            </a:extLst>
+          </p:cNvPr>
+          <p:cNvSpPr/>
+          <p:nvPr/>
+        </p:nvSpPr>
+        <p:spPr>
+          <a:xfrm>
+            <a:off x="6731000" y="4762500"/>
+            <a:ext cx="381000" cy="190500"/>
+          </a:xfrm>
+          <a:prstGeom prst="downArrow">
+            <a:avLst/>
+          </a:prstGeom>
+          <a:solidFill>
+            <a:srgbClr val="E8F4F8"/>
+          </a:solidFill>
+          <a:ln w="15875" cap="flat" cmpd="sng" algn="ctr">
+            <a:noFill/>
+            <a:prstDash val="solid"/>
+          </a:ln>
+        </p:spPr>
+        <p:style>
+          <a:lnRef idx="2">
+            <a:schemeClr val="accent1">
+              <a:shade val="15000"/>
+            </a:schemeClr>
+          </a:lnRef>
+          <a:fillRef idx="1">
+            <a:schemeClr val="accent1"/>
+          </a:fillRef>
+          <a:effectRef idx="0">
+            <a:schemeClr val="accent1"/>
+          </a:effectRef>
+          <a:fontRef idx="minor">
+            <a:schemeClr val="lt1"/>
+          </a:fontRef>
+        </p:style>
+        <p:txBody>
+          <a:bodyPr vertOverflow="clip" horzOverflow="clip" rtlCol="0" anchor="t"/>
+          <a:lstStyle/>
+          <a:p>
+            <a:pPr algn="l"/>
+            <a:endParaRPr lang="en-IN"/>
+          </a:p>
+        </p:txBody>
+      </p:sp>
+      <p:sp>
+        <p:nvSpPr>
+          <p:cNvPr id="11" name="TextBox 10">
+            <a:extLst>
+              <a:ext uri="{FF2B5EF4-FFF2-40B4-BE49-F238E27FC236}">
+                <a16:creationId xmlns:a16="http://schemas.microsoft.com/office/drawing/2014/main" id="{C70EB1B2-6B46-4C13-A988-9AA0EE53A25F}"/>
+              </a:ext>
+            </a:extLst>
+          </p:cNvPr>
+          <p:cNvSpPr txBox="1"/>
+          <p:nvPr/>
+        </p:nvSpPr>
+        <p:spPr>
+          <a:xfrm>
+            <a:off x="5207000" y="5816600"/>
+            <a:ext cx="3429000" cy="482600"/>
+          </a:xfrm>
+          <a:prstGeom prst="rect">
+            <a:avLst/>
+          </a:prstGeom>
+          <a:noFill/>
+        </p:spPr>
+        <p:txBody>
+          <a:bodyPr vertOverflow="overflow" vert="horz" wrap="square" rtlCol="0" anchor="t" anchorCtr="0">
+            <a:spAutoFit/>
+          </a:bodyPr>
+          <a:lstStyle/>
+          <a:p>
+            <a:pPr algn="l"/>
+            <a:r>
+              <a:rPr lang="en-US" sz="1100" i="1">
+                <a:solidFill>
+                  <a:srgbClr val="A0C4D8"/>
+                </a:solidFill>
+              </a:rPr>
+              <a:t>⟱  Data flows down
+⟰  Results flow up</a:t>
+            </a:r>
+            <a:endParaRPr lang="en-IN" sz="1100" i="1">
+              <a:solidFill>
+                <a:srgbClr val="A0C4D8"/>
+              </a:solidFill>
+            </a:endParaRPr>
           </a:p>
         </p:txBody>
       </p:sp>
     </p:spTree>
+    <p:extLst>
+      <p:ext uri="{BB962C8B-B14F-4D97-AF65-F5344CB8AC3E}">
+        <p14:creationId xmlns:p14="http://schemas.microsoft.com/office/powerpoint/2010/main" val="3728504525"/>
+      </p:ext>
+    </p:extLst>
   </p:cSld>
   <p:clrMapOvr>
     <a:masterClrMapping/>
@@ -17194,23 +22013,113 @@
           <a:bodyPr/>
           <a:lstStyle/>
           <a:p>
-            <a:r>
+            <a:pPr>
+              <a:buNone/>
+            </a:pPr>
+            <a:r>
+              <a:rPr lang="en-US" sz="1800" b="1" dirty="0">
+                <a:solidFill>
+                  <a:srgbClr val="64FFDA"/>
+                </a:solidFill>
+              </a:rPr>
+              <a:t>Required NuGet packages</a:t>
+            </a:r>
+          </a:p>
+          <a:p>
+            <a:pPr marL="285750" indent="-285750">
+              <a:buFont typeface="Courier New"/>
+              <a:buChar char="$"/>
+            </a:pPr>
+            <a:r>
+              <a:rPr lang="en-US" sz="1500" dirty="0">
+                <a:latin typeface="Consolas"/>
+              </a:rPr>
               <a:t>dotnet add package Microsoft.EntityFrameworkCore</a:t>
             </a:r>
           </a:p>
           <a:p>
-            <a:r>
+            <a:pPr marL="285750" indent="-285750">
+              <a:buFont typeface="Courier New"/>
+              <a:buChar char="$"/>
+            </a:pPr>
+            <a:r>
+              <a:rPr lang="en-US" sz="1500" dirty="0">
+                <a:latin typeface="Consolas"/>
+              </a:rPr>
               <a:t>dotnet add package Microsoft.EntityFrameworkCore.SqlServer</a:t>
             </a:r>
           </a:p>
           <a:p>
-            <a:r>
+            <a:pPr marL="285750" indent="-285750">
+              <a:buFont typeface="Courier New"/>
+              <a:buChar char="$"/>
+            </a:pPr>
+            <a:r>
+              <a:rPr lang="en-US" sz="1500" dirty="0">
+                <a:latin typeface="Consolas"/>
+              </a:rPr>
               <a:t>dotnet add package Microsoft.EntityFrameworkCore.Tools</a:t>
+            </a:r>
+          </a:p>
+          <a:p>
+            <a:pPr>
+              <a:buNone/>
+            </a:pPr>
+            <a:endParaRPr lang="en-US" sz="800"/>
+          </a:p>
+          <a:p>
+            <a:pPr>
+              <a:buNone/>
+            </a:pPr>
+            <a:r>
+              <a:rPr lang="en-US" sz="1800" b="1" dirty="0">
+                <a:solidFill>
+                  <a:srgbClr val="64FFDA"/>
+                </a:solidFill>
+              </a:rPr>
+              <a:t>Swap providers as needed</a:t>
+            </a:r>
+          </a:p>
+          <a:p>
+            <a:pPr marL="285750" indent="-285750">
+              <a:buFont typeface="Arial"/>
+              <a:buChar char="•"/>
+            </a:pPr>
+            <a:r>
+              <a:rPr lang="en-US" sz="1600" dirty="0"/>
+              <a:t>PostgreSQL: </a:t>
+            </a:r>
+            <a:r>
+              <a:rPr lang="en-US" sz="1600" dirty="0">
+                <a:latin typeface="Consolas"/>
+              </a:rPr>
+              <a:t>Npgsql.EntityFrameworkCore.PostgreSQL</a:t>
+            </a:r>
+          </a:p>
+          <a:p>
+            <a:pPr marL="285750" indent="-285750">
+              <a:buFont typeface="Arial"/>
+              <a:buChar char="•"/>
+            </a:pPr>
+            <a:r>
+              <a:rPr lang="en-US" sz="1600" dirty="0"/>
+              <a:t>SQLite: </a:t>
+            </a:r>
+            <a:r>
+              <a:rPr lang="en-US" sz="1600" dirty="0">
+                <a:latin typeface="Consolas"/>
+              </a:rPr>
+              <a:t>Microsoft.EntityFrameworkCore.Sqlite</a:t>
             </a:r>
           </a:p>
         </p:txBody>
       </p:sp>
     </p:spTree>
+    <p:extLst>
+      <p:ext uri="{BB962C8B-B14F-4D97-AF65-F5344CB8AC3E}">
+        <p14:creationId xmlns:p14="http://schemas.microsoft.com/office/powerpoint/2010/main" val="2362682428"/>
+      </p:ext>
+    </p:extLst>
   </p:cSld>
   <p:clrMapOvr>
     <a:masterClrMapping/>
@@ -17271,23 +22180,73 @@
           <a:bodyPr/>
           <a:lstStyle/>
           <a:p>
-            <a:r>
-              <a:t>Represents session with DB</a:t>
-            </a:r>
-          </a:p>
-          <a:p>
-            <a:r>
-              <a:t>Handles queries and saving</a:t>
-            </a:r>
-          </a:p>
-          <a:p>
-            <a:r>
-              <a:t>Configured in Program.cs</a:t>
+            <a:pPr marL="285750" indent="-285750">
+              <a:buFont typeface="Arial"/>
+              <a:buChar char="•"/>
+            </a:pPr>
+            <a:r>
+              <a:rPr lang="en-US" sz="1800" dirty="0"/>
+              <a:t>Represents a session with the database — a unit of work</a:t>
+            </a:r>
+          </a:p>
+          <a:p>
+            <a:pPr marL="285750" indent="-285750">
+              <a:buFont typeface="Arial"/>
+              <a:buChar char="•"/>
+            </a:pPr>
+            <a:r>
+              <a:rPr lang="en-US" sz="1800" dirty="0"/>
+              <a:t>Inherits from Microsoft.EntityFrameworkCore.DbContext</a:t>
+            </a:r>
+          </a:p>
+          <a:p>
+            <a:pPr marL="285750" indent="-285750">
+              <a:buFont typeface="Arial"/>
+              <a:buChar char="•"/>
+            </a:pPr>
+            <a:r>
+              <a:rPr lang="en-US" sz="1800" dirty="0"/>
+              <a:t>Exposes DbSet&lt;T&gt; properties — one per entity type</a:t>
+            </a:r>
+          </a:p>
+          <a:p>
+            <a:pPr marL="285750" indent="-285750">
+              <a:buFont typeface="Arial"/>
+              <a:buChar char="•"/>
+            </a:pPr>
+            <a:r>
+              <a:rPr lang="en-US" sz="1800" dirty="0"/>
+              <a:t>Configured via OnConfiguring() or constructor injection</a:t>
+            </a:r>
+          </a:p>
+          <a:p>
+            <a:pPr marL="285750" indent="-285750">
+              <a:buFont typeface="Arial"/>
+              <a:buChar char="•"/>
+            </a:pPr>
+            <a:r>
+              <a:rPr lang="en-US" sz="1800" dirty="0"/>
+              <a:t>Scoped lifetime in ASP.NET Core — one instance per HTTP request</a:t>
+            </a:r>
+          </a:p>
+          <a:p>
+            <a:pPr marL="285750" indent="-285750">
+              <a:buFont typeface="Arial"/>
+              <a:buChar char="•"/>
+            </a:pPr>
+            <a:r>
+              <a:rPr lang="en-US" sz="1800" dirty="0"/>
+              <a:t>Implements IDisposable — always wrap in 'using' or rely on DI</a:t>
             </a:r>
           </a:p>
         </p:txBody>
       </p:sp>
     </p:spTree>
+    <p:extLst>
+      <p:ext uri="{BB962C8B-B14F-4D97-AF65-F5344CB8AC3E}">
+        <p14:creationId xmlns:p14="http://schemas.microsoft.com/office/powerpoint/2010/main" val="3189144389"/>
+      </p:ext>
+    </p:extLst>
   </p:cSld>
   <p:clrMapOvr>
     <a:masterClrMapping/>
@@ -17348,23 +22307,73 @@
           <a:bodyPr/>
           <a:lstStyle/>
           <a:p>
-            <a:r>
-              <a:t>POCO classes</a:t>
-            </a:r>
-          </a:p>
-          <a:p>
-            <a:r>
-              <a:t>Represents DB table</a:t>
-            </a:r>
-          </a:p>
-          <a:p>
-            <a:r>
-              <a:t>Properties = columns</a:t>
+            <a:pPr marL="285750" indent="-285750">
+              <a:buFont typeface="Arial"/>
+              <a:buChar char="•"/>
+            </a:pPr>
+            <a:r>
+              <a:rPr lang="en-US" sz="1800" dirty="0"/>
+              <a:t>POCO — Plain Old CLR Object, no special base class required</a:t>
+            </a:r>
+          </a:p>
+          <a:p>
+            <a:pPr marL="285750" indent="-285750">
+              <a:buFont typeface="Arial"/>
+              <a:buChar char="•"/>
+            </a:pPr>
+            <a:r>
+              <a:rPr lang="en-US" sz="1800" dirty="0"/>
+              <a:t>Each entity class maps to one database table by convention</a:t>
+            </a:r>
+          </a:p>
+          <a:p>
+            <a:pPr marL="285750" indent="-285750">
+              <a:buFont typeface="Arial"/>
+              <a:buChar char="•"/>
+            </a:pPr>
+            <a:r>
+              <a:rPr lang="en-US" sz="1800" dirty="0"/>
+              <a:t>Public properties become columns (name + type matched)</a:t>
+            </a:r>
+          </a:p>
+          <a:p>
+            <a:pPr marL="285750" indent="-285750">
+              <a:buFont typeface="Arial"/>
+              <a:buChar char="•"/>
+            </a:pPr>
+            <a:r>
+              <a:rPr lang="en-US" sz="1800" dirty="0"/>
+              <a:t>Conventions: 'Id' or 'ClassNameId' becomes the primary key</a:t>
+            </a:r>
+          </a:p>
+          <a:p>
+            <a:pPr marL="285750" indent="-285750">
+              <a:buFont typeface="Arial"/>
+              <a:buChar char="•"/>
+            </a:pPr>
+            <a:r>
+              <a:rPr lang="en-US" sz="1800" dirty="0"/>
+              <a:t>Data annotations: [Required], [MaxLength], [Column], [Key]</a:t>
+            </a:r>
+          </a:p>
+          <a:p>
+            <a:pPr marL="285750" indent="-285750">
+              <a:buFont typeface="Arial"/>
+              <a:buChar char="•"/>
+            </a:pPr>
+            <a:r>
+              <a:rPr lang="en-US" sz="1800" dirty="0"/>
+              <a:t>Fluent API in OnModelCreating() for advanced configuration</a:t>
             </a:r>
           </a:p>
         </p:txBody>
       </p:sp>
     </p:spTree>
+    <p:extLst>
+      <p:ext uri="{BB962C8B-B14F-4D97-AF65-F5344CB8AC3E}">
+        <p14:creationId xmlns:p14="http://schemas.microsoft.com/office/powerpoint/2010/main" val="3630551414"/>
+      </p:ext>
+    </p:extLst>
   </p:cSld>
   <p:clrMapOvr>
     <a:masterClrMapping/>
@@ -17391,52 +22400,767 @@
       </p:grpSpPr>
       <p:sp>
         <p:nvSpPr>
-          <p:cNvPr id="2" name="Title 1"/>
-          <p:cNvSpPr>
-            <a:spLocks noGrp="1"/>
-          </p:cNvSpPr>
-          <p:nvPr>
-            <p:ph type="title"/>
-          </p:nvPr>
+          <p:cNvPr id="2" name="Rectangle: Rounded Corners 1">
+            <a:extLst>
+              <a:ext uri="{FF2B5EF4-FFF2-40B4-BE49-F238E27FC236}">
+                <a16:creationId xmlns:a16="http://schemas.microsoft.com/office/drawing/2014/main" id="{1FBB8F65-4ED5-43E4-9F55-232714DFD2F6}"/>
+              </a:ext>
+            </a:extLst>
+          </p:cNvPr>
+          <p:cNvSpPr/>
+          <p:nvPr/>
         </p:nvSpPr>
-        <p:spPr/>
+        <p:spPr>
+          <a:xfrm>
+            <a:off x="508000" y="381000"/>
+            <a:ext cx="1651000" cy="457200"/>
+          </a:xfrm>
+          <a:prstGeom prst="roundRect">
+            <a:avLst/>
+          </a:prstGeom>
+          <a:solidFill>
+            <a:srgbClr val="FF6E40"/>
+          </a:solidFill>
+          <a:ln w="15875" cap="flat" cmpd="sng" algn="ctr">
+            <a:noFill/>
+            <a:prstDash val="solid"/>
+          </a:ln>
+        </p:spPr>
+        <p:style>
+          <a:lnRef idx="2">
+            <a:schemeClr val="accent1">
+              <a:shade val="15000"/>
+            </a:schemeClr>
+          </a:lnRef>
+          <a:fillRef idx="1">
+            <a:schemeClr val="accent1"/>
+          </a:fillRef>
+          <a:effectRef idx="0">
+            <a:schemeClr val="accent1"/>
+          </a:effectRef>
+          <a:fontRef idx="minor">
+            <a:schemeClr val="lt1"/>
+          </a:fontRef>
+        </p:style>
         <p:txBody>
-          <a:bodyPr/>
+          <a:bodyPr vertOverflow="clip" horzOverflow="clip" rtlCol="0" anchor="ctr" anchorCtr="0">
+            <a:noAutofit/>
+          </a:bodyPr>
           <a:lstStyle/>
           <a:p>
-            <a:r>
-              <a:t>DbSet</a:t>
+            <a:pPr algn="l"/>
+            <a:r>
+              <a:rPr lang="en-IN" sz="1600" b="1">
+                <a:solidFill>
+                  <a:srgbClr val="FFFFFF"/>
+                </a:solidFill>
+                <a:latin typeface="Segoe UI"/>
+                <a:cs typeface="Segoe UI"/>
+              </a:rPr>
+              <a:t>🧪 LAB 1</a:t>
             </a:r>
           </a:p>
         </p:txBody>
       </p:sp>
       <p:sp>
         <p:nvSpPr>
-          <p:cNvPr id="3" name="Content Placeholder 2"/>
-          <p:cNvSpPr>
-            <a:spLocks noGrp="1"/>
-          </p:cNvSpPr>
-          <p:nvPr>
-            <p:ph idx="1"/>
-          </p:nvPr>
+          <p:cNvPr id="3" name="TextBox 2">
+            <a:extLst>
+              <a:ext uri="{FF2B5EF4-FFF2-40B4-BE49-F238E27FC236}">
+                <a16:creationId xmlns:a16="http://schemas.microsoft.com/office/drawing/2014/main" id="{8532BCAD-02F1-4DCB-8286-E5C1F9CB1135}"/>
+              </a:ext>
+            </a:extLst>
+          </p:cNvPr>
+          <p:cNvSpPr txBox="1"/>
+          <p:nvPr/>
         </p:nvSpPr>
-        <p:spPr/>
+        <p:spPr>
+          <a:xfrm>
+            <a:off x="2349500" y="381000"/>
+            <a:ext cx="6286500" cy="508000"/>
+          </a:xfrm>
+          <a:prstGeom prst="rect">
+            <a:avLst/>
+          </a:prstGeom>
+          <a:noFill/>
+        </p:spPr>
         <p:txBody>
-          <a:bodyPr/>
+          <a:bodyPr vertOverflow="overflow" vert="horz" wrap="square" rtlCol="0" anchor="ctr" anchorCtr="0">
+            <a:noAutofit/>
+          </a:bodyPr>
           <a:lstStyle/>
           <a:p>
-            <a:r>
-              <a:t>Represents table collection</a:t>
-            </a:r>
-          </a:p>
-          <a:p>
-            <a:r>
-              <a:t>Used for CRUD operations</a:t>
-            </a:r>
+            <a:pPr algn="l"/>
+            <a:r>
+              <a:rPr lang="en-IN" sz="2800" b="1">
+                <a:solidFill>
+                  <a:srgbClr val="00E5FF"/>
+                </a:solidFill>
+                <a:latin typeface="Segoe UI"/>
+                <a:cs typeface="Segoe UI"/>
+              </a:rPr>
+              <a:t>Build Your First Model</a:t>
+            </a:r>
+          </a:p>
+        </p:txBody>
+      </p:sp>
+      <p:sp>
+        <p:nvSpPr>
+          <p:cNvPr id="4" name="TextBox 3">
+            <a:extLst>
+              <a:ext uri="{FF2B5EF4-FFF2-40B4-BE49-F238E27FC236}">
+                <a16:creationId xmlns:a16="http://schemas.microsoft.com/office/drawing/2014/main" id="{EB577ECE-5B88-4C81-B189-07BA6C9FD6ED}"/>
+              </a:ext>
+            </a:extLst>
+          </p:cNvPr>
+          <p:cNvSpPr txBox="1"/>
+          <p:nvPr/>
+        </p:nvSpPr>
+        <p:spPr>
+          <a:xfrm>
+            <a:off x="508000" y="1143000"/>
+            <a:ext cx="8128000" cy="228600"/>
+          </a:xfrm>
+          <a:prstGeom prst="rect">
+            <a:avLst/>
+          </a:prstGeom>
+          <a:noFill/>
+        </p:spPr>
+        <p:txBody>
+          <a:bodyPr vertOverflow="overflow" vert="horz" wrap="square" rtlCol="0" anchor="t" anchorCtr="0">
+            <a:spAutoFit/>
+          </a:bodyPr>
+          <a:lstStyle/>
+          <a:p>
+            <a:pPr algn="l"/>
+            <a:r>
+              <a:rPr lang="en-IN" sz="1100" b="1">
+                <a:solidFill>
+                  <a:srgbClr val="64FFDA"/>
+                </a:solidFill>
+                <a:latin typeface="Segoe UI"/>
+                <a:cs typeface="Segoe UI"/>
+              </a:rPr>
+              <a:t>SCENARIO</a:t>
+            </a:r>
+          </a:p>
+        </p:txBody>
+      </p:sp>
+      <p:sp>
+        <p:nvSpPr>
+          <p:cNvPr id="5" name="TextBox 4">
+            <a:extLst>
+              <a:ext uri="{FF2B5EF4-FFF2-40B4-BE49-F238E27FC236}">
+                <a16:creationId xmlns:a16="http://schemas.microsoft.com/office/drawing/2014/main" id="{C0673C16-4A37-48B8-B57C-01AB07B38F6F}"/>
+              </a:ext>
+            </a:extLst>
+          </p:cNvPr>
+          <p:cNvSpPr txBox="1"/>
+          <p:nvPr/>
+        </p:nvSpPr>
+        <p:spPr>
+          <a:xfrm>
+            <a:off x="508000" y="1397000"/>
+            <a:ext cx="8128000" cy="762000"/>
+          </a:xfrm>
+          <a:prstGeom prst="rect">
+            <a:avLst/>
+          </a:prstGeom>
+          <a:noFill/>
+        </p:spPr>
+        <p:txBody>
+          <a:bodyPr vertOverflow="overflow" vert="horz" wrap="square" rtlCol="0" anchor="t" anchorCtr="0">
+            <a:spAutoFit/>
+          </a:bodyPr>
+          <a:lstStyle/>
+          <a:p>
+            <a:pPr algn="l"/>
+            <a:r>
+              <a:rPr lang="en-US" sz="1600">
+                <a:solidFill>
+                  <a:srgbClr val="E8F4F8"/>
+                </a:solidFill>
+                <a:latin typeface="Segoe UI"/>
+                <a:cs typeface="Segoe UI"/>
+              </a:rPr>
+              <a:t>Define a Product entity and a StoreContext with one DbSet&lt;Product&gt;. Wire it to a SQL Server connection string.</a:t>
+            </a:r>
+            <a:endParaRPr lang="en-IN" sz="1600">
+              <a:solidFill>
+                <a:srgbClr val="E8F4F8"/>
+              </a:solidFill>
+              <a:latin typeface="Segoe UI"/>
+              <a:cs typeface="Segoe UI"/>
+            </a:endParaRPr>
+          </a:p>
+        </p:txBody>
+      </p:sp>
+      <p:sp>
+        <p:nvSpPr>
+          <p:cNvPr id="6" name="TextBox 5">
+            <a:extLst>
+              <a:ext uri="{FF2B5EF4-FFF2-40B4-BE49-F238E27FC236}">
+                <a16:creationId xmlns:a16="http://schemas.microsoft.com/office/drawing/2014/main" id="{9CF23BC1-628A-40DF-A671-DE15C47AD589}"/>
+              </a:ext>
+            </a:extLst>
+          </p:cNvPr>
+          <p:cNvSpPr txBox="1"/>
+          <p:nvPr/>
+        </p:nvSpPr>
+        <p:spPr>
+          <a:xfrm>
+            <a:off x="508000" y="2286000"/>
+            <a:ext cx="8128000" cy="228600"/>
+          </a:xfrm>
+          <a:prstGeom prst="rect">
+            <a:avLst/>
+          </a:prstGeom>
+          <a:noFill/>
+        </p:spPr>
+        <p:txBody>
+          <a:bodyPr vertOverflow="overflow" vert="horz" wrap="square" rtlCol="0" anchor="t" anchorCtr="0">
+            <a:spAutoFit/>
+          </a:bodyPr>
+          <a:lstStyle/>
+          <a:p>
+            <a:pPr algn="l"/>
+            <a:r>
+              <a:rPr lang="en-IN" sz="1100" b="1">
+                <a:solidFill>
+                  <a:srgbClr val="64FFDA"/>
+                </a:solidFill>
+                <a:latin typeface="Segoe UI"/>
+                <a:cs typeface="Segoe UI"/>
+              </a:rPr>
+              <a:t>YOUR TASKS</a:t>
+            </a:r>
+          </a:p>
+        </p:txBody>
+      </p:sp>
+      <p:sp>
+        <p:nvSpPr>
+          <p:cNvPr id="7" name="Oval 6">
+            <a:extLst>
+              <a:ext uri="{FF2B5EF4-FFF2-40B4-BE49-F238E27FC236}">
+                <a16:creationId xmlns:a16="http://schemas.microsoft.com/office/drawing/2014/main" id="{4C740B4E-F6C4-468E-83ED-8B4129E1E380}"/>
+              </a:ext>
+            </a:extLst>
+          </p:cNvPr>
+          <p:cNvSpPr/>
+          <p:nvPr/>
+        </p:nvSpPr>
+        <p:spPr>
+          <a:xfrm>
+            <a:off x="571500" y="2603500"/>
+            <a:ext cx="355600" cy="355600"/>
+          </a:xfrm>
+          <a:prstGeom prst="ellipse">
+            <a:avLst/>
+          </a:prstGeom>
+          <a:solidFill>
+            <a:srgbClr val="7C4DFF"/>
+          </a:solidFill>
+          <a:ln w="15875" cap="flat" cmpd="sng" algn="ctr">
+            <a:noFill/>
+            <a:prstDash val="solid"/>
+          </a:ln>
+        </p:spPr>
+        <p:style>
+          <a:lnRef idx="2">
+            <a:schemeClr val="accent1">
+              <a:shade val="15000"/>
+            </a:schemeClr>
+          </a:lnRef>
+          <a:fillRef idx="1">
+            <a:schemeClr val="accent1"/>
+          </a:fillRef>
+          <a:effectRef idx="0">
+            <a:schemeClr val="accent1"/>
+          </a:effectRef>
+          <a:fontRef idx="minor">
+            <a:schemeClr val="lt1"/>
+          </a:fontRef>
+        </p:style>
+        <p:txBody>
+          <a:bodyPr vertOverflow="clip" horzOverflow="clip" wrap="none" rtlCol="0" anchor="ctr" anchorCtr="0">
+            <a:noAutofit/>
+          </a:bodyPr>
+          <a:lstStyle/>
+          <a:p>
+            <a:pPr algn="l"/>
+            <a:r>
+              <a:rPr lang="en-IN" sz="1400" b="1">
+                <a:solidFill>
+                  <a:srgbClr val="FFFFFF"/>
+                </a:solidFill>
+                <a:latin typeface="Segoe UI"/>
+                <a:cs typeface="Segoe UI"/>
+              </a:rPr>
+              <a:t>1</a:t>
+            </a:r>
+          </a:p>
+        </p:txBody>
+      </p:sp>
+      <p:sp>
+        <p:nvSpPr>
+          <p:cNvPr id="8" name="TextBox 7">
+            <a:extLst>
+              <a:ext uri="{FF2B5EF4-FFF2-40B4-BE49-F238E27FC236}">
+                <a16:creationId xmlns:a16="http://schemas.microsoft.com/office/drawing/2014/main" id="{B49A482D-4DBC-4A9A-ADAE-93B281E4906A}"/>
+              </a:ext>
+            </a:extLst>
+          </p:cNvPr>
+          <p:cNvSpPr txBox="1"/>
+          <p:nvPr/>
+        </p:nvSpPr>
+        <p:spPr>
+          <a:xfrm>
+            <a:off x="1079500" y="2603500"/>
+            <a:ext cx="7556500" cy="457200"/>
+          </a:xfrm>
+          <a:prstGeom prst="rect">
+            <a:avLst/>
+          </a:prstGeom>
+          <a:noFill/>
+        </p:spPr>
+        <p:txBody>
+          <a:bodyPr vertOverflow="overflow" vert="horz" wrap="square" rtlCol="0" anchor="t" anchorCtr="0">
+            <a:noAutofit/>
+          </a:bodyPr>
+          <a:lstStyle/>
+          <a:p>
+            <a:pPr algn="l"/>
+            <a:r>
+              <a:rPr lang="en-US" sz="1500">
+                <a:solidFill>
+                  <a:srgbClr val="E8F4F8"/>
+                </a:solidFill>
+                <a:latin typeface="Segoe UI"/>
+                <a:cs typeface="Segoe UI"/>
+              </a:rPr>
+              <a:t>Create Product.cs with Id, Name, Price (decimal), Stock (int)</a:t>
+            </a:r>
+            <a:endParaRPr lang="en-IN" sz="1500">
+              <a:solidFill>
+                <a:srgbClr val="E8F4F8"/>
+              </a:solidFill>
+              <a:latin typeface="Segoe UI"/>
+              <a:cs typeface="Segoe UI"/>
+            </a:endParaRPr>
+          </a:p>
+        </p:txBody>
+      </p:sp>
+      <p:sp>
+        <p:nvSpPr>
+          <p:cNvPr id="9" name="Oval 8">
+            <a:extLst>
+              <a:ext uri="{FF2B5EF4-FFF2-40B4-BE49-F238E27FC236}">
+                <a16:creationId xmlns:a16="http://schemas.microsoft.com/office/drawing/2014/main" id="{7FF21B8E-1D4C-4665-95D9-9BE60D55D605}"/>
+              </a:ext>
+            </a:extLst>
+          </p:cNvPr>
+          <p:cNvSpPr/>
+          <p:nvPr/>
+        </p:nvSpPr>
+        <p:spPr>
+          <a:xfrm>
+            <a:off x="571500" y="3136900"/>
+            <a:ext cx="355600" cy="355600"/>
+          </a:xfrm>
+          <a:prstGeom prst="ellipse">
+            <a:avLst/>
+          </a:prstGeom>
+          <a:solidFill>
+            <a:srgbClr val="7C4DFF"/>
+          </a:solidFill>
+          <a:ln w="15875" cap="flat" cmpd="sng" algn="ctr">
+            <a:noFill/>
+            <a:prstDash val="solid"/>
+          </a:ln>
+        </p:spPr>
+        <p:style>
+          <a:lnRef idx="2">
+            <a:schemeClr val="accent1">
+              <a:shade val="15000"/>
+            </a:schemeClr>
+          </a:lnRef>
+          <a:fillRef idx="1">
+            <a:schemeClr val="accent1"/>
+          </a:fillRef>
+          <a:effectRef idx="0">
+            <a:schemeClr val="accent1"/>
+          </a:effectRef>
+          <a:fontRef idx="minor">
+            <a:schemeClr val="lt1"/>
+          </a:fontRef>
+        </p:style>
+        <p:txBody>
+          <a:bodyPr vertOverflow="clip" horzOverflow="clip" wrap="none" rtlCol="0" anchor="ctr" anchorCtr="0">
+            <a:noAutofit/>
+          </a:bodyPr>
+          <a:lstStyle/>
+          <a:p>
+            <a:pPr algn="l"/>
+            <a:r>
+              <a:rPr lang="en-IN" sz="1400" b="1">
+                <a:solidFill>
+                  <a:srgbClr val="FFFFFF"/>
+                </a:solidFill>
+                <a:latin typeface="Segoe UI"/>
+                <a:cs typeface="Segoe UI"/>
+              </a:rPr>
+              <a:t>2</a:t>
+            </a:r>
+          </a:p>
+        </p:txBody>
+      </p:sp>
+      <p:sp>
+        <p:nvSpPr>
+          <p:cNvPr id="10" name="TextBox 9">
+            <a:extLst>
+              <a:ext uri="{FF2B5EF4-FFF2-40B4-BE49-F238E27FC236}">
+                <a16:creationId xmlns:a16="http://schemas.microsoft.com/office/drawing/2014/main" id="{FEB1096B-552E-49F8-A85C-3E5ECC0F9D62}"/>
+              </a:ext>
+            </a:extLst>
+          </p:cNvPr>
+          <p:cNvSpPr txBox="1"/>
+          <p:nvPr/>
+        </p:nvSpPr>
+        <p:spPr>
+          <a:xfrm>
+            <a:off x="1079500" y="3136900"/>
+            <a:ext cx="7556500" cy="457200"/>
+          </a:xfrm>
+          <a:prstGeom prst="rect">
+            <a:avLst/>
+          </a:prstGeom>
+          <a:noFill/>
+        </p:spPr>
+        <p:txBody>
+          <a:bodyPr vertOverflow="overflow" vert="horz" wrap="square" rtlCol="0" anchor="t" anchorCtr="0">
+            <a:noAutofit/>
+          </a:bodyPr>
+          <a:lstStyle/>
+          <a:p>
+            <a:pPr algn="l"/>
+            <a:r>
+              <a:rPr lang="en-US" sz="1500">
+                <a:solidFill>
+                  <a:srgbClr val="E8F4F8"/>
+                </a:solidFill>
+                <a:latin typeface="Segoe UI"/>
+                <a:cs typeface="Segoe UI"/>
+              </a:rPr>
+              <a:t>Define StoreContext : DbContext exposing DbSet&lt;Product&gt; Products</a:t>
+            </a:r>
+            <a:endParaRPr lang="en-IN" sz="1500">
+              <a:solidFill>
+                <a:srgbClr val="E8F4F8"/>
+              </a:solidFill>
+              <a:latin typeface="Segoe UI"/>
+              <a:cs typeface="Segoe UI"/>
+            </a:endParaRPr>
+          </a:p>
+        </p:txBody>
+      </p:sp>
+      <p:sp>
+        <p:nvSpPr>
+          <p:cNvPr id="11" name="Oval 10">
+            <a:extLst>
+              <a:ext uri="{FF2B5EF4-FFF2-40B4-BE49-F238E27FC236}">
+                <a16:creationId xmlns:a16="http://schemas.microsoft.com/office/drawing/2014/main" id="{252A523C-20F0-4AB0-BB6F-671D55EC59F8}"/>
+              </a:ext>
+            </a:extLst>
+          </p:cNvPr>
+          <p:cNvSpPr/>
+          <p:nvPr/>
+        </p:nvSpPr>
+        <p:spPr>
+          <a:xfrm>
+            <a:off x="571500" y="3670300"/>
+            <a:ext cx="355600" cy="355600"/>
+          </a:xfrm>
+          <a:prstGeom prst="ellipse">
+            <a:avLst/>
+          </a:prstGeom>
+          <a:solidFill>
+            <a:srgbClr val="7C4DFF"/>
+          </a:solidFill>
+          <a:ln w="15875" cap="flat" cmpd="sng" algn="ctr">
+            <a:noFill/>
+            <a:prstDash val="solid"/>
+          </a:ln>
+        </p:spPr>
+        <p:style>
+          <a:lnRef idx="2">
+            <a:schemeClr val="accent1">
+              <a:shade val="15000"/>
+            </a:schemeClr>
+          </a:lnRef>
+          <a:fillRef idx="1">
+            <a:schemeClr val="accent1"/>
+          </a:fillRef>
+          <a:effectRef idx="0">
+            <a:schemeClr val="accent1"/>
+          </a:effectRef>
+          <a:fontRef idx="minor">
+            <a:schemeClr val="lt1"/>
+          </a:fontRef>
+        </p:style>
+        <p:txBody>
+          <a:bodyPr vertOverflow="clip" horzOverflow="clip" wrap="none" rtlCol="0" anchor="ctr" anchorCtr="0">
+            <a:noAutofit/>
+          </a:bodyPr>
+          <a:lstStyle/>
+          <a:p>
+            <a:pPr algn="l"/>
+            <a:r>
+              <a:rPr lang="en-IN" sz="1400" b="1">
+                <a:solidFill>
+                  <a:srgbClr val="FFFFFF"/>
+                </a:solidFill>
+                <a:latin typeface="Segoe UI"/>
+                <a:cs typeface="Segoe UI"/>
+              </a:rPr>
+              <a:t>3</a:t>
+            </a:r>
+          </a:p>
+        </p:txBody>
+      </p:sp>
+      <p:sp>
+        <p:nvSpPr>
+          <p:cNvPr id="12" name="TextBox 11">
+            <a:extLst>
+              <a:ext uri="{FF2B5EF4-FFF2-40B4-BE49-F238E27FC236}">
+                <a16:creationId xmlns:a16="http://schemas.microsoft.com/office/drawing/2014/main" id="{478D9BBE-B733-4B8D-A9D3-0AEF5DF4F0EB}"/>
+              </a:ext>
+            </a:extLst>
+          </p:cNvPr>
+          <p:cNvSpPr txBox="1"/>
+          <p:nvPr/>
+        </p:nvSpPr>
+        <p:spPr>
+          <a:xfrm>
+            <a:off x="1079500" y="3670300"/>
+            <a:ext cx="7556500" cy="457200"/>
+          </a:xfrm>
+          <a:prstGeom prst="rect">
+            <a:avLst/>
+          </a:prstGeom>
+          <a:noFill/>
+        </p:spPr>
+        <p:txBody>
+          <a:bodyPr vertOverflow="overflow" vert="horz" wrap="square" rtlCol="0" anchor="t" anchorCtr="0">
+            <a:noAutofit/>
+          </a:bodyPr>
+          <a:lstStyle/>
+          <a:p>
+            <a:pPr algn="l"/>
+            <a:r>
+              <a:rPr lang="en-IN" sz="1500">
+                <a:solidFill>
+                  <a:srgbClr val="E8F4F8"/>
+                </a:solidFill>
+                <a:latin typeface="Segoe UI"/>
+                <a:cs typeface="Segoe UI"/>
+              </a:rPr>
+              <a:t>Override OnConfiguring with UseSqlServer("...")</a:t>
+            </a:r>
+          </a:p>
+        </p:txBody>
+      </p:sp>
+      <p:sp>
+        <p:nvSpPr>
+          <p:cNvPr id="13" name="Oval 12">
+            <a:extLst>
+              <a:ext uri="{FF2B5EF4-FFF2-40B4-BE49-F238E27FC236}">
+                <a16:creationId xmlns:a16="http://schemas.microsoft.com/office/drawing/2014/main" id="{13472253-751F-452E-99F1-67E1162614E1}"/>
+              </a:ext>
+            </a:extLst>
+          </p:cNvPr>
+          <p:cNvSpPr/>
+          <p:nvPr/>
+        </p:nvSpPr>
+        <p:spPr>
+          <a:xfrm>
+            <a:off x="571500" y="4203700"/>
+            <a:ext cx="355600" cy="355600"/>
+          </a:xfrm>
+          <a:prstGeom prst="ellipse">
+            <a:avLst/>
+          </a:prstGeom>
+          <a:solidFill>
+            <a:srgbClr val="7C4DFF"/>
+          </a:solidFill>
+          <a:ln w="15875" cap="flat" cmpd="sng" algn="ctr">
+            <a:noFill/>
+            <a:prstDash val="solid"/>
+          </a:ln>
+        </p:spPr>
+        <p:style>
+          <a:lnRef idx="2">
+            <a:schemeClr val="accent1">
+              <a:shade val="15000"/>
+            </a:schemeClr>
+          </a:lnRef>
+          <a:fillRef idx="1">
+            <a:schemeClr val="accent1"/>
+          </a:fillRef>
+          <a:effectRef idx="0">
+            <a:schemeClr val="accent1"/>
+          </a:effectRef>
+          <a:fontRef idx="minor">
+            <a:schemeClr val="lt1"/>
+          </a:fontRef>
+        </p:style>
+        <p:txBody>
+          <a:bodyPr vertOverflow="clip" horzOverflow="clip" wrap="none" rtlCol="0" anchor="ctr" anchorCtr="0">
+            <a:noAutofit/>
+          </a:bodyPr>
+          <a:lstStyle/>
+          <a:p>
+            <a:pPr algn="l"/>
+            <a:r>
+              <a:rPr lang="en-IN" sz="1400" b="1">
+                <a:solidFill>
+                  <a:srgbClr val="FFFFFF"/>
+                </a:solidFill>
+                <a:latin typeface="Segoe UI"/>
+                <a:cs typeface="Segoe UI"/>
+              </a:rPr>
+              <a:t>4</a:t>
+            </a:r>
+          </a:p>
+        </p:txBody>
+      </p:sp>
+      <p:sp>
+        <p:nvSpPr>
+          <p:cNvPr id="14" name="TextBox 13">
+            <a:extLst>
+              <a:ext uri="{FF2B5EF4-FFF2-40B4-BE49-F238E27FC236}">
+                <a16:creationId xmlns:a16="http://schemas.microsoft.com/office/drawing/2014/main" id="{414FA31B-8B8C-4B17-A8F2-9C5E2B226171}"/>
+              </a:ext>
+            </a:extLst>
+          </p:cNvPr>
+          <p:cNvSpPr txBox="1"/>
+          <p:nvPr/>
+        </p:nvSpPr>
+        <p:spPr>
+          <a:xfrm>
+            <a:off x="1079500" y="4203700"/>
+            <a:ext cx="7556500" cy="457200"/>
+          </a:xfrm>
+          <a:prstGeom prst="rect">
+            <a:avLst/>
+          </a:prstGeom>
+          <a:noFill/>
+        </p:spPr>
+        <p:txBody>
+          <a:bodyPr vertOverflow="overflow" vert="horz" wrap="square" rtlCol="0" anchor="t" anchorCtr="0">
+            <a:noAutofit/>
+          </a:bodyPr>
+          <a:lstStyle/>
+          <a:p>
+            <a:pPr algn="l"/>
+            <a:r>
+              <a:rPr lang="en-US" sz="1500">
+                <a:solidFill>
+                  <a:srgbClr val="E8F4F8"/>
+                </a:solidFill>
+                <a:latin typeface="Segoe UI"/>
+                <a:cs typeface="Segoe UI"/>
+              </a:rPr>
+              <a:t>Print context.Model.GetEntityTypes() to verify mapping</a:t>
+            </a:r>
+            <a:endParaRPr lang="en-IN" sz="1500">
+              <a:solidFill>
+                <a:srgbClr val="E8F4F8"/>
+              </a:solidFill>
+              <a:latin typeface="Segoe UI"/>
+              <a:cs typeface="Segoe UI"/>
+            </a:endParaRPr>
+          </a:p>
+        </p:txBody>
+      </p:sp>
+      <p:sp>
+        <p:nvSpPr>
+          <p:cNvPr id="15" name="Rectangle: Rounded Corners 14">
+            <a:extLst>
+              <a:ext uri="{FF2B5EF4-FFF2-40B4-BE49-F238E27FC236}">
+                <a16:creationId xmlns:a16="http://schemas.microsoft.com/office/drawing/2014/main" id="{7D3322FB-8234-4876-8776-C37ABF3701B5}"/>
+              </a:ext>
+            </a:extLst>
+          </p:cNvPr>
+          <p:cNvSpPr/>
+          <p:nvPr/>
+        </p:nvSpPr>
+        <p:spPr>
+          <a:xfrm>
+            <a:off x="508000" y="5842000"/>
+            <a:ext cx="8128000" cy="736600"/>
+          </a:xfrm>
+          <a:prstGeom prst="roundRect">
+            <a:avLst/>
+          </a:prstGeom>
+          <a:solidFill>
+            <a:srgbClr val="1A3A52"/>
+          </a:solidFill>
+          <a:ln w="19050" cap="flat" cmpd="sng" algn="ctr">
+            <a:solidFill>
+              <a:srgbClr val="64FFDA"/>
+            </a:solidFill>
+            <a:prstDash val="solid"/>
+          </a:ln>
+        </p:spPr>
+        <p:style>
+          <a:lnRef idx="2">
+            <a:schemeClr val="accent1">
+              <a:shade val="15000"/>
+            </a:schemeClr>
+          </a:lnRef>
+          <a:fillRef idx="1">
+            <a:schemeClr val="accent1"/>
+          </a:fillRef>
+          <a:effectRef idx="0">
+            <a:schemeClr val="accent1"/>
+          </a:effectRef>
+          <a:fontRef idx="minor">
+            <a:schemeClr val="lt1"/>
+          </a:fontRef>
+        </p:style>
+        <p:txBody>
+          <a:bodyPr vertOverflow="clip" horzOverflow="clip" rtlCol="0" anchor="ctr" anchorCtr="0">
+            <a:noAutofit/>
+          </a:bodyPr>
+          <a:lstStyle/>
+          <a:p>
+            <a:pPr algn="l"/>
+            <a:r>
+              <a:rPr lang="en-US" sz="1300">
+                <a:solidFill>
+                  <a:srgbClr val="E8F4F8"/>
+                </a:solidFill>
+                <a:latin typeface="Segoe UI"/>
+                <a:cs typeface="Segoe UI"/>
+              </a:rPr>
+              <a:t>💡 HINT  Add [Column(TypeName="decimal(18,2)")] on Price to control precision.</a:t>
+            </a:r>
+            <a:endParaRPr lang="en-IN" sz="1300">
+              <a:solidFill>
+                <a:srgbClr val="E8F4F8"/>
+              </a:solidFill>
+              <a:latin typeface="Segoe UI"/>
+              <a:cs typeface="Segoe UI"/>
+            </a:endParaRPr>
           </a:p>
         </p:txBody>
       </p:sp>
     </p:spTree>
+    <p:extLst>
+      <p:ext uri="{BB962C8B-B14F-4D97-AF65-F5344CB8AC3E}">
+        <p14:creationId xmlns:p14="http://schemas.microsoft.com/office/powerpoint/2010/main" val="1342234623"/>
+      </p:ext>
+    </p:extLst>
   </p:cSld>
   <p:clrMapOvr>
     <a:masterClrMapping/>
@@ -17477,7 +23201,7 @@
           <a:lstStyle/>
           <a:p>
             <a:r>
-              <a:t>Integration with ASP.NET Core</a:t>
+              <a:t>DbSet</a:t>
             </a:r>
           </a:p>
         </p:txBody>
@@ -17497,23 +23221,73 @@
           <a:bodyPr/>
           <a:lstStyle/>
           <a:p>
-            <a:r>
-              <a:t>Register DbContext in DI</a:t>
-            </a:r>
-          </a:p>
-          <a:p>
-            <a:r>
-              <a:t>Use connection string</a:t>
-            </a:r>
-          </a:p>
-          <a:p>
-            <a:r>
-              <a:t>Inject into controllers</a:t>
+            <a:pPr marL="285750" indent="-285750">
+              <a:buFont typeface="Arial"/>
+              <a:buChar char="•"/>
+            </a:pPr>
+            <a:r>
+              <a:rPr lang="en-US" sz="1800" dirty="0"/>
+              <a:t>DbSet&lt;TEntity&gt; — a queryable collection mapped to a table</a:t>
+            </a:r>
+          </a:p>
+          <a:p>
+            <a:pPr marL="285750" indent="-285750">
+              <a:buFont typeface="Arial"/>
+              <a:buChar char="•"/>
+            </a:pPr>
+            <a:r>
+              <a:rPr lang="en-US" sz="1800" dirty="0"/>
+              <a:t>Declared as a property on your DbContext class</a:t>
+            </a:r>
+          </a:p>
+          <a:p>
+            <a:pPr marL="285750" indent="-285750">
+              <a:buFont typeface="Arial"/>
+              <a:buChar char="•"/>
+            </a:pPr>
+            <a:r>
+              <a:rPr lang="en-US" sz="1800" dirty="0"/>
+              <a:t>Supports LINQ: Where, Select, OrderBy, Include, FirstOrDefault</a:t>
+            </a:r>
+          </a:p>
+          <a:p>
+            <a:pPr marL="285750" indent="-285750">
+              <a:buFont typeface="Arial"/>
+              <a:buChar char="•"/>
+            </a:pPr>
+            <a:r>
+              <a:rPr lang="en-US" sz="1800" dirty="0"/>
+              <a:t>CRUD methods: Add, AddRange, Remove, Update, Find</a:t>
+            </a:r>
+          </a:p>
+          <a:p>
+            <a:pPr marL="285750" indent="-285750">
+              <a:buFont typeface="Arial"/>
+              <a:buChar char="•"/>
+            </a:pPr>
+            <a:r>
+              <a:rPr lang="en-US" sz="1800" dirty="0"/>
+              <a:t>Implements IQueryable — query is built up, sent on enumeration</a:t>
+            </a:r>
+          </a:p>
+          <a:p>
+            <a:pPr marL="285750" indent="-285750">
+              <a:buFont typeface="Arial"/>
+              <a:buChar char="•"/>
+            </a:pPr>
+            <a:r>
+              <a:rPr lang="en-US" sz="1800" dirty="0"/>
+              <a:t>AsNoTracking() for read-only scenarios — faster, less memory</a:t>
             </a:r>
           </a:p>
         </p:txBody>
       </p:sp>
     </p:spTree>
+    <p:extLst>
+      <p:ext uri="{BB962C8B-B14F-4D97-AF65-F5344CB8AC3E}">
+        <p14:creationId xmlns:p14="http://schemas.microsoft.com/office/powerpoint/2010/main" val="878243637"/>
+      </p:ext>
+    </p:extLst>
   </p:cSld>
   <p:clrMapOvr>
     <a:masterClrMapping/>
@@ -17554,7 +23328,7 @@
           <a:lstStyle/>
           <a:p>
             <a:r>
-              <a:t>Configure DbContext</a:t>
+              <a:t>Integration with ASP.NET Core</a:t>
             </a:r>
           </a:p>
         </p:txBody>
@@ -17569,23 +23343,546 @@
             <p:ph idx="1"/>
           </p:nvPr>
         </p:nvSpPr>
-        <p:spPr/>
+        <p:spPr>
+          <a:xfrm>
+            <a:off x="768096" y="2286000"/>
+            <a:ext cx="7290055" cy="2540000"/>
+          </a:xfrm>
+        </p:spPr>
         <p:txBody>
           <a:bodyPr/>
           <a:lstStyle/>
           <a:p>
-            <a:r>
-              <a:t>builder.Services.AddDbContext&lt;AppDbContext&gt;(options =&gt;</a:t>
-            </a:r>
-          </a:p>
-          <a:p>
-            <a:r>
-              <a:t>options.UseSqlServer(connectionString));</a:t>
-            </a:r>
+            <a:pPr marL="285750" indent="-285750">
+              <a:buFont typeface="Arial"/>
+              <a:buChar char="•"/>
+            </a:pPr>
+            <a:r>
+              <a:rPr lang="en-US" sz="1800" dirty="0"/>
+              <a:t>Register DbContext as a service in Program.cs via AddDbContext()</a:t>
+            </a:r>
+          </a:p>
+          <a:p>
+            <a:pPr marL="285750" indent="-285750">
+              <a:buFont typeface="Arial"/>
+              <a:buChar char="•"/>
+            </a:pPr>
+            <a:r>
+              <a:rPr lang="en-US" sz="1800" dirty="0"/>
+              <a:t>Store connection strings in appsettings.json — not in code</a:t>
+            </a:r>
+          </a:p>
+          <a:p>
+            <a:pPr marL="285750" indent="-285750">
+              <a:buFont typeface="Arial"/>
+              <a:buChar char="•"/>
+            </a:pPr>
+            <a:r>
+              <a:rPr lang="en-US" sz="1800" dirty="0"/>
+              <a:t>Use IConfiguration to read connection string by key</a:t>
+            </a:r>
+          </a:p>
+          <a:p>
+            <a:pPr marL="285750" indent="-285750">
+              <a:buFont typeface="Arial"/>
+              <a:buChar char="•"/>
+            </a:pPr>
+            <a:r>
+              <a:rPr lang="en-US" sz="1800" dirty="0"/>
+              <a:t>DbContext is injected into controllers/services via constructor</a:t>
+            </a:r>
+          </a:p>
+          <a:p>
+            <a:pPr marL="285750" indent="-285750">
+              <a:buFont typeface="Arial"/>
+              <a:buChar char="•"/>
+            </a:pPr>
+            <a:r>
+              <a:rPr lang="en-US" sz="1800" dirty="0"/>
+              <a:t>Scoped lifetime — automatically disposed at end of request</a:t>
+            </a:r>
+          </a:p>
+          <a:p>
+            <a:pPr marL="285750" indent="-285750">
+              <a:buFont typeface="Arial"/>
+              <a:buChar char="•"/>
+            </a:pPr>
+            <a:r>
+              <a:rPr lang="en-US" sz="1800" dirty="0"/>
+              <a:t>Use IDbContextFactory for background services or Blazor Server</a:t>
+            </a:r>
+          </a:p>
+        </p:txBody>
+      </p:sp>
+      <p:sp>
+        <p:nvSpPr>
+          <p:cNvPr id="4" name="Rectangle: Rounded Corners 3">
+            <a:extLst>
+              <a:ext uri="{FF2B5EF4-FFF2-40B4-BE49-F238E27FC236}">
+                <a16:creationId xmlns:a16="http://schemas.microsoft.com/office/drawing/2014/main" id="{DADC7D29-D462-4C94-B431-64FBB7D18FF3}"/>
+              </a:ext>
+            </a:extLst>
+          </p:cNvPr>
+          <p:cNvSpPr/>
+          <p:nvPr/>
+        </p:nvSpPr>
+        <p:spPr>
+          <a:xfrm>
+            <a:off x="635000" y="5143500"/>
+            <a:ext cx="1524000" cy="762000"/>
+          </a:xfrm>
+          <a:prstGeom prst="roundRect">
+            <a:avLst/>
+          </a:prstGeom>
+          <a:solidFill>
+            <a:srgbClr val="00E5FF"/>
+          </a:solidFill>
+          <a:ln w="15875" cap="flat" cmpd="sng" algn="ctr">
+            <a:noFill/>
+            <a:prstDash val="solid"/>
+          </a:ln>
+        </p:spPr>
+        <p:style>
+          <a:lnRef idx="2">
+            <a:schemeClr val="accent1">
+              <a:shade val="15000"/>
+            </a:schemeClr>
+          </a:lnRef>
+          <a:fillRef idx="1">
+            <a:schemeClr val="accent1"/>
+          </a:fillRef>
+          <a:effectRef idx="0">
+            <a:schemeClr val="accent1"/>
+          </a:effectRef>
+          <a:fontRef idx="minor">
+            <a:schemeClr val="lt1"/>
+          </a:fontRef>
+        </p:style>
+        <p:txBody>
+          <a:bodyPr vertOverflow="clip" horzOverflow="clip" rtlCol="0" anchor="ctr" anchorCtr="0">
+            <a:noAutofit/>
+          </a:bodyPr>
+          <a:lstStyle/>
+          <a:p>
+            <a:pPr algn="l"/>
+            <a:r>
+              <a:rPr lang="en-IN" sz="1200" b="1">
+                <a:solidFill>
+                  <a:srgbClr val="0A1929"/>
+                </a:solidFill>
+                <a:latin typeface="Segoe UI"/>
+                <a:cs typeface="Segoe UI"/>
+              </a:rPr>
+              <a:t>HTTP
+Request</a:t>
+            </a:r>
+          </a:p>
+        </p:txBody>
+      </p:sp>
+      <p:sp>
+        <p:nvSpPr>
+          <p:cNvPr id="5" name="Rectangle: Rounded Corners 4">
+            <a:extLst>
+              <a:ext uri="{FF2B5EF4-FFF2-40B4-BE49-F238E27FC236}">
+                <a16:creationId xmlns:a16="http://schemas.microsoft.com/office/drawing/2014/main" id="{AD676AD0-A705-4B48-B94B-6A42C395747A}"/>
+              </a:ext>
+            </a:extLst>
+          </p:cNvPr>
+          <p:cNvSpPr/>
+          <p:nvPr/>
+        </p:nvSpPr>
+        <p:spPr>
+          <a:xfrm>
+            <a:off x="2476500" y="5143500"/>
+            <a:ext cx="1524000" cy="762000"/>
+          </a:xfrm>
+          <a:prstGeom prst="roundRect">
+            <a:avLst/>
+          </a:prstGeom>
+          <a:solidFill>
+            <a:srgbClr val="64FFDA"/>
+          </a:solidFill>
+          <a:ln w="15875" cap="flat" cmpd="sng" algn="ctr">
+            <a:noFill/>
+            <a:prstDash val="solid"/>
+          </a:ln>
+        </p:spPr>
+        <p:style>
+          <a:lnRef idx="2">
+            <a:schemeClr val="accent1">
+              <a:shade val="15000"/>
+            </a:schemeClr>
+          </a:lnRef>
+          <a:fillRef idx="1">
+            <a:schemeClr val="accent1"/>
+          </a:fillRef>
+          <a:effectRef idx="0">
+            <a:schemeClr val="accent1"/>
+          </a:effectRef>
+          <a:fontRef idx="minor">
+            <a:schemeClr val="lt1"/>
+          </a:fontRef>
+        </p:style>
+        <p:txBody>
+          <a:bodyPr vertOverflow="clip" horzOverflow="clip" rtlCol="0" anchor="ctr" anchorCtr="0">
+            <a:noAutofit/>
+          </a:bodyPr>
+          <a:lstStyle/>
+          <a:p>
+            <a:pPr algn="l"/>
+            <a:r>
+              <a:rPr lang="en-IN" sz="1200" b="1">
+                <a:solidFill>
+                  <a:srgbClr val="0A1929"/>
+                </a:solidFill>
+                <a:latin typeface="Segoe UI"/>
+                <a:cs typeface="Segoe UI"/>
+              </a:rPr>
+              <a:t>Controller</a:t>
+            </a:r>
+          </a:p>
+        </p:txBody>
+      </p:sp>
+      <p:sp>
+        <p:nvSpPr>
+          <p:cNvPr id="6" name="Rectangle: Rounded Corners 5">
+            <a:extLst>
+              <a:ext uri="{FF2B5EF4-FFF2-40B4-BE49-F238E27FC236}">
+                <a16:creationId xmlns:a16="http://schemas.microsoft.com/office/drawing/2014/main" id="{2C3EB677-1A25-41A3-BE95-669A9D258214}"/>
+              </a:ext>
+            </a:extLst>
+          </p:cNvPr>
+          <p:cNvSpPr/>
+          <p:nvPr/>
+        </p:nvSpPr>
+        <p:spPr>
+          <a:xfrm>
+            <a:off x="4318000" y="5143500"/>
+            <a:ext cx="1524000" cy="762000"/>
+          </a:xfrm>
+          <a:prstGeom prst="roundRect">
+            <a:avLst/>
+          </a:prstGeom>
+          <a:solidFill>
+            <a:srgbClr val="7C4DFF"/>
+          </a:solidFill>
+          <a:ln w="15875" cap="flat" cmpd="sng" algn="ctr">
+            <a:noFill/>
+            <a:prstDash val="solid"/>
+          </a:ln>
+        </p:spPr>
+        <p:style>
+          <a:lnRef idx="2">
+            <a:schemeClr val="accent1">
+              <a:shade val="15000"/>
+            </a:schemeClr>
+          </a:lnRef>
+          <a:fillRef idx="1">
+            <a:schemeClr val="accent1"/>
+          </a:fillRef>
+          <a:effectRef idx="0">
+            <a:schemeClr val="accent1"/>
+          </a:effectRef>
+          <a:fontRef idx="minor">
+            <a:schemeClr val="lt1"/>
+          </a:fontRef>
+        </p:style>
+        <p:txBody>
+          <a:bodyPr vertOverflow="clip" horzOverflow="clip" rtlCol="0" anchor="ctr" anchorCtr="0">
+            <a:noAutofit/>
+          </a:bodyPr>
+          <a:lstStyle/>
+          <a:p>
+            <a:pPr algn="l"/>
+            <a:r>
+              <a:rPr lang="en-IN" sz="1200" b="1">
+                <a:solidFill>
+                  <a:srgbClr val="FFFFFF"/>
+                </a:solidFill>
+                <a:latin typeface="Segoe UI"/>
+                <a:cs typeface="Segoe UI"/>
+              </a:rPr>
+              <a:t>DbContext
+(scoped)</a:t>
+            </a:r>
+          </a:p>
+        </p:txBody>
+      </p:sp>
+      <p:sp>
+        <p:nvSpPr>
+          <p:cNvPr id="7" name="Rectangle: Rounded Corners 6">
+            <a:extLst>
+              <a:ext uri="{FF2B5EF4-FFF2-40B4-BE49-F238E27FC236}">
+                <a16:creationId xmlns:a16="http://schemas.microsoft.com/office/drawing/2014/main" id="{CDACFE3E-0F97-4043-8C11-7F74044037F6}"/>
+              </a:ext>
+            </a:extLst>
+          </p:cNvPr>
+          <p:cNvSpPr/>
+          <p:nvPr/>
+        </p:nvSpPr>
+        <p:spPr>
+          <a:xfrm>
+            <a:off x="6159500" y="5143500"/>
+            <a:ext cx="1524000" cy="762000"/>
+          </a:xfrm>
+          <a:prstGeom prst="roundRect">
+            <a:avLst/>
+          </a:prstGeom>
+          <a:solidFill>
+            <a:srgbClr val="FF6E40"/>
+          </a:solidFill>
+          <a:ln w="15875" cap="flat" cmpd="sng" algn="ctr">
+            <a:noFill/>
+            <a:prstDash val="solid"/>
+          </a:ln>
+        </p:spPr>
+        <p:style>
+          <a:lnRef idx="2">
+            <a:schemeClr val="accent1">
+              <a:shade val="15000"/>
+            </a:schemeClr>
+          </a:lnRef>
+          <a:fillRef idx="1">
+            <a:schemeClr val="accent1"/>
+          </a:fillRef>
+          <a:effectRef idx="0">
+            <a:schemeClr val="accent1"/>
+          </a:effectRef>
+          <a:fontRef idx="minor">
+            <a:schemeClr val="lt1"/>
+          </a:fontRef>
+        </p:style>
+        <p:txBody>
+          <a:bodyPr vertOverflow="clip" horzOverflow="clip" rtlCol="0" anchor="ctr" anchorCtr="0">
+            <a:noAutofit/>
+          </a:bodyPr>
+          <a:lstStyle/>
+          <a:p>
+            <a:pPr algn="l"/>
+            <a:r>
+              <a:rPr lang="en-IN" sz="1200" b="1">
+                <a:solidFill>
+                  <a:srgbClr val="FFFFFF"/>
+                </a:solidFill>
+                <a:latin typeface="Segoe UI"/>
+                <a:cs typeface="Segoe UI"/>
+              </a:rPr>
+              <a:t>Database
+Provider</a:t>
+            </a:r>
+          </a:p>
+        </p:txBody>
+      </p:sp>
+      <p:sp>
+        <p:nvSpPr>
+          <p:cNvPr id="8" name="Arrow: Right 7">
+            <a:extLst>
+              <a:ext uri="{FF2B5EF4-FFF2-40B4-BE49-F238E27FC236}">
+                <a16:creationId xmlns:a16="http://schemas.microsoft.com/office/drawing/2014/main" id="{FA88CC84-68C6-4877-A89B-74A28DCCFB89}"/>
+              </a:ext>
+            </a:extLst>
+          </p:cNvPr>
+          <p:cNvSpPr/>
+          <p:nvPr/>
+        </p:nvSpPr>
+        <p:spPr>
+          <a:xfrm>
+            <a:off x="2159000" y="5359400"/>
+            <a:ext cx="317500" cy="317500"/>
+          </a:xfrm>
+          <a:prstGeom prst="rightArrow">
+            <a:avLst/>
+          </a:prstGeom>
+          <a:solidFill>
+            <a:srgbClr val="00E5FF"/>
+          </a:solidFill>
+          <a:ln w="15875" cap="flat" cmpd="sng" algn="ctr">
+            <a:noFill/>
+            <a:prstDash val="solid"/>
+          </a:ln>
+        </p:spPr>
+        <p:style>
+          <a:lnRef idx="2">
+            <a:schemeClr val="accent1">
+              <a:shade val="15000"/>
+            </a:schemeClr>
+          </a:lnRef>
+          <a:fillRef idx="1">
+            <a:schemeClr val="accent1"/>
+          </a:fillRef>
+          <a:effectRef idx="0">
+            <a:schemeClr val="accent1"/>
+          </a:effectRef>
+          <a:fontRef idx="minor">
+            <a:schemeClr val="lt1"/>
+          </a:fontRef>
+        </p:style>
+        <p:txBody>
+          <a:bodyPr vertOverflow="clip" horzOverflow="clip" rtlCol="0" anchor="t"/>
+          <a:lstStyle/>
+          <a:p>
+            <a:pPr algn="l"/>
+            <a:endParaRPr lang="en-IN"/>
+          </a:p>
+        </p:txBody>
+      </p:sp>
+      <p:sp>
+        <p:nvSpPr>
+          <p:cNvPr id="9" name="Arrow: Right 8">
+            <a:extLst>
+              <a:ext uri="{FF2B5EF4-FFF2-40B4-BE49-F238E27FC236}">
+                <a16:creationId xmlns:a16="http://schemas.microsoft.com/office/drawing/2014/main" id="{A30729DF-51BB-4DEA-90FB-D76DD44A4583}"/>
+              </a:ext>
+            </a:extLst>
+          </p:cNvPr>
+          <p:cNvSpPr/>
+          <p:nvPr/>
+        </p:nvSpPr>
+        <p:spPr>
+          <a:xfrm>
+            <a:off x="4000500" y="5359400"/>
+            <a:ext cx="317500" cy="317500"/>
+          </a:xfrm>
+          <a:prstGeom prst="rightArrow">
+            <a:avLst/>
+          </a:prstGeom>
+          <a:solidFill>
+            <a:srgbClr val="00E5FF"/>
+          </a:solidFill>
+          <a:ln w="15875" cap="flat" cmpd="sng" algn="ctr">
+            <a:noFill/>
+            <a:prstDash val="solid"/>
+          </a:ln>
+        </p:spPr>
+        <p:style>
+          <a:lnRef idx="2">
+            <a:schemeClr val="accent1">
+              <a:shade val="15000"/>
+            </a:schemeClr>
+          </a:lnRef>
+          <a:fillRef idx="1">
+            <a:schemeClr val="accent1"/>
+          </a:fillRef>
+          <a:effectRef idx="0">
+            <a:schemeClr val="accent1"/>
+          </a:effectRef>
+          <a:fontRef idx="minor">
+            <a:schemeClr val="lt1"/>
+          </a:fontRef>
+        </p:style>
+        <p:txBody>
+          <a:bodyPr vertOverflow="clip" horzOverflow="clip" rtlCol="0" anchor="t"/>
+          <a:lstStyle/>
+          <a:p>
+            <a:pPr algn="l"/>
+            <a:endParaRPr lang="en-IN"/>
+          </a:p>
+        </p:txBody>
+      </p:sp>
+      <p:sp>
+        <p:nvSpPr>
+          <p:cNvPr id="10" name="Arrow: Right 9">
+            <a:extLst>
+              <a:ext uri="{FF2B5EF4-FFF2-40B4-BE49-F238E27FC236}">
+                <a16:creationId xmlns:a16="http://schemas.microsoft.com/office/drawing/2014/main" id="{6409D59B-FF75-4016-9FD2-28502D741CE1}"/>
+              </a:ext>
+            </a:extLst>
+          </p:cNvPr>
+          <p:cNvSpPr/>
+          <p:nvPr/>
+        </p:nvSpPr>
+        <p:spPr>
+          <a:xfrm>
+            <a:off x="5842000" y="5359400"/>
+            <a:ext cx="317500" cy="317500"/>
+          </a:xfrm>
+          <a:prstGeom prst="rightArrow">
+            <a:avLst/>
+          </a:prstGeom>
+          <a:solidFill>
+            <a:srgbClr val="00E5FF"/>
+          </a:solidFill>
+          <a:ln w="15875" cap="flat" cmpd="sng" algn="ctr">
+            <a:noFill/>
+            <a:prstDash val="solid"/>
+          </a:ln>
+        </p:spPr>
+        <p:style>
+          <a:lnRef idx="2">
+            <a:schemeClr val="accent1">
+              <a:shade val="15000"/>
+            </a:schemeClr>
+          </a:lnRef>
+          <a:fillRef idx="1">
+            <a:schemeClr val="accent1"/>
+          </a:fillRef>
+          <a:effectRef idx="0">
+            <a:schemeClr val="accent1"/>
+          </a:effectRef>
+          <a:fontRef idx="minor">
+            <a:schemeClr val="lt1"/>
+          </a:fontRef>
+        </p:style>
+        <p:txBody>
+          <a:bodyPr vertOverflow="clip" horzOverflow="clip" rtlCol="0" anchor="t"/>
+          <a:lstStyle/>
+          <a:p>
+            <a:pPr algn="l"/>
+            <a:endParaRPr lang="en-IN"/>
+          </a:p>
+        </p:txBody>
+      </p:sp>
+      <p:sp>
+        <p:nvSpPr>
+          <p:cNvPr id="11" name="TextBox 10">
+            <a:extLst>
+              <a:ext uri="{FF2B5EF4-FFF2-40B4-BE49-F238E27FC236}">
+                <a16:creationId xmlns:a16="http://schemas.microsoft.com/office/drawing/2014/main" id="{2F493319-7922-499E-85A1-3F783841D29F}"/>
+              </a:ext>
+            </a:extLst>
+          </p:cNvPr>
+          <p:cNvSpPr txBox="1"/>
+          <p:nvPr/>
+        </p:nvSpPr>
+        <p:spPr>
+          <a:xfrm>
+            <a:off x="635000" y="6070600"/>
+            <a:ext cx="7683500" cy="279400"/>
+          </a:xfrm>
+          <a:prstGeom prst="rect">
+            <a:avLst/>
+          </a:prstGeom>
+          <a:noFill/>
+        </p:spPr>
+        <p:txBody>
+          <a:bodyPr vertOverflow="overflow" vert="horz" wrap="square" rtlCol="0" anchor="t" anchorCtr="0">
+            <a:spAutoFit/>
+          </a:bodyPr>
+          <a:lstStyle/>
+          <a:p>
+            <a:pPr algn="l"/>
+            <a:r>
+              <a:rPr lang="en-US" sz="1100" i="1">
+                <a:solidFill>
+                  <a:srgbClr val="A0C4D8"/>
+                </a:solidFill>
+              </a:rPr>
+              <a:t>DI container creates a fresh DbContext for every request — disposed automatically</a:t>
+            </a:r>
+            <a:endParaRPr lang="en-IN" sz="1100" i="1">
+              <a:solidFill>
+                <a:srgbClr val="A0C4D8"/>
+              </a:solidFill>
+            </a:endParaRPr>
           </a:p>
         </p:txBody>
       </p:sp>
     </p:spTree>
+    <p:extLst>
+      <p:ext uri="{BB962C8B-B14F-4D97-AF65-F5344CB8AC3E}">
+        <p14:creationId xmlns:p14="http://schemas.microsoft.com/office/powerpoint/2010/main" val="2321909794"/>
+      </p:ext>
+    </p:extLst>
   </p:cSld>
   <p:clrMapOvr>
     <a:masterClrMapping/>
@@ -17594,38 +23891,38 @@
 </file>
 
 <file path=ppt/theme/theme1.xml><?xml version="1.0" encoding="utf-8"?>
-<a:theme xmlns:a="http://schemas.openxmlformats.org/drawingml/2006/main" name="Integral">
+<a:theme xmlns:a="http://schemas.openxmlformats.org/drawingml/2006/main" name="Integral [1779649332364]">
   <a:themeElements>
     <a:clrScheme name="Integral">
       <a:dk1>
-        <a:sysClr val="windowText" lastClr="000000"/>
+        <a:srgbClr val="E8F4F8"/>
       </a:dk1>
       <a:lt1>
-        <a:sysClr val="window" lastClr="FFFFFF"/>
+        <a:srgbClr val="0A1929"/>
       </a:lt1>
       <a:dk2>
-        <a:srgbClr val="335B74"/>
+        <a:srgbClr val="B8D4E3"/>
       </a:dk2>
       <a:lt2>
-        <a:srgbClr val="DFE3E5"/>
+        <a:srgbClr val="13293D"/>
       </a:lt2>
       <a:accent1>
-        <a:srgbClr val="1CADE4"/>
+        <a:srgbClr val="00E5FF"/>
       </a:accent1>
       <a:accent2>
-        <a:srgbClr val="2683C6"/>
+        <a:srgbClr val="00B8D4"/>
       </a:accent2>
       <a:accent3>
-        <a:srgbClr val="27CED7"/>
+        <a:srgbClr val="64FFDA"/>
       </a:accent3>
       <a:accent4>
-        <a:srgbClr val="42BA97"/>
+        <a:srgbClr val="7C4DFF"/>
       </a:accent4>
       <a:accent5>
-        <a:srgbClr val="3E8853"/>
+        <a:srgbClr val="FF6E40"/>
       </a:accent5>
       <a:accent6>
-        <a:srgbClr val="62A39F"/>
+        <a:srgbClr val="FFD740"/>
       </a:accent6>
       <a:hlink>
         <a:srgbClr val="6B9F25"/>
@@ -17636,7 +23933,7 @@
     </a:clrScheme>
     <a:fontScheme name="Integral">
       <a:majorFont>
-        <a:latin typeface="Tw Cen MT Condensed" panose="020B0606020104020203"/>
+        <a:latin typeface="Segoe UI" panose="020B0606020104020203"/>
         <a:ea typeface=""/>
         <a:cs typeface=""/>
         <a:font script="Grek" typeface="Calibri"/>
@@ -17673,7 +23970,7 @@
         <a:font script="Geor" typeface="Sylfaen"/>
       </a:majorFont>
       <a:minorFont>
-        <a:latin typeface="Tw Cen MT" panose="020B0602020104020603"/>
+        <a:latin typeface="Segoe UI" panose="020B0602020104020603"/>
         <a:ea typeface=""/>
         <a:cs typeface=""/>
         <a:font script="Grek" typeface="Calibri"/>
@@ -17859,4 +24156,26 @@
     </a:ext>
   </a:extLst>
 </a:theme>
+</file>
+
+<file path=ppt/webextensions/taskpanes.xml><?xml version="1.0" encoding="utf-8"?>
+<wetp:taskpanes xmlns:wetp="http://schemas.microsoft.com/office/webextensions/taskpanes/2010/11">
+  <wetp:taskpane dockstate="right" visibility="0" width="438" row="0">
+    <wetp:webextensionref xmlns:r="http://schemas.openxmlformats.org/officeDocument/2006/relationships" r:id="rId1"/>
+  </wetp:taskpane>
+</wetp:taskpanes>
+</file>
+
+<file path=ppt/webextensions/webextension1.xml><?xml version="1.0" encoding="utf-8"?>
+<we:webextension xmlns:we="http://schemas.microsoft.com/office/webextensions/webextension/2010/11" id="{DB1FDE86-0AEB-47E0-9369-21CCE65B403D}">
+  <we:reference id="WA200010001" version="1.0.0.1" store="Omex" storeType="OMEX"/>
+  <we:alternateReferences>
+    <we:reference id="WA200010001" version="1.0.0.1" store="WA200010001" storeType="OMEX"/>
+  </we:alternateReferences>
+  <we:properties>
+    <we:property name="claude.fileId" value="&quot;90e5abd2-84a7-46a9-b10c-725280346737&quot;"/>
+  </we:properties>
+  <we:bindings/>
+  <we:snapshot xmlns:r="http://schemas.openxmlformats.org/officeDocument/2006/relationships"/>
+</we:webextension>
 </file>